--- a/Projet_Ethique_IA_Adult_Income.pptx
+++ b/Projet_Ethique_IA_Adult_Income.pptx
@@ -19,9 +19,10 @@
     <p:sldId id="267" r:id="rId13"/>
     <p:sldId id="268" r:id="rId14"/>
     <p:sldId id="269" r:id="rId15"/>
+    <p:sldId id="270" r:id="rId16"/>
   </p:sldIdLst>
   <p:notesMasterIdLst>
-    <p:notesMasterId r:id="rId16"/>
+    <p:notesMasterId r:id="rId17"/>
   </p:notesMasterIdLst>
   <p:sldSz cx="12192000" cy="6858000"/>
   <p:notesSz cx="6858000" cy="12192000"/>
@@ -120,42 +121,43 @@
   <p:extLst>
     <p:ext uri="{521415D9-36F7-43E2-AB2F-B90AF26B5E84}">
       <p14:sectionLst xmlns:p14="http://schemas.microsoft.com/office/powerpoint/2010/main">
-        <p14:section name="Introduction" id="{bd10bb58-eb4f-676e-6825-d5038a46b091}">
+        <p14:section name="Introduction" id="{4921c0e4-2b2e-67f4-ad98-5fdf61943cb9}">
           <p14:sldIdLst>
             <p14:sldId id="256"/>
             <p14:sldId id="257"/>
-          </p14:sldIdLst>
-        </p14:section>
-        <p14:section name="Audit" id="{64da3a87-c575-6fa9-bff7-c04bf112c841}">
-          <p14:sldIdLst>
             <p14:sldId id="258"/>
           </p14:sldIdLst>
         </p14:section>
-        <p14:section name="Méthode" id="{0ef8200f-372b-b818-dc17-f5864db5b8fb}">
+        <p14:section name="Audit" id="{37fd37d3-da0d-7826-c209-2f898b5a24fe}">
           <p14:sldIdLst>
             <p14:sldId id="259"/>
+          </p14:sldIdLst>
+        </p14:section>
+        <p14:section name="Méthode" id="{36cae031-82ae-1f09-839c-4f9b0e4bc3fd}">
+          <p14:sldIdLst>
             <p14:sldId id="260"/>
             <p14:sldId id="261"/>
+            <p14:sldId id="262"/>
           </p14:sldIdLst>
         </p14:section>
-        <p14:section name="Résultats" id="{3d3057bf-a34a-d5bd-55db-158d34f54ecf}">
+        <p14:section name="Résultats" id="{ff3308af-6ff7-6c7d-06dc-142469497137}">
           <p14:sldIdLst>
-            <p14:sldId id="262"/>
             <p14:sldId id="263"/>
             <p14:sldId id="264"/>
             <p14:sldId id="265"/>
+            <p14:sldId id="266"/>
           </p14:sldIdLst>
         </p14:section>
-        <p14:section name="Démo et XAI" id="{703207dd-9c77-c293-e6cf-64bbdc1d5f19}">
+        <p14:section name="Démo et XAI" id="{91e3d659-97d5-643a-5119-23a256727c58}">
           <p14:sldIdLst>
-            <p14:sldId id="266"/>
             <p14:sldId id="267"/>
+            <p14:sldId id="268"/>
           </p14:sldIdLst>
         </p14:section>
-        <p14:section name="Conclusion" id="{d6d7e471-2603-3050-bc78-332f47eac5bf}">
+        <p14:section name="Conclusion" id="{62cfd6c1-5525-c17c-09e5-7fc649243fcf}">
           <p14:sldIdLst>
-            <p14:sldId id="268"/>
             <p14:sldId id="269"/>
+            <p14:sldId id="270"/>
           </p14:sldIdLst>
         </p14:section>
       </p14:sectionLst>
@@ -2089,7 +2091,7 @@
           <a:p>
             <a:r>
               <a:rPr lang="en-US" dirty="0"/>
-              <a:t>Cours 3, slide Benchmark : le fine-tuning complet est la solution premium. Pour un usage bancaire à haut risque, on privilégie équité puis performance. Si le déploiement doit être léger, la distillation est défendable.</a:t>
+              <a:t>Les cases grisées sont des groupes de moins de 20 personnes dans le test. La correction ramène les femmes au niveau des hommes, mais le modèle corrigé sous-estime désormais les hommes blancs (17 % prédits vs 32 % réels).</a:t>
             </a:r>
             <a:endParaRPr lang="en-US" dirty="0"/>
           </a:p>
@@ -2177,7 +2179,7 @@
           <a:p>
             <a:r>
               <a:rPr lang="en-US" dirty="0"/>
-              <a:t>C'est le red teaming contrefactuel. Attention : le notebook compare le LoRA original au fine-tuning complet corrigé, donc deux architectures. L'effet du sexe avant correction est clair, mais pour une comparaison stricte il faudrait le fine-tuning complet original.</a:t>
+              <a:t>Cours 3, slide Benchmark : le fine-tuning complet est la solution premium. Pour un usage bancaire à haut risque, on privilégie équité puis performance. Si le déploiement doit être léger, la distillation est défendable.</a:t>
             </a:r>
             <a:endParaRPr lang="en-US" dirty="0"/>
           </a:p>
@@ -2265,7 +2267,7 @@
           <a:p>
             <a:r>
               <a:rPr lang="en-US" dirty="0"/>
-              <a:t>Profil de démo : femme noire. LIME explique localement en retirant des mots ; SHAP attribue des valeurs de Shapley à chaque fragment. Les deux concordent.</a:t>
+              <a:t>C'est le red teaming contrefactuel. Attention : le notebook compare le LoRA original au fine-tuning complet corrigé, donc deux architectures. L'effet du sexe avant correction est clair, mais pour une comparaison stricte il faudrait le fine-tuning complet original.</a:t>
             </a:r>
             <a:endParaRPr lang="en-US" dirty="0"/>
           </a:p>
@@ -2353,7 +2355,7 @@
           <a:p>
             <a:r>
               <a:rPr lang="en-US" dirty="0"/>
-              <a:t>Cours 2 : types de biais et cadre amont / pendant / aval. L'aval n'est pas implémenté ici, ce serait la condition d'un déploiement.</a:t>
+              <a:t>Profil de démo : femme noire. LIME explique localement en retirant des mots ; SHAP attribue des valeurs de Shapley à chaque fragment. Les deux concordent.</a:t>
             </a:r>
             <a:endParaRPr lang="en-US" dirty="0"/>
           </a:p>
@@ -2441,7 +2443,7 @@
           <a:p>
             <a:r>
               <a:rPr lang="en-US" dirty="0"/>
-              <a:t>Ouvrir sur les questions. Pistes : plusieurs graines, plus de données, comparer à un modèle génératif (DistilGPT-2 comme au TP).</a:t>
+              <a:t>Cours 2 : types de biais et cadre amont / pendant / aval. L'aval n'est pas implémenté ici, ce serait la condition d'un déploiement.</a:t>
             </a:r>
             <a:endParaRPr lang="en-US" dirty="0"/>
           </a:p>
@@ -2465,6 +2467,94 @@
             <a:fld id="{F7021451-1387-4CA6-816F-3879F97B5CBC}" type="slidenum">
               <a:rPr lang="en-US"/>
               <a:t>14</a:t>
+            </a:fld>
+            <a:endParaRPr lang="en-US"/>
+          </a:p>
+        </p:txBody>
+      </p:sp>
+    </p:spTree>
+    <p:extLst>
+      <p:ext uri="{BB962C8B-B14F-4D97-AF65-F5344CB8AC3E}">
+        <p14:creationId xmlns:p14="http://schemas.microsoft.com/office/powerpoint/2010/main" val="1024086991"/>
+      </p:ext>
+    </p:extLst>
+  </p:cSld>
+  <p:clrMapOvr>
+    <a:masterClrMapping/>
+  </p:clrMapOvr>
+</p:notes>
+</file>
+
+<file path=ppt/notesSlides/notesSlide15.xml><?xml version="1.0" encoding="utf-8"?>
+<p:notes xmlns:a="http://schemas.openxmlformats.org/drawingml/2006/main" xmlns:r="http://schemas.openxmlformats.org/officeDocument/2006/relationships" xmlns:p="http://schemas.openxmlformats.org/presentationml/2006/main">
+  <p:cSld>
+    <p:spTree>
+      <p:nvGrpSpPr>
+        <p:cNvPr id="1" name=""/>
+        <p:cNvGrpSpPr/>
+        <p:nvPr/>
+      </p:nvGrpSpPr>
+      <p:grpSpPr>
+        <a:xfrm>
+          <a:off x="0" y="0"/>
+          <a:ext cx="0" cy="0"/>
+          <a:chOff x="0" y="0"/>
+          <a:chExt cx="0" cy="0"/>
+        </a:xfrm>
+      </p:grpSpPr>
+      <p:sp>
+        <p:nvSpPr>
+          <p:cNvPr id="2" name="Slide Image Placeholder 1"/>
+          <p:cNvSpPr>
+            <a:spLocks noGrp="1" noRot="1" noChangeAspect="1"/>
+          </p:cNvSpPr>
+          <p:nvPr>
+            <p:ph type="sldImg"/>
+          </p:nvPr>
+        </p:nvSpPr>
+        <p:spPr/>
+      </p:sp>
+      <p:sp>
+        <p:nvSpPr>
+          <p:cNvPr id="3" name="Notes Placeholder 2"/>
+          <p:cNvSpPr>
+            <a:spLocks noGrp="1"/>
+          </p:cNvSpPr>
+          <p:nvPr>
+            <p:ph type="body" idx="1"/>
+          </p:nvPr>
+        </p:nvSpPr>
+        <p:spPr/>
+        <p:txBody>
+          <a:bodyPr/>
+          <a:lstStyle/>
+          <a:p>
+            <a:r>
+              <a:rPr lang="en-US" dirty="0"/>
+              <a:t>Ouvrir sur les questions. Pistes : plusieurs graines, plus de données, comparer à un modèle génératif (DistilGPT-2 comme au TP).</a:t>
+            </a:r>
+            <a:endParaRPr lang="en-US" dirty="0"/>
+          </a:p>
+        </p:txBody>
+      </p:sp>
+      <p:sp>
+        <p:nvSpPr>
+          <p:cNvPr id="4" name="Slide Number Placeholder 3"/>
+          <p:cNvSpPr>
+            <a:spLocks noGrp="1"/>
+          </p:cNvSpPr>
+          <p:nvPr>
+            <p:ph type="sldNum" sz="quarter" idx="10"/>
+          </p:nvPr>
+        </p:nvSpPr>
+        <p:spPr/>
+        <p:txBody>
+          <a:bodyPr/>
+          <a:lstStyle/>
+          <a:p>
+            <a:fld id="{F7021451-1387-4CA6-816F-3879F97B5CBC}" type="slidenum">
+              <a:rPr lang="en-US"/>
+              <a:t>15</a:t>
             </a:fld>
             <a:endParaRPr lang="en-US"/>
           </a:p>
@@ -2529,7 +2619,7 @@
           <a:p>
             <a:r>
               <a:rPr lang="en-US" dirty="0"/>
-              <a:t>Le cours 4 (slide 28) distingue prédiction réaliste et prise de décision. Ici on est dans la décision : la correction des biais est justifiée. Vérifier les articles cités avant l'oral.</a:t>
+              <a:t>Le but n'est pas d'avoir le meilleur score, mais de montrer un workflow éthique de bout en bout : audit, correction, choix du modèle, explication.</a:t>
             </a:r>
             <a:endParaRPr lang="en-US" dirty="0"/>
           </a:p>
@@ -2617,7 +2707,7 @@
           <a:p>
             <a:r>
               <a:rPr lang="en-US" dirty="0"/>
-              <a:t>Biais de données (cours 2). Un écart observé n'est pas une preuve de discrimination causale, mais un signal. L'analyse sexe × origine montre des écarts invisibles quand on regarde chaque attribut séparément.</a:t>
+              <a:t>Le cours 4 (slide 28) distingue prédiction réaliste et prise de décision. Ici on est dans la décision : la correction des biais est justifiée. Vérifier les articles cités avant l'oral.</a:t>
             </a:r>
             <a:endParaRPr lang="en-US" dirty="0"/>
           </a:p>
@@ -2705,7 +2795,7 @@
           <a:p>
             <a:r>
               <a:rPr lang="en-US" dirty="0"/>
-              <a:t>Ethics by design (cours 4) : parties prenantes = demandeurs, groupes défavorisés, conseillers, banque, société (boucle de rétroaction).</a:t>
+              <a:t>Biais de données (cours 2). Un écart observé n'est pas une preuve de discrimination causale, mais un signal. L'analyse sexe × origine montre des écarts invisibles quand on regarde chaque attribut séparément.</a:t>
             </a:r>
             <a:endParaRPr lang="en-US" dirty="0"/>
           </a:p>
@@ -2793,7 +2883,7 @@
           <a:p>
             <a:r>
               <a:rPr lang="en-US" dirty="0"/>
-              <a:t>Kamiran–Calders rend la cible statistiquement indépendante du groupe dans les données d'entraînement. Le bornage à 3 est une adaptation : le groupe femme noire &gt;50K atteint la borne.</a:t>
+              <a:t>Ethics by design (cours 4) : parties prenantes = demandeurs, groupes défavorisés, conseillers, banque, société (boucle de rétroaction).</a:t>
             </a:r>
             <a:endParaRPr lang="en-US" dirty="0"/>
           </a:p>
@@ -2881,7 +2971,7 @@
           <a:p>
             <a:r>
               <a:rPr lang="en-US" dirty="0"/>
-              <a:t>Méthodes du cours 3. LoRA réduit les paramètres entraînés d'un facteur 90 et la taille sur disque d'un facteur 90.</a:t>
+              <a:t>Kamiran–Calders rend la cible statistiquement indépendante du groupe dans les données d'entraînement. Le bornage à 3 est une adaptation : le groupe femme noire &gt;50K atteint la borne.</a:t>
             </a:r>
             <a:endParaRPr lang="en-US" dirty="0"/>
           </a:p>
@@ -2969,7 +3059,7 @@
           <a:p>
             <a:r>
               <a:rPr lang="en-US" dirty="0"/>
-              <a:t>Biais d'évaluation (cours 2) : on ne regarde pas que l'accuracy. Le fine-tuning complet corrigé perd 0,7 point d'accuracy et divise par 4 l'écart de parité par sexe. Le LoRA corrigé perd plus en F1 (−0,047).</a:t>
+              <a:t>Méthodes du cours 3. LoRA réduit les paramètres entraînés d'un facteur 90 et la taille sur disque d'un facteur 90.</a:t>
             </a:r>
             <a:endParaRPr lang="en-US" dirty="0"/>
           </a:p>
@@ -3057,7 +3147,7 @@
           <a:p>
             <a:r>
               <a:rPr lang="en-US" dirty="0"/>
-              <a:t>Avant correction, un vrai &gt;50K avait 50 points de chances en moins d'être détecté selon son groupe. Après : quasi nul. L'origine reste plus difficile, car les groupes non blancs sont petits dans le test (33 à 44 personnes).</a:t>
+              <a:t>Biais d'évaluation (cours 2) : on ne regarde pas que l'accuracy. Le fine-tuning complet corrigé perd 0,7 point d'accuracy et divise par 4 l'écart de parité par sexe. Le LoRA corrigé perd plus en F1 (−0,047).</a:t>
             </a:r>
             <a:endParaRPr lang="en-US" dirty="0"/>
           </a:p>
@@ -3145,7 +3235,7 @@
           <a:p>
             <a:r>
               <a:rPr lang="en-US" dirty="0"/>
-              <a:t>Les cases grisées sont des groupes de moins de 20 personnes dans le test. La correction ramène les femmes au niveau des hommes, mais le modèle corrigé sous-estime désormais les hommes blancs (17 % prédits vs 32 % réels).</a:t>
+              <a:t>Avant correction, un vrai &gt;50K avait 50 points de chances en moins d'être détecté selon son groupe. Après : quasi nul. L'origine reste plus difficile, car les groupes non blancs sont petits dans le test (33 à 44 personnes).</a:t>
             </a:r>
             <a:endParaRPr lang="en-US" dirty="0"/>
           </a:p>
@@ -3251,8 +3341,8 @@
         </p:nvSpPr>
         <p:spPr>
           <a:xfrm>
-            <a:off x="731520" y="2103120"/>
-            <a:ext cx="10698480" cy="1463040"/>
+            <a:off x="731520" y="1280160"/>
+            <a:ext cx="10698480" cy="2286000"/>
           </a:xfrm>
           <a:prstGeom prst="rect">
             <a:avLst/>
@@ -3265,7 +3355,7 @@
           <a:lstStyle>
             <a:lvl1pPr algn="l" indent="0" marL="0">
               <a:buNone/>
-              <a:defRPr lang="en-US" sz="4400" b="1" dirty="0">
+              <a:defRPr lang="en-US" sz="6600" b="1" dirty="0">
                 <a:solidFill>
                   <a:schemeClr val="bg1"/>
                 </a:solidFill>
@@ -3279,7 +3369,7 @@
             <a:pPr algn="l" indent="0" marL="0">
               <a:buNone/>
             </a:pPr>
-            <a:endParaRPr lang="en-US" sz="4400" dirty="0"/>
+            <a:endParaRPr lang="en-US" sz="6600" dirty="0"/>
           </a:p>
         </p:txBody>
       </p:sp>
@@ -3364,8 +3454,8 @@
         </p:nvSpPr>
         <p:spPr>
           <a:xfrm>
-            <a:off x="548640" y="320040"/>
-            <a:ext cx="11064240" cy="822960"/>
+            <a:off x="548640" y="274320"/>
+            <a:ext cx="11064240" cy="914400"/>
           </a:xfrm>
           <a:prstGeom prst="rect">
             <a:avLst/>
@@ -3378,7 +3468,7 @@
           <a:lstStyle>
             <a:lvl1pPr indent="0" marL="0">
               <a:buNone/>
-              <a:defRPr lang="en-US" sz="3200" b="1" dirty="0">
+              <a:defRPr lang="en-US" sz="3600" b="1" dirty="0">
                 <a:solidFill>
                   <a:schemeClr val="tx1"/>
                 </a:solidFill>
@@ -3392,7 +3482,7 @@
             <a:pPr indent="0" marL="0">
               <a:buNone/>
             </a:pPr>
-            <a:endParaRPr lang="en-US" sz="3200" dirty="0"/>
+            <a:endParaRPr lang="en-US" sz="3600" dirty="0"/>
           </a:p>
         </p:txBody>
       </p:sp>
@@ -3836,8 +3926,8 @@
         </p:nvSpPr>
         <p:spPr>
           <a:xfrm>
-            <a:off x="731520" y="2103120"/>
-            <a:ext cx="10698480" cy="1463040"/>
+            <a:off x="731520" y="1280160"/>
+            <a:ext cx="10698480" cy="2286000"/>
           </a:xfrm>
           <a:prstGeom prst="rect">
             <a:avLst/>
@@ -3853,7 +3943,7 @@
               <a:buNone/>
             </a:pPr>
             <a:r>
-              <a:rPr lang="en-US" sz="4400" b="1" dirty="0">
+              <a:rPr lang="en-US" sz="6600" b="1" dirty="0">
                 <a:solidFill>
                   <a:schemeClr val="bg1"/>
                 </a:solidFill>
@@ -3863,7 +3953,7 @@
               </a:rPr>
               <a:t>Un crédit plus équitable ?</a:t>
             </a:r>
-            <a:endParaRPr lang="en-US" sz="4400" dirty="0"/>
+            <a:endParaRPr lang="en-US" sz="6600" dirty="0"/>
           </a:p>
         </p:txBody>
       </p:sp>
@@ -3954,8 +4044,8 @@
         </p:nvSpPr>
         <p:spPr>
           <a:xfrm>
-            <a:off x="548640" y="320040"/>
-            <a:ext cx="11064240" cy="822960"/>
+            <a:off x="548640" y="274320"/>
+            <a:ext cx="11064240" cy="914400"/>
           </a:xfrm>
           <a:prstGeom prst="rect">
             <a:avLst/>
@@ -3971,7 +4061,7 @@
               <a:buNone/>
             </a:pPr>
             <a:r>
-              <a:rPr lang="en-US" sz="3200" b="1" dirty="0">
+              <a:rPr lang="en-US" sz="3600" b="1" dirty="0">
                 <a:solidFill>
                   <a:schemeClr val="tx1"/>
                 </a:solidFill>
@@ -3979,44 +4069,46 @@
                 <a:ea typeface="Cambria" pitchFamily="34" charset="-122"/>
                 <a:cs typeface="Cambria" pitchFamily="34" charset="-120"/>
               </a:rPr>
-              <a:t>Modèle retenu : le fine-tuning complet corrigé</a:t>
-            </a:r>
-            <a:endParaRPr lang="en-US" sz="3200" dirty="0"/>
-          </a:p>
-        </p:txBody>
-      </p:sp>
-      <p:sp>
-        <p:nvSpPr>
-          <p:cNvPr id="3" name="critere"/>
-          <p:cNvSpPr/>
-          <p:nvPr/>
-        </p:nvSpPr>
+              <a:t>Sans correction, aucune femme n'est prédite à &gt;50K</a:t>
+            </a:r>
+            <a:endParaRPr lang="en-US" sz="3600" dirty="0"/>
+          </a:p>
+        </p:txBody>
+      </p:sp>
+      <p:pic>
+        <p:nvPicPr>
+          <p:cNvPr id="3" name="Image 0" descr="preencoded.png">    </p:cNvPr>
+          <p:cNvPicPr>
+            <a:picLocks noChangeAspect="1"/>
+          </p:cNvPicPr>
+          <p:nvPr/>
+        </p:nvPicPr>
+        <p:blipFill>
+          <a:blip r:embed="rId1"/>
+          <a:stretch>
+            <a:fillRect/>
+          </a:stretch>
+        </p:blipFill>
         <p:spPr>
           <a:xfrm>
             <a:off x="548640" y="1371600"/>
-            <a:ext cx="4937760" cy="4663440"/>
-          </a:xfrm>
-          <a:prstGeom prst="roundRect">
-            <a:avLst>
-              <a:gd name="adj" fmla="val 1569"/>
-            </a:avLst>
-          </a:prstGeom>
-          <a:solidFill>
-            <a:schemeClr val="bg2"/>
-          </a:solidFill>
-          <a:ln/>
-        </p:spPr>
-      </p:sp>
-      <p:sp>
-        <p:nvSpPr>
-          <p:cNvPr id="4" name="Text 2"/>
+            <a:ext cx="11064240" cy="2627125"/>
+          </a:xfrm>
+          <a:prstGeom prst="rect">
+            <a:avLst/>
+          </a:prstGeom>
+        </p:spPr>
+      </p:pic>
+      <p:sp>
+        <p:nvSpPr>
+          <p:cNvPr id="4" name="Text 1"/>
           <p:cNvSpPr txBox="1"/>
           <p:nvPr/>
         </p:nvSpPr>
         <p:spPr>
           <a:xfrm>
-            <a:off x="822960" y="1600200"/>
-            <a:ext cx="4389120" cy="365760"/>
+            <a:off x="548640" y="4206240"/>
+            <a:ext cx="5303520" cy="731520"/>
           </a:xfrm>
           <a:prstGeom prst="rect">
             <a:avLst/>
@@ -4032,378 +4124,30 @@
               <a:buNone/>
             </a:pPr>
             <a:r>
-              <a:rPr lang="en-US" sz="1800" b="1" dirty="0">
-                <a:solidFill>
-                  <a:schemeClr val="tx1"/>
-                </a:solidFill>
-              </a:rPr>
-              <a:t>Critère de choix</a:t>
-            </a:r>
-            <a:endParaRPr lang="en-US" sz="1800" dirty="0"/>
-          </a:p>
-        </p:txBody>
-      </p:sp>
-      <p:sp>
-        <p:nvSpPr>
-          <p:cNvPr id="5" name="Shape 3"/>
-          <p:cNvSpPr/>
-          <p:nvPr/>
-        </p:nvSpPr>
-        <p:spPr>
-          <a:xfrm>
-            <a:off x="822960" y="2194560"/>
-            <a:ext cx="502920" cy="502920"/>
-          </a:xfrm>
-          <a:prstGeom prst="ellipse">
-            <a:avLst/>
-          </a:prstGeom>
-          <a:solidFill>
-            <a:schemeClr val="accent2"/>
-          </a:solidFill>
-          <a:ln/>
-        </p:spPr>
-      </p:sp>
-      <p:sp>
-        <p:nvSpPr>
-          <p:cNvPr id="6" name="Text 4"/>
-          <p:cNvSpPr txBox="1"/>
-          <p:nvPr/>
-        </p:nvSpPr>
-        <p:spPr>
-          <a:xfrm>
-            <a:off x="822960" y="2194560"/>
-            <a:ext cx="502920" cy="502920"/>
-          </a:xfrm>
-          <a:prstGeom prst="rect">
-            <a:avLst/>
-          </a:prstGeom>
-          <a:noFill/>
-          <a:ln/>
-        </p:spPr>
-        <p:txBody>
-          <a:bodyPr wrap="square" lIns="0" tIns="0" rIns="0" bIns="0" rtlCol="0" anchor="ctr"/>
-          <a:lstStyle/>
-          <a:p>
-            <a:pPr algn="ctr" indent="0" marL="0">
-              <a:buNone/>
-            </a:pPr>
-            <a:r>
-              <a:rPr lang="en-US" sz="1600" b="1" dirty="0">
-                <a:solidFill>
-                  <a:schemeClr val="bg1"/>
-                </a:solidFill>
-              </a:rPr>
-              <a:t>1</a:t>
-            </a:r>
-            <a:endParaRPr lang="en-US" sz="1600" dirty="0"/>
-          </a:p>
-        </p:txBody>
-      </p:sp>
-      <p:sp>
-        <p:nvSpPr>
-          <p:cNvPr id="7" name="Text 5"/>
-          <p:cNvSpPr txBox="1"/>
-          <p:nvPr/>
-        </p:nvSpPr>
-        <p:spPr>
-          <a:xfrm>
-            <a:off x="1508760" y="2194560"/>
-            <a:ext cx="3749040" cy="822960"/>
-          </a:xfrm>
-          <a:prstGeom prst="rect">
-            <a:avLst/>
-          </a:prstGeom>
-          <a:noFill/>
-          <a:ln/>
-        </p:spPr>
-        <p:txBody>
-          <a:bodyPr wrap="square" lIns="0" tIns="0" rIns="0" bIns="0" rtlCol="0" anchor="ctr"/>
-          <a:lstStyle/>
-          <a:p>
-            <a:pPr indent="0" marL="0">
-              <a:buNone/>
-            </a:pPr>
-            <a:r>
-              <a:rPr lang="en-US" sz="1500" dirty="0">
-                <a:solidFill>
-                  <a:schemeClr val="tx2"/>
-                </a:solidFill>
-              </a:rPr>
-              <a:t>Écarter les modèles non corrigés</a:t>
-            </a:r>
-            <a:endParaRPr lang="en-US" sz="1500" dirty="0"/>
-          </a:p>
-        </p:txBody>
-      </p:sp>
-      <p:sp>
-        <p:nvSpPr>
-          <p:cNvPr id="8" name="Shape 6"/>
-          <p:cNvSpPr/>
-          <p:nvPr/>
-        </p:nvSpPr>
-        <p:spPr>
-          <a:xfrm>
-            <a:off x="822960" y="3337560"/>
-            <a:ext cx="502920" cy="502920"/>
-          </a:xfrm>
-          <a:prstGeom prst="ellipse">
-            <a:avLst/>
-          </a:prstGeom>
-          <a:solidFill>
-            <a:schemeClr val="accent2"/>
-          </a:solidFill>
-          <a:ln/>
-        </p:spPr>
-      </p:sp>
-      <p:sp>
-        <p:nvSpPr>
-          <p:cNvPr id="9" name="Text 7"/>
-          <p:cNvSpPr txBox="1"/>
-          <p:nvPr/>
-        </p:nvSpPr>
-        <p:spPr>
-          <a:xfrm>
-            <a:off x="822960" y="3337560"/>
-            <a:ext cx="502920" cy="502920"/>
-          </a:xfrm>
-          <a:prstGeom prst="rect">
-            <a:avLst/>
-          </a:prstGeom>
-          <a:noFill/>
-          <a:ln/>
-        </p:spPr>
-        <p:txBody>
-          <a:bodyPr wrap="square" lIns="0" tIns="0" rIns="0" bIns="0" rtlCol="0" anchor="ctr"/>
-          <a:lstStyle/>
-          <a:p>
-            <a:pPr algn="ctr" indent="0" marL="0">
-              <a:buNone/>
-            </a:pPr>
-            <a:r>
-              <a:rPr lang="en-US" sz="1600" b="1" dirty="0">
-                <a:solidFill>
-                  <a:schemeClr val="bg1"/>
-                </a:solidFill>
-              </a:rPr>
-              <a:t>2</a:t>
-            </a:r>
-            <a:endParaRPr lang="en-US" sz="1600" dirty="0"/>
-          </a:p>
-        </p:txBody>
-      </p:sp>
-      <p:sp>
-        <p:nvSpPr>
-          <p:cNvPr id="10" name="Text 8"/>
-          <p:cNvSpPr txBox="1"/>
-          <p:nvPr/>
-        </p:nvSpPr>
-        <p:spPr>
-          <a:xfrm>
-            <a:off x="1508760" y="3337560"/>
-            <a:ext cx="3749040" cy="822960"/>
-          </a:xfrm>
-          <a:prstGeom prst="rect">
-            <a:avLst/>
-          </a:prstGeom>
-          <a:noFill/>
-          <a:ln/>
-        </p:spPr>
-        <p:txBody>
-          <a:bodyPr wrap="square" lIns="0" tIns="0" rIns="0" bIns="0" rtlCol="0" anchor="ctr"/>
-          <a:lstStyle/>
-          <a:p>
-            <a:pPr indent="0" marL="0">
-              <a:buNone/>
-            </a:pPr>
-            <a:r>
-              <a:rPr lang="en-US" sz="1500" dirty="0">
-                <a:solidFill>
-                  <a:schemeClr val="tx2"/>
-                </a:solidFill>
-              </a:rPr>
-              <a:t>Garder ceux à moins de 0,03 du meilleur F1</a:t>
-            </a:r>
-            <a:endParaRPr lang="en-US" sz="1500" dirty="0"/>
-          </a:p>
-        </p:txBody>
-      </p:sp>
-      <p:sp>
-        <p:nvSpPr>
-          <p:cNvPr id="11" name="Shape 9"/>
-          <p:cNvSpPr/>
-          <p:nvPr/>
-        </p:nvSpPr>
-        <p:spPr>
-          <a:xfrm>
-            <a:off x="822960" y="4480560"/>
-            <a:ext cx="502920" cy="502920"/>
-          </a:xfrm>
-          <a:prstGeom prst="ellipse">
-            <a:avLst/>
-          </a:prstGeom>
-          <a:solidFill>
-            <a:schemeClr val="accent2"/>
-          </a:solidFill>
-          <a:ln/>
-        </p:spPr>
-      </p:sp>
-      <p:sp>
-        <p:nvSpPr>
-          <p:cNvPr id="12" name="Text 10"/>
-          <p:cNvSpPr txBox="1"/>
-          <p:nvPr/>
-        </p:nvSpPr>
-        <p:spPr>
-          <a:xfrm>
-            <a:off x="822960" y="4480560"/>
-            <a:ext cx="502920" cy="502920"/>
-          </a:xfrm>
-          <a:prstGeom prst="rect">
-            <a:avLst/>
-          </a:prstGeom>
-          <a:noFill/>
-          <a:ln/>
-        </p:spPr>
-        <p:txBody>
-          <a:bodyPr wrap="square" lIns="0" tIns="0" rIns="0" bIns="0" rtlCol="0" anchor="ctr"/>
-          <a:lstStyle/>
-          <a:p>
-            <a:pPr algn="ctr" indent="0" marL="0">
-              <a:buNone/>
-            </a:pPr>
-            <a:r>
-              <a:rPr lang="en-US" sz="1600" b="1" dirty="0">
-                <a:solidFill>
-                  <a:schemeClr val="bg1"/>
-                </a:solidFill>
-              </a:rPr>
-              <a:t>3</a:t>
-            </a:r>
-            <a:endParaRPr lang="en-US" sz="1600" dirty="0"/>
-          </a:p>
-        </p:txBody>
-      </p:sp>
-      <p:sp>
-        <p:nvSpPr>
-          <p:cNvPr id="13" name="Text 11"/>
-          <p:cNvSpPr txBox="1"/>
-          <p:nvPr/>
-        </p:nvSpPr>
-        <p:spPr>
-          <a:xfrm>
-            <a:off x="1508760" y="4480560"/>
-            <a:ext cx="3749040" cy="822960"/>
-          </a:xfrm>
-          <a:prstGeom prst="rect">
-            <a:avLst/>
-          </a:prstGeom>
-          <a:noFill/>
-          <a:ln/>
-        </p:spPr>
-        <p:txBody>
-          <a:bodyPr wrap="square" lIns="0" tIns="0" rIns="0" bIns="0" rtlCol="0" anchor="ctr"/>
-          <a:lstStyle/>
-          <a:p>
-            <a:pPr indent="0" marL="0">
-              <a:buNone/>
-            </a:pPr>
-            <a:r>
-              <a:rPr lang="en-US" sz="1500" dirty="0">
-                <a:solidFill>
-                  <a:schemeClr val="tx2"/>
-                </a:solidFill>
-              </a:rPr>
-              <a:t>Choisir le plus petit écart sexe × origine, puis le plus sobre</a:t>
-            </a:r>
-            <a:endParaRPr lang="en-US" sz="1500" dirty="0"/>
-          </a:p>
-        </p:txBody>
-      </p:sp>
-      <p:sp>
-        <p:nvSpPr>
-          <p:cNvPr id="14" name="Text 12"/>
-          <p:cNvSpPr txBox="1"/>
-          <p:nvPr/>
-        </p:nvSpPr>
-        <p:spPr>
-          <a:xfrm>
-            <a:off x="822960" y="5166360"/>
-            <a:ext cx="4389120" cy="777240"/>
-          </a:xfrm>
-          <a:prstGeom prst="rect">
-            <a:avLst/>
-          </a:prstGeom>
-          <a:noFill/>
-          <a:ln/>
-        </p:spPr>
-        <p:txBody>
-          <a:bodyPr wrap="square" lIns="0" tIns="0" rIns="0" bIns="0" rtlCol="0" anchor="ctr"/>
-          <a:lstStyle/>
-          <a:p>
-            <a:pPr indent="0" marL="0">
-              <a:buNone/>
-            </a:pPr>
-            <a:r>
-              <a:rPr lang="en-US" sz="1300" i="1" dirty="0">
-                <a:solidFill>
-                  <a:schemeClr val="tx2"/>
-                </a:solidFill>
-              </a:rPr>
-              <a:t>Short-list : fine-tuning complet et distillation. Le LoRA corrigé avait le plus petit écart mais un F1 trop bas (0,637).</a:t>
-            </a:r>
-            <a:endParaRPr lang="en-US" sz="1300" dirty="0"/>
-          </a:p>
-        </p:txBody>
-      </p:sp>
-      <p:sp>
-        <p:nvSpPr>
-          <p:cNvPr id="15" name="Text 13"/>
-          <p:cNvSpPr txBox="1"/>
-          <p:nvPr/>
-        </p:nvSpPr>
-        <p:spPr>
-          <a:xfrm>
-            <a:off x="5852160" y="1463040"/>
-            <a:ext cx="2743200" cy="822960"/>
-          </a:xfrm>
-          <a:prstGeom prst="rect">
-            <a:avLst/>
-          </a:prstGeom>
-          <a:noFill/>
-          <a:ln/>
-        </p:spPr>
-        <p:txBody>
-          <a:bodyPr wrap="square" lIns="0" tIns="0" rIns="0" bIns="0" rtlCol="0" anchor="ctr"/>
-          <a:lstStyle/>
-          <a:p>
-            <a:pPr indent="0" marL="0">
-              <a:buNone/>
-            </a:pPr>
-            <a:r>
-              <a:rPr lang="en-US" sz="4400" b="1" dirty="0">
-                <a:solidFill>
-                  <a:schemeClr val="tx1"/>
+              <a:rPr lang="en-US" sz="4000" b="1" dirty="0">
+                <a:solidFill>
+                  <a:schemeClr val="accent3"/>
                 </a:solidFill>
                 <a:latin typeface="Cambria" pitchFamily="34" charset="0"/>
                 <a:ea typeface="Cambria" pitchFamily="34" charset="-122"/>
                 <a:cs typeface="Cambria" pitchFamily="34" charset="-120"/>
               </a:rPr>
-              <a:t>0,706</a:t>
-            </a:r>
-            <a:endParaRPr lang="en-US" sz="4400" dirty="0"/>
-          </a:p>
-        </p:txBody>
-      </p:sp>
-      <p:sp>
-        <p:nvSpPr>
-          <p:cNvPr id="16" name="Text 14"/>
+              <a:t>0 %</a:t>
+            </a:r>
+            <a:endParaRPr lang="en-US" sz="4000" dirty="0"/>
+          </a:p>
+        </p:txBody>
+      </p:sp>
+      <p:sp>
+        <p:nvSpPr>
+          <p:cNvPr id="5" name="Text 2"/>
           <p:cNvSpPr txBox="1"/>
           <p:nvPr/>
         </p:nvSpPr>
         <p:spPr>
           <a:xfrm>
-            <a:off x="5852160" y="2286000"/>
-            <a:ext cx="2743200" cy="365760"/>
+            <a:off x="548640" y="4937760"/>
+            <a:ext cx="5303520" cy="731520"/>
           </a:xfrm>
           <a:prstGeom prst="rect">
             <a:avLst/>
@@ -4419,27 +4163,27 @@
               <a:buNone/>
             </a:pPr>
             <a:r>
-              <a:rPr lang="en-US" sz="1400" dirty="0">
+              <a:rPr lang="en-US" sz="1500" dirty="0">
                 <a:solidFill>
                   <a:schemeClr val="tx2"/>
                 </a:solidFill>
               </a:rPr>
-              <a:t>F1 macro</a:t>
-            </a:r>
-            <a:endParaRPr lang="en-US" sz="1400" dirty="0"/>
-          </a:p>
-        </p:txBody>
-      </p:sp>
-      <p:sp>
-        <p:nvSpPr>
-          <p:cNvPr id="17" name="Text 15"/>
+              <a:t>des femmes prédites &gt;50K par le LoRA original (réalité : 13 % des femmes blanches)</a:t>
+            </a:r>
+            <a:endParaRPr lang="en-US" sz="1500" dirty="0"/>
+          </a:p>
+        </p:txBody>
+      </p:sp>
+      <p:sp>
+        <p:nvSpPr>
+          <p:cNvPr id="6" name="Text 3"/>
           <p:cNvSpPr txBox="1"/>
           <p:nvPr/>
         </p:nvSpPr>
         <p:spPr>
           <a:xfrm>
-            <a:off x="8778240" y="1463040"/>
-            <a:ext cx="2743200" cy="822960"/>
+            <a:off x="6217920" y="4206240"/>
+            <a:ext cx="5303520" cy="731520"/>
           </a:xfrm>
           <a:prstGeom prst="rect">
             <a:avLst/>
@@ -4455,30 +4199,30 @@
               <a:buNone/>
             </a:pPr>
             <a:r>
-              <a:rPr lang="en-US" sz="4400" b="1" dirty="0">
-                <a:solidFill>
-                  <a:schemeClr val="tx1"/>
+              <a:rPr lang="en-US" sz="4000" b="1" dirty="0">
+                <a:solidFill>
+                  <a:schemeClr val="accent2"/>
                 </a:solidFill>
                 <a:latin typeface="Cambria" pitchFamily="34" charset="0"/>
                 <a:ea typeface="Cambria" pitchFamily="34" charset="-122"/>
                 <a:cs typeface="Cambria" pitchFamily="34" charset="-120"/>
               </a:rPr>
-              <a:t>80,8 %</a:t>
-            </a:r>
-            <a:endParaRPr lang="en-US" sz="4400" dirty="0"/>
-          </a:p>
-        </p:txBody>
-      </p:sp>
-      <p:sp>
-        <p:nvSpPr>
-          <p:cNvPr id="18" name="Text 16"/>
+              <a:t>15 % vs 17 %</a:t>
+            </a:r>
+            <a:endParaRPr lang="en-US" sz="4000" dirty="0"/>
+          </a:p>
+        </p:txBody>
+      </p:sp>
+      <p:sp>
+        <p:nvSpPr>
+          <p:cNvPr id="7" name="Text 4"/>
           <p:cNvSpPr txBox="1"/>
           <p:nvPr/>
         </p:nvSpPr>
         <p:spPr>
           <a:xfrm>
-            <a:off x="8778240" y="2286000"/>
-            <a:ext cx="2743200" cy="365760"/>
+            <a:off x="6217920" y="4937760"/>
+            <a:ext cx="5303520" cy="731520"/>
           </a:xfrm>
           <a:prstGeom prst="rect">
             <a:avLst/>
@@ -4494,200 +4238,14 @@
               <a:buNone/>
             </a:pPr>
             <a:r>
-              <a:rPr lang="en-US" sz="1400" dirty="0">
+              <a:rPr lang="en-US" sz="1500" dirty="0">
                 <a:solidFill>
                   <a:schemeClr val="tx2"/>
                 </a:solidFill>
               </a:rPr>
-              <a:t>accuracy</a:t>
-            </a:r>
-            <a:endParaRPr lang="en-US" sz="1400" dirty="0"/>
-          </a:p>
-        </p:txBody>
-      </p:sp>
-      <p:sp>
-        <p:nvSpPr>
-          <p:cNvPr id="19" name="Text 17"/>
-          <p:cNvSpPr txBox="1"/>
-          <p:nvPr/>
-        </p:nvSpPr>
-        <p:spPr>
-          <a:xfrm>
-            <a:off x="5852160" y="3291840"/>
-            <a:ext cx="2743200" cy="822960"/>
-          </a:xfrm>
-          <a:prstGeom prst="rect">
-            <a:avLst/>
-          </a:prstGeom>
-          <a:noFill/>
-          <a:ln/>
-        </p:spPr>
-        <p:txBody>
-          <a:bodyPr wrap="square" lIns="0" tIns="0" rIns="0" bIns="0" rtlCol="0" anchor="ctr"/>
-          <a:lstStyle/>
-          <a:p>
-            <a:pPr indent="0" marL="0">
-              <a:buNone/>
-            </a:pPr>
-            <a:r>
-              <a:rPr lang="en-US" sz="4400" b="1" dirty="0">
-                <a:solidFill>
-                  <a:schemeClr val="accent2"/>
-                </a:solidFill>
-                <a:latin typeface="Cambria" pitchFamily="34" charset="0"/>
-                <a:ea typeface="Cambria" pitchFamily="34" charset="-122"/>
-                <a:cs typeface="Cambria" pitchFamily="34" charset="-120"/>
-              </a:rPr>
-              <a:t>0,06</a:t>
-            </a:r>
-            <a:endParaRPr lang="en-US" sz="4400" dirty="0"/>
-          </a:p>
-        </p:txBody>
-      </p:sp>
-      <p:sp>
-        <p:nvSpPr>
-          <p:cNvPr id="20" name="Text 18"/>
-          <p:cNvSpPr txBox="1"/>
-          <p:nvPr/>
-        </p:nvSpPr>
-        <p:spPr>
-          <a:xfrm>
-            <a:off x="5852160" y="4114800"/>
-            <a:ext cx="2743200" cy="365760"/>
-          </a:xfrm>
-          <a:prstGeom prst="rect">
-            <a:avLst/>
-          </a:prstGeom>
-          <a:noFill/>
-          <a:ln/>
-        </p:spPr>
-        <p:txBody>
-          <a:bodyPr wrap="square" lIns="0" tIns="0" rIns="0" bIns="0" rtlCol="0" anchor="ctr"/>
-          <a:lstStyle/>
-          <a:p>
-            <a:pPr indent="0" marL="0">
-              <a:buNone/>
-            </a:pPr>
-            <a:r>
-              <a:rPr lang="en-US" sz="1400" dirty="0">
-                <a:solidFill>
-                  <a:schemeClr val="tx2"/>
-                </a:solidFill>
-              </a:rPr>
-              <a:t>écart de parité sexe</a:t>
-            </a:r>
-            <a:endParaRPr lang="en-US" sz="1400" dirty="0"/>
-          </a:p>
-        </p:txBody>
-      </p:sp>
-      <p:sp>
-        <p:nvSpPr>
-          <p:cNvPr id="21" name="Text 19"/>
-          <p:cNvSpPr txBox="1"/>
-          <p:nvPr/>
-        </p:nvSpPr>
-        <p:spPr>
-          <a:xfrm>
-            <a:off x="8778240" y="3291840"/>
-            <a:ext cx="2743200" cy="822960"/>
-          </a:xfrm>
-          <a:prstGeom prst="rect">
-            <a:avLst/>
-          </a:prstGeom>
-          <a:noFill/>
-          <a:ln/>
-        </p:spPr>
-        <p:txBody>
-          <a:bodyPr wrap="square" lIns="0" tIns="0" rIns="0" bIns="0" rtlCol="0" anchor="ctr"/>
-          <a:lstStyle/>
-          <a:p>
-            <a:pPr indent="0" marL="0">
-              <a:buNone/>
-            </a:pPr>
-            <a:r>
-              <a:rPr lang="en-US" sz="4400" b="1" dirty="0">
-                <a:solidFill>
-                  <a:schemeClr val="accent2"/>
-                </a:solidFill>
-                <a:latin typeface="Cambria" pitchFamily="34" charset="0"/>
-                <a:ea typeface="Cambria" pitchFamily="34" charset="-122"/>
-                <a:cs typeface="Cambria" pitchFamily="34" charset="-120"/>
-              </a:rPr>
-              <a:t>0,001</a:t>
-            </a:r>
-            <a:endParaRPr lang="en-US" sz="4400" dirty="0"/>
-          </a:p>
-        </p:txBody>
-      </p:sp>
-      <p:sp>
-        <p:nvSpPr>
-          <p:cNvPr id="22" name="Text 20"/>
-          <p:cNvSpPr txBox="1"/>
-          <p:nvPr/>
-        </p:nvSpPr>
-        <p:spPr>
-          <a:xfrm>
-            <a:off x="8778240" y="4114800"/>
-            <a:ext cx="2743200" cy="365760"/>
-          </a:xfrm>
-          <a:prstGeom prst="rect">
-            <a:avLst/>
-          </a:prstGeom>
-          <a:noFill/>
-          <a:ln/>
-        </p:spPr>
-        <p:txBody>
-          <a:bodyPr wrap="square" lIns="0" tIns="0" rIns="0" bIns="0" rtlCol="0" anchor="ctr"/>
-          <a:lstStyle/>
-          <a:p>
-            <a:pPr indent="0" marL="0">
-              <a:buNone/>
-            </a:pPr>
-            <a:r>
-              <a:rPr lang="en-US" sz="1400" dirty="0">
-                <a:solidFill>
-                  <a:schemeClr val="tx2"/>
-                </a:solidFill>
-              </a:rPr>
-              <a:t>écart d'égalité des chances</a:t>
-            </a:r>
-            <a:endParaRPr lang="en-US" sz="1400" dirty="0"/>
-          </a:p>
-        </p:txBody>
-      </p:sp>
-      <p:sp>
-        <p:nvSpPr>
-          <p:cNvPr id="23" name="Text 21"/>
-          <p:cNvSpPr txBox="1"/>
-          <p:nvPr/>
-        </p:nvSpPr>
-        <p:spPr>
-          <a:xfrm>
-            <a:off x="5852160" y="5257800"/>
-            <a:ext cx="5760720" cy="731520"/>
-          </a:xfrm>
-          <a:prstGeom prst="rect">
-            <a:avLst/>
-          </a:prstGeom>
-          <a:noFill/>
-          <a:ln/>
-        </p:spPr>
-        <p:txBody>
-          <a:bodyPr wrap="square" lIns="0" tIns="0" rIns="0" bIns="0" rtlCol="0" anchor="ctr"/>
-          <a:lstStyle/>
-          <a:p>
-            <a:pPr indent="0" marL="0">
-              <a:buNone/>
-            </a:pPr>
-            <a:r>
-              <a:rPr lang="en-US" sz="1400" dirty="0">
-                <a:solidFill>
-                  <a:schemeClr val="tx2"/>
-                </a:solidFill>
-              </a:rPr>
-              <a:t>Contrepartie : 268 Mo et 67 M de paramètres entraînés. La distillation (18 Mo, F1 0,686) est l'alternative sobre.</a:t>
-            </a:r>
-            <a:endParaRPr lang="en-US" sz="1400" dirty="0"/>
+              <a:t>femmes vs hommes blancs après correction : l'écart presque disparaît</a:t>
+            </a:r>
+            <a:endParaRPr lang="en-US" sz="1500" dirty="0"/>
           </a:p>
         </p:txBody>
       </p:sp>
@@ -4771,8 +4329,8 @@
         </p:nvSpPr>
         <p:spPr>
           <a:xfrm>
-            <a:off x="548640" y="320040"/>
-            <a:ext cx="11064240" cy="822960"/>
+            <a:off x="548640" y="274320"/>
+            <a:ext cx="11064240" cy="914400"/>
           </a:xfrm>
           <a:prstGeom prst="rect">
             <a:avLst/>
@@ -4788,7 +4346,7 @@
               <a:buNone/>
             </a:pPr>
             <a:r>
-              <a:rPr lang="en-US" sz="3200" b="1" dirty="0">
+              <a:rPr lang="en-US" sz="3600" b="1" dirty="0">
                 <a:solidFill>
                   <a:schemeClr val="tx1"/>
                 </a:solidFill>
@@ -4796,22 +4354,44 @@
                 <a:ea typeface="Cambria" pitchFamily="34" charset="-122"/>
                 <a:cs typeface="Cambria" pitchFamily="34" charset="-120"/>
               </a:rPr>
-              <a:t>Démo : même dossier, seuls le sexe et l'origine changent</a:t>
-            </a:r>
-            <a:endParaRPr lang="en-US" sz="3200" dirty="0"/>
-          </a:p>
-        </p:txBody>
-      </p:sp>
-      <p:sp>
-        <p:nvSpPr>
-          <p:cNvPr id="3" name="Text 1"/>
+              <a:t>Modèle retenu : le fine-tuning complet corrigé</a:t>
+            </a:r>
+            <a:endParaRPr lang="en-US" sz="3600" dirty="0"/>
+          </a:p>
+        </p:txBody>
+      </p:sp>
+      <p:sp>
+        <p:nvSpPr>
+          <p:cNvPr id="3" name="critere"/>
+          <p:cNvSpPr/>
+          <p:nvPr/>
+        </p:nvSpPr>
+        <p:spPr>
+          <a:xfrm>
+            <a:off x="548640" y="1371600"/>
+            <a:ext cx="4937760" cy="4663440"/>
+          </a:xfrm>
+          <a:prstGeom prst="roundRect">
+            <a:avLst>
+              <a:gd name="adj" fmla="val 1569"/>
+            </a:avLst>
+          </a:prstGeom>
+          <a:solidFill>
+            <a:schemeClr val="bg2"/>
+          </a:solidFill>
+          <a:ln/>
+        </p:spPr>
+      </p:sp>
+      <p:sp>
+        <p:nvSpPr>
+          <p:cNvPr id="4" name="Text 2"/>
           <p:cNvSpPr txBox="1"/>
           <p:nvPr/>
         </p:nvSpPr>
         <p:spPr>
           <a:xfrm>
-            <a:off x="548640" y="1280160"/>
-            <a:ext cx="11064240" cy="365760"/>
+            <a:off x="822960" y="1600200"/>
+            <a:ext cx="4389120" cy="365760"/>
           </a:xfrm>
           <a:prstGeom prst="rect">
             <a:avLst/>
@@ -4827,43 +4407,83 @@
               <a:buNone/>
             </a:pPr>
             <a:r>
-              <a:rPr lang="en-US" sz="1500" dirty="0">
-                <a:solidFill>
-                  <a:schemeClr val="accent5"/>
-                </a:solidFill>
-              </a:rPr>
-              <a:t>40 ans · Private · Bachelors · Exec-managerial · 45 h/semaine</a:t>
-            </a:r>
-            <a:endParaRPr lang="en-US" sz="1500" dirty="0"/>
-          </a:p>
-        </p:txBody>
-      </p:sp>
-      <p:graphicFrame>
-        <p:nvGraphicFramePr>
-          <p:cNvPr id="4" name="Chart 0" descr=""/>
-          <p:cNvGraphicFramePr/>
-          <p:nvPr/>
-        </p:nvGraphicFramePr>
-        <p:xfrm>
-          <a:off x="548640" y="1737360"/>
-          <a:ext cx="7132320" cy="4389120"/>
-        </p:xfrm>
-        <a:graphic xmlns:a="http://schemas.openxmlformats.org/drawingml/2006/main">
-          <a:graphicData uri="http://schemas.openxmlformats.org/drawingml/2006/chart">
-            <c:chart xmlns:c="http://schemas.openxmlformats.org/drawingml/2006/chart" r:id="rId1"/>
-          </a:graphicData>
-        </a:graphic>
-      </p:graphicFrame>
-      <p:sp>
-        <p:nvSpPr>
-          <p:cNvPr id="5" name="Text 2"/>
+              <a:rPr lang="en-US" sz="1800" b="1" dirty="0">
+                <a:solidFill>
+                  <a:schemeClr val="tx1"/>
+                </a:solidFill>
+              </a:rPr>
+              <a:t>Critère de choix</a:t>
+            </a:r>
+            <a:endParaRPr lang="en-US" sz="1800" dirty="0"/>
+          </a:p>
+        </p:txBody>
+      </p:sp>
+      <p:sp>
+        <p:nvSpPr>
+          <p:cNvPr id="5" name="Shape 3"/>
+          <p:cNvSpPr/>
+          <p:nvPr/>
+        </p:nvSpPr>
+        <p:spPr>
+          <a:xfrm>
+            <a:off x="822960" y="2194560"/>
+            <a:ext cx="502920" cy="502920"/>
+          </a:xfrm>
+          <a:prstGeom prst="ellipse">
+            <a:avLst/>
+          </a:prstGeom>
+          <a:solidFill>
+            <a:schemeClr val="accent2"/>
+          </a:solidFill>
+          <a:ln/>
+        </p:spPr>
+      </p:sp>
+      <p:sp>
+        <p:nvSpPr>
+          <p:cNvPr id="6" name="Text 4"/>
           <p:cNvSpPr txBox="1"/>
           <p:nvPr/>
         </p:nvSpPr>
         <p:spPr>
           <a:xfrm>
-            <a:off x="8138160" y="1920240"/>
-            <a:ext cx="3474720" cy="822960"/>
+            <a:off x="822960" y="2194560"/>
+            <a:ext cx="502920" cy="502920"/>
+          </a:xfrm>
+          <a:prstGeom prst="rect">
+            <a:avLst/>
+          </a:prstGeom>
+          <a:noFill/>
+          <a:ln/>
+        </p:spPr>
+        <p:txBody>
+          <a:bodyPr wrap="square" lIns="0" tIns="0" rIns="0" bIns="0" rtlCol="0" anchor="ctr"/>
+          <a:lstStyle/>
+          <a:p>
+            <a:pPr algn="ctr" indent="0" marL="0">
+              <a:buNone/>
+            </a:pPr>
+            <a:r>
+              <a:rPr lang="en-US" sz="1600" b="1" dirty="0">
+                <a:solidFill>
+                  <a:schemeClr val="bg1"/>
+                </a:solidFill>
+              </a:rPr>
+              <a:t>1</a:t>
+            </a:r>
+            <a:endParaRPr lang="en-US" sz="1600" dirty="0"/>
+          </a:p>
+        </p:txBody>
+      </p:sp>
+      <p:sp>
+        <p:nvSpPr>
+          <p:cNvPr id="7" name="Text 5"/>
+          <p:cNvSpPr txBox="1"/>
+          <p:nvPr/>
+        </p:nvSpPr>
+        <p:spPr>
+          <a:xfrm>
+            <a:off x="1508760" y="2194560"/>
+            <a:ext cx="3749040" cy="822960"/>
           </a:xfrm>
           <a:prstGeom prst="rect">
             <a:avLst/>
@@ -4879,30 +4499,286 @@
               <a:buNone/>
             </a:pPr>
             <a:r>
-              <a:rPr lang="en-US" sz="4800" b="1" dirty="0">
-                <a:solidFill>
-                  <a:schemeClr val="accent3"/>
+              <a:rPr lang="en-US" sz="1500" dirty="0">
+                <a:solidFill>
+                  <a:schemeClr val="tx2"/>
+                </a:solidFill>
+              </a:rPr>
+              <a:t>Écarter les modèles non corrigés</a:t>
+            </a:r>
+            <a:endParaRPr lang="en-US" sz="1500" dirty="0"/>
+          </a:p>
+        </p:txBody>
+      </p:sp>
+      <p:sp>
+        <p:nvSpPr>
+          <p:cNvPr id="8" name="Shape 6"/>
+          <p:cNvSpPr/>
+          <p:nvPr/>
+        </p:nvSpPr>
+        <p:spPr>
+          <a:xfrm>
+            <a:off x="822960" y="3337560"/>
+            <a:ext cx="502920" cy="502920"/>
+          </a:xfrm>
+          <a:prstGeom prst="ellipse">
+            <a:avLst/>
+          </a:prstGeom>
+          <a:solidFill>
+            <a:schemeClr val="accent2"/>
+          </a:solidFill>
+          <a:ln/>
+        </p:spPr>
+      </p:sp>
+      <p:sp>
+        <p:nvSpPr>
+          <p:cNvPr id="9" name="Text 7"/>
+          <p:cNvSpPr txBox="1"/>
+          <p:nvPr/>
+        </p:nvSpPr>
+        <p:spPr>
+          <a:xfrm>
+            <a:off x="822960" y="3337560"/>
+            <a:ext cx="502920" cy="502920"/>
+          </a:xfrm>
+          <a:prstGeom prst="rect">
+            <a:avLst/>
+          </a:prstGeom>
+          <a:noFill/>
+          <a:ln/>
+        </p:spPr>
+        <p:txBody>
+          <a:bodyPr wrap="square" lIns="0" tIns="0" rIns="0" bIns="0" rtlCol="0" anchor="ctr"/>
+          <a:lstStyle/>
+          <a:p>
+            <a:pPr algn="ctr" indent="0" marL="0">
+              <a:buNone/>
+            </a:pPr>
+            <a:r>
+              <a:rPr lang="en-US" sz="1600" b="1" dirty="0">
+                <a:solidFill>
+                  <a:schemeClr val="bg1"/>
+                </a:solidFill>
+              </a:rPr>
+              <a:t>2</a:t>
+            </a:r>
+            <a:endParaRPr lang="en-US" sz="1600" dirty="0"/>
+          </a:p>
+        </p:txBody>
+      </p:sp>
+      <p:sp>
+        <p:nvSpPr>
+          <p:cNvPr id="10" name="Text 8"/>
+          <p:cNvSpPr txBox="1"/>
+          <p:nvPr/>
+        </p:nvSpPr>
+        <p:spPr>
+          <a:xfrm>
+            <a:off x="1508760" y="3337560"/>
+            <a:ext cx="3749040" cy="822960"/>
+          </a:xfrm>
+          <a:prstGeom prst="rect">
+            <a:avLst/>
+          </a:prstGeom>
+          <a:noFill/>
+          <a:ln/>
+        </p:spPr>
+        <p:txBody>
+          <a:bodyPr wrap="square" lIns="0" tIns="0" rIns="0" bIns="0" rtlCol="0" anchor="ctr"/>
+          <a:lstStyle/>
+          <a:p>
+            <a:pPr indent="0" marL="0">
+              <a:buNone/>
+            </a:pPr>
+            <a:r>
+              <a:rPr lang="en-US" sz="1500" dirty="0">
+                <a:solidFill>
+                  <a:schemeClr val="tx2"/>
+                </a:solidFill>
+              </a:rPr>
+              <a:t>Garder ceux à moins de 0,03 du meilleur F1</a:t>
+            </a:r>
+            <a:endParaRPr lang="en-US" sz="1500" dirty="0"/>
+          </a:p>
+        </p:txBody>
+      </p:sp>
+      <p:sp>
+        <p:nvSpPr>
+          <p:cNvPr id="11" name="Shape 9"/>
+          <p:cNvSpPr/>
+          <p:nvPr/>
+        </p:nvSpPr>
+        <p:spPr>
+          <a:xfrm>
+            <a:off x="822960" y="4480560"/>
+            <a:ext cx="502920" cy="502920"/>
+          </a:xfrm>
+          <a:prstGeom prst="ellipse">
+            <a:avLst/>
+          </a:prstGeom>
+          <a:solidFill>
+            <a:schemeClr val="accent2"/>
+          </a:solidFill>
+          <a:ln/>
+        </p:spPr>
+      </p:sp>
+      <p:sp>
+        <p:nvSpPr>
+          <p:cNvPr id="12" name="Text 10"/>
+          <p:cNvSpPr txBox="1"/>
+          <p:nvPr/>
+        </p:nvSpPr>
+        <p:spPr>
+          <a:xfrm>
+            <a:off x="822960" y="4480560"/>
+            <a:ext cx="502920" cy="502920"/>
+          </a:xfrm>
+          <a:prstGeom prst="rect">
+            <a:avLst/>
+          </a:prstGeom>
+          <a:noFill/>
+          <a:ln/>
+        </p:spPr>
+        <p:txBody>
+          <a:bodyPr wrap="square" lIns="0" tIns="0" rIns="0" bIns="0" rtlCol="0" anchor="ctr"/>
+          <a:lstStyle/>
+          <a:p>
+            <a:pPr algn="ctr" indent="0" marL="0">
+              <a:buNone/>
+            </a:pPr>
+            <a:r>
+              <a:rPr lang="en-US" sz="1600" b="1" dirty="0">
+                <a:solidFill>
+                  <a:schemeClr val="bg1"/>
+                </a:solidFill>
+              </a:rPr>
+              <a:t>3</a:t>
+            </a:r>
+            <a:endParaRPr lang="en-US" sz="1600" dirty="0"/>
+          </a:p>
+        </p:txBody>
+      </p:sp>
+      <p:sp>
+        <p:nvSpPr>
+          <p:cNvPr id="13" name="Text 11"/>
+          <p:cNvSpPr txBox="1"/>
+          <p:nvPr/>
+        </p:nvSpPr>
+        <p:spPr>
+          <a:xfrm>
+            <a:off x="1508760" y="4480560"/>
+            <a:ext cx="3749040" cy="822960"/>
+          </a:xfrm>
+          <a:prstGeom prst="rect">
+            <a:avLst/>
+          </a:prstGeom>
+          <a:noFill/>
+          <a:ln/>
+        </p:spPr>
+        <p:txBody>
+          <a:bodyPr wrap="square" lIns="0" tIns="0" rIns="0" bIns="0" rtlCol="0" anchor="ctr"/>
+          <a:lstStyle/>
+          <a:p>
+            <a:pPr indent="0" marL="0">
+              <a:buNone/>
+            </a:pPr>
+            <a:r>
+              <a:rPr lang="en-US" sz="1500" dirty="0">
+                <a:solidFill>
+                  <a:schemeClr val="tx2"/>
+                </a:solidFill>
+              </a:rPr>
+              <a:t>Choisir le plus petit écart sexe × origine, puis le plus sobre</a:t>
+            </a:r>
+            <a:endParaRPr lang="en-US" sz="1500" dirty="0"/>
+          </a:p>
+        </p:txBody>
+      </p:sp>
+      <p:sp>
+        <p:nvSpPr>
+          <p:cNvPr id="14" name="Text 12"/>
+          <p:cNvSpPr txBox="1"/>
+          <p:nvPr/>
+        </p:nvSpPr>
+        <p:spPr>
+          <a:xfrm>
+            <a:off x="822960" y="5166360"/>
+            <a:ext cx="4389120" cy="777240"/>
+          </a:xfrm>
+          <a:prstGeom prst="rect">
+            <a:avLst/>
+          </a:prstGeom>
+          <a:noFill/>
+          <a:ln/>
+        </p:spPr>
+        <p:txBody>
+          <a:bodyPr wrap="square" lIns="0" tIns="0" rIns="0" bIns="0" rtlCol="0" anchor="ctr"/>
+          <a:lstStyle/>
+          <a:p>
+            <a:pPr indent="0" marL="0">
+              <a:buNone/>
+            </a:pPr>
+            <a:r>
+              <a:rPr lang="en-US" sz="1300" i="1" dirty="0">
+                <a:solidFill>
+                  <a:schemeClr val="tx2"/>
+                </a:solidFill>
+              </a:rPr>
+              <a:t>Short-list : fine-tuning complet et distillation. Le LoRA corrigé avait le plus petit écart mais un F1 trop bas (0,637).</a:t>
+            </a:r>
+            <a:endParaRPr lang="en-US" sz="1300" dirty="0"/>
+          </a:p>
+        </p:txBody>
+      </p:sp>
+      <p:sp>
+        <p:nvSpPr>
+          <p:cNvPr id="15" name="Text 13"/>
+          <p:cNvSpPr txBox="1"/>
+          <p:nvPr/>
+        </p:nvSpPr>
+        <p:spPr>
+          <a:xfrm>
+            <a:off x="5852160" y="1463040"/>
+            <a:ext cx="2743200" cy="822960"/>
+          </a:xfrm>
+          <a:prstGeom prst="rect">
+            <a:avLst/>
+          </a:prstGeom>
+          <a:noFill/>
+          <a:ln/>
+        </p:spPr>
+        <p:txBody>
+          <a:bodyPr wrap="square" lIns="0" tIns="0" rIns="0" bIns="0" rtlCol="0" anchor="ctr"/>
+          <a:lstStyle/>
+          <a:p>
+            <a:pPr indent="0" marL="0">
+              <a:buNone/>
+            </a:pPr>
+            <a:r>
+              <a:rPr lang="en-US" sz="4400" b="1" dirty="0">
+                <a:solidFill>
+                  <a:schemeClr val="tx1"/>
                 </a:solidFill>
                 <a:latin typeface="Cambria" pitchFamily="34" charset="0"/>
                 <a:ea typeface="Cambria" pitchFamily="34" charset="-122"/>
                 <a:cs typeface="Cambria" pitchFamily="34" charset="-120"/>
               </a:rPr>
-              <a:t>31 pts</a:t>
-            </a:r>
-            <a:endParaRPr lang="en-US" sz="4800" dirty="0"/>
-          </a:p>
-        </p:txBody>
-      </p:sp>
-      <p:sp>
-        <p:nvSpPr>
-          <p:cNvPr id="6" name="Text 3"/>
+              <a:t>0,706</a:t>
+            </a:r>
+            <a:endParaRPr lang="en-US" sz="4400" dirty="0"/>
+          </a:p>
+        </p:txBody>
+      </p:sp>
+      <p:sp>
+        <p:nvSpPr>
+          <p:cNvPr id="16" name="Text 14"/>
           <p:cNvSpPr txBox="1"/>
           <p:nvPr/>
         </p:nvSpPr>
         <p:spPr>
           <a:xfrm>
-            <a:off x="8138160" y="2743200"/>
-            <a:ext cx="3474720" cy="914400"/>
+            <a:off x="5852160" y="2286000"/>
+            <a:ext cx="2743200" cy="365760"/>
           </a:xfrm>
           <a:prstGeom prst="rect">
             <a:avLst/>
@@ -4923,7 +4799,7 @@
                   <a:schemeClr val="tx2"/>
                 </a:solidFill>
               </a:rPr>
-              <a:t>d'écart avant correction : une femme a deux fois moins de chances, à dossier identique</a:t>
+              <a:t>F1 macro</a:t>
             </a:r>
             <a:endParaRPr lang="en-US" sz="1400" dirty="0"/>
           </a:p>
@@ -4931,14 +4807,14 @@
       </p:sp>
       <p:sp>
         <p:nvSpPr>
-          <p:cNvPr id="7" name="Text 4"/>
+          <p:cNvPr id="17" name="Text 15"/>
           <p:cNvSpPr txBox="1"/>
           <p:nvPr/>
         </p:nvSpPr>
         <p:spPr>
           <a:xfrm>
-            <a:off x="8138160" y="3931920"/>
-            <a:ext cx="3474720" cy="822960"/>
+            <a:off x="8778240" y="1463040"/>
+            <a:ext cx="2743200" cy="822960"/>
           </a:xfrm>
           <a:prstGeom prst="rect">
             <a:avLst/>
@@ -4954,30 +4830,30 @@
               <a:buNone/>
             </a:pPr>
             <a:r>
-              <a:rPr lang="en-US" sz="4800" b="1" dirty="0">
-                <a:solidFill>
-                  <a:schemeClr val="accent2"/>
+              <a:rPr lang="en-US" sz="4400" b="1" dirty="0">
+                <a:solidFill>
+                  <a:schemeClr val="tx1"/>
                 </a:solidFill>
                 <a:latin typeface="Cambria" pitchFamily="34" charset="0"/>
                 <a:ea typeface="Cambria" pitchFamily="34" charset="-122"/>
                 <a:cs typeface="Cambria" pitchFamily="34" charset="-120"/>
               </a:rPr>
-              <a:t>0,7 pt</a:t>
-            </a:r>
-            <a:endParaRPr lang="en-US" sz="4800" dirty="0"/>
-          </a:p>
-        </p:txBody>
-      </p:sp>
-      <p:sp>
-        <p:nvSpPr>
-          <p:cNvPr id="8" name="Text 5"/>
+              <a:t>80,8 %</a:t>
+            </a:r>
+            <a:endParaRPr lang="en-US" sz="4400" dirty="0"/>
+          </a:p>
+        </p:txBody>
+      </p:sp>
+      <p:sp>
+        <p:nvSpPr>
+          <p:cNvPr id="18" name="Text 16"/>
           <p:cNvSpPr txBox="1"/>
           <p:nvPr/>
         </p:nvSpPr>
         <p:spPr>
           <a:xfrm>
-            <a:off x="8138160" y="4754880"/>
-            <a:ext cx="3474720" cy="914400"/>
+            <a:off x="8778240" y="2286000"/>
+            <a:ext cx="2743200" cy="365760"/>
           </a:xfrm>
           <a:prstGeom prst="rect">
             <a:avLst/>
@@ -4998,7 +4874,193 @@
                   <a:schemeClr val="tx2"/>
                 </a:solidFill>
               </a:rPr>
-              <a:t>d'écart après : le sexe et l'origine ne changent plus la décision</a:t>
+              <a:t>accuracy</a:t>
+            </a:r>
+            <a:endParaRPr lang="en-US" sz="1400" dirty="0"/>
+          </a:p>
+        </p:txBody>
+      </p:sp>
+      <p:sp>
+        <p:nvSpPr>
+          <p:cNvPr id="19" name="Text 17"/>
+          <p:cNvSpPr txBox="1"/>
+          <p:nvPr/>
+        </p:nvSpPr>
+        <p:spPr>
+          <a:xfrm>
+            <a:off x="5852160" y="3291840"/>
+            <a:ext cx="2743200" cy="822960"/>
+          </a:xfrm>
+          <a:prstGeom prst="rect">
+            <a:avLst/>
+          </a:prstGeom>
+          <a:noFill/>
+          <a:ln/>
+        </p:spPr>
+        <p:txBody>
+          <a:bodyPr wrap="square" lIns="0" tIns="0" rIns="0" bIns="0" rtlCol="0" anchor="ctr"/>
+          <a:lstStyle/>
+          <a:p>
+            <a:pPr indent="0" marL="0">
+              <a:buNone/>
+            </a:pPr>
+            <a:r>
+              <a:rPr lang="en-US" sz="4400" b="1" dirty="0">
+                <a:solidFill>
+                  <a:schemeClr val="accent2"/>
+                </a:solidFill>
+                <a:latin typeface="Cambria" pitchFamily="34" charset="0"/>
+                <a:ea typeface="Cambria" pitchFamily="34" charset="-122"/>
+                <a:cs typeface="Cambria" pitchFamily="34" charset="-120"/>
+              </a:rPr>
+              <a:t>0,06</a:t>
+            </a:r>
+            <a:endParaRPr lang="en-US" sz="4400" dirty="0"/>
+          </a:p>
+        </p:txBody>
+      </p:sp>
+      <p:sp>
+        <p:nvSpPr>
+          <p:cNvPr id="20" name="Text 18"/>
+          <p:cNvSpPr txBox="1"/>
+          <p:nvPr/>
+        </p:nvSpPr>
+        <p:spPr>
+          <a:xfrm>
+            <a:off x="5852160" y="4114800"/>
+            <a:ext cx="2743200" cy="365760"/>
+          </a:xfrm>
+          <a:prstGeom prst="rect">
+            <a:avLst/>
+          </a:prstGeom>
+          <a:noFill/>
+          <a:ln/>
+        </p:spPr>
+        <p:txBody>
+          <a:bodyPr wrap="square" lIns="0" tIns="0" rIns="0" bIns="0" rtlCol="0" anchor="ctr"/>
+          <a:lstStyle/>
+          <a:p>
+            <a:pPr indent="0" marL="0">
+              <a:buNone/>
+            </a:pPr>
+            <a:r>
+              <a:rPr lang="en-US" sz="1400" dirty="0">
+                <a:solidFill>
+                  <a:schemeClr val="tx2"/>
+                </a:solidFill>
+              </a:rPr>
+              <a:t>écart de parité sexe</a:t>
+            </a:r>
+            <a:endParaRPr lang="en-US" sz="1400" dirty="0"/>
+          </a:p>
+        </p:txBody>
+      </p:sp>
+      <p:sp>
+        <p:nvSpPr>
+          <p:cNvPr id="21" name="Text 19"/>
+          <p:cNvSpPr txBox="1"/>
+          <p:nvPr/>
+        </p:nvSpPr>
+        <p:spPr>
+          <a:xfrm>
+            <a:off x="8778240" y="3291840"/>
+            <a:ext cx="2743200" cy="822960"/>
+          </a:xfrm>
+          <a:prstGeom prst="rect">
+            <a:avLst/>
+          </a:prstGeom>
+          <a:noFill/>
+          <a:ln/>
+        </p:spPr>
+        <p:txBody>
+          <a:bodyPr wrap="square" lIns="0" tIns="0" rIns="0" bIns="0" rtlCol="0" anchor="ctr"/>
+          <a:lstStyle/>
+          <a:p>
+            <a:pPr indent="0" marL="0">
+              <a:buNone/>
+            </a:pPr>
+            <a:r>
+              <a:rPr lang="en-US" sz="4400" b="1" dirty="0">
+                <a:solidFill>
+                  <a:schemeClr val="accent2"/>
+                </a:solidFill>
+                <a:latin typeface="Cambria" pitchFamily="34" charset="0"/>
+                <a:ea typeface="Cambria" pitchFamily="34" charset="-122"/>
+                <a:cs typeface="Cambria" pitchFamily="34" charset="-120"/>
+              </a:rPr>
+              <a:t>0,001</a:t>
+            </a:r>
+            <a:endParaRPr lang="en-US" sz="4400" dirty="0"/>
+          </a:p>
+        </p:txBody>
+      </p:sp>
+      <p:sp>
+        <p:nvSpPr>
+          <p:cNvPr id="22" name="Text 20"/>
+          <p:cNvSpPr txBox="1"/>
+          <p:nvPr/>
+        </p:nvSpPr>
+        <p:spPr>
+          <a:xfrm>
+            <a:off x="8778240" y="4114800"/>
+            <a:ext cx="2743200" cy="365760"/>
+          </a:xfrm>
+          <a:prstGeom prst="rect">
+            <a:avLst/>
+          </a:prstGeom>
+          <a:noFill/>
+          <a:ln/>
+        </p:spPr>
+        <p:txBody>
+          <a:bodyPr wrap="square" lIns="0" tIns="0" rIns="0" bIns="0" rtlCol="0" anchor="ctr"/>
+          <a:lstStyle/>
+          <a:p>
+            <a:pPr indent="0" marL="0">
+              <a:buNone/>
+            </a:pPr>
+            <a:r>
+              <a:rPr lang="en-US" sz="1400" dirty="0">
+                <a:solidFill>
+                  <a:schemeClr val="tx2"/>
+                </a:solidFill>
+              </a:rPr>
+              <a:t>écart d'égalité des chances</a:t>
+            </a:r>
+            <a:endParaRPr lang="en-US" sz="1400" dirty="0"/>
+          </a:p>
+        </p:txBody>
+      </p:sp>
+      <p:sp>
+        <p:nvSpPr>
+          <p:cNvPr id="23" name="Text 21"/>
+          <p:cNvSpPr txBox="1"/>
+          <p:nvPr/>
+        </p:nvSpPr>
+        <p:spPr>
+          <a:xfrm>
+            <a:off x="5852160" y="5257800"/>
+            <a:ext cx="5760720" cy="731520"/>
+          </a:xfrm>
+          <a:prstGeom prst="rect">
+            <a:avLst/>
+          </a:prstGeom>
+          <a:noFill/>
+          <a:ln/>
+        </p:spPr>
+        <p:txBody>
+          <a:bodyPr wrap="square" lIns="0" tIns="0" rIns="0" bIns="0" rtlCol="0" anchor="ctr"/>
+          <a:lstStyle/>
+          <a:p>
+            <a:pPr indent="0" marL="0">
+              <a:buNone/>
+            </a:pPr>
+            <a:r>
+              <a:rPr lang="en-US" sz="1400" dirty="0">
+                <a:solidFill>
+                  <a:schemeClr val="tx2"/>
+                </a:solidFill>
+              </a:rPr>
+              <a:t>Contrepartie : 268 Mo et 67 M de paramètres entraînés. La distillation (18 Mo, F1 0,686) est l'alternative sobre.</a:t>
             </a:r>
             <a:endParaRPr lang="en-US" sz="1400" dirty="0"/>
           </a:p>
@@ -5084,8 +5146,8 @@
         </p:nvSpPr>
         <p:spPr>
           <a:xfrm>
-            <a:off x="548640" y="320040"/>
-            <a:ext cx="11064240" cy="822960"/>
+            <a:off x="548640" y="274320"/>
+            <a:ext cx="11064240" cy="914400"/>
           </a:xfrm>
           <a:prstGeom prst="rect">
             <a:avLst/>
@@ -5101,7 +5163,7 @@
               <a:buNone/>
             </a:pPr>
             <a:r>
-              <a:rPr lang="en-US" sz="3200" b="1" dirty="0">
+              <a:rPr lang="en-US" sz="3600" b="1" dirty="0">
                 <a:solidFill>
                   <a:schemeClr val="tx1"/>
                 </a:solidFill>
@@ -5109,58 +5171,64 @@
                 <a:ea typeface="Cambria" pitchFamily="34" charset="-122"/>
                 <a:cs typeface="Cambria" pitchFamily="34" charset="-120"/>
               </a:rPr>
-              <a:t>LIME et SHAP : « Female » ne pèse plus</a:t>
-            </a:r>
-            <a:endParaRPr lang="en-US" sz="3200" dirty="0"/>
-          </a:p>
-        </p:txBody>
-      </p:sp>
-      <p:pic>
-        <p:nvPicPr>
-          <p:cNvPr id="3" name="Image 0" descr="preencoded.png">    </p:cNvPr>
-          <p:cNvPicPr>
-            <a:picLocks noChangeAspect="1"/>
-          </p:cNvPicPr>
-          <p:nvPr/>
-        </p:nvPicPr>
-        <p:blipFill>
-          <a:blip r:embed="rId1"/>
-          <a:stretch>
-            <a:fillRect/>
-          </a:stretch>
-        </p:blipFill>
-        <p:spPr>
-          <a:xfrm>
-            <a:off x="548640" y="1371600"/>
-            <a:ext cx="11064240" cy="3104355"/>
-          </a:xfrm>
-          <a:prstGeom prst="rect">
-            <a:avLst/>
-          </a:prstGeom>
-        </p:spPr>
-      </p:pic>
-      <p:sp>
-        <p:nvSpPr>
-          <p:cNvPr id="4" name="xai-Avant"/>
-          <p:cNvSpPr/>
-          <p:nvPr/>
-        </p:nvSpPr>
-        <p:spPr>
-          <a:xfrm>
-            <a:off x="548640" y="4754880"/>
-            <a:ext cx="5394960" cy="1417320"/>
-          </a:xfrm>
-          <a:prstGeom prst="roundRect">
-            <a:avLst>
-              <a:gd name="adj" fmla="val 5161"/>
-            </a:avLst>
-          </a:prstGeom>
-          <a:solidFill>
-            <a:schemeClr val="bg2"/>
-          </a:solidFill>
-          <a:ln/>
-        </p:spPr>
-      </p:sp>
+              <a:t>Démo : seuls le sexe et l'origine changent</a:t>
+            </a:r>
+            <a:endParaRPr lang="en-US" sz="3600" dirty="0"/>
+          </a:p>
+        </p:txBody>
+      </p:sp>
+      <p:sp>
+        <p:nvSpPr>
+          <p:cNvPr id="3" name="Text 1"/>
+          <p:cNvSpPr txBox="1"/>
+          <p:nvPr/>
+        </p:nvSpPr>
+        <p:spPr>
+          <a:xfrm>
+            <a:off x="548640" y="1280160"/>
+            <a:ext cx="11064240" cy="365760"/>
+          </a:xfrm>
+          <a:prstGeom prst="rect">
+            <a:avLst/>
+          </a:prstGeom>
+          <a:noFill/>
+          <a:ln/>
+        </p:spPr>
+        <p:txBody>
+          <a:bodyPr wrap="square" lIns="0" tIns="0" rIns="0" bIns="0" rtlCol="0" anchor="ctr"/>
+          <a:lstStyle/>
+          <a:p>
+            <a:pPr indent="0" marL="0">
+              <a:buNone/>
+            </a:pPr>
+            <a:r>
+              <a:rPr lang="en-US" sz="1500" dirty="0">
+                <a:solidFill>
+                  <a:schemeClr val="accent5"/>
+                </a:solidFill>
+              </a:rPr>
+              <a:t>40 ans · Private · Bachelors · Exec-managerial · 45 h/semaine</a:t>
+            </a:r>
+            <a:endParaRPr lang="en-US" sz="1500" dirty="0"/>
+          </a:p>
+        </p:txBody>
+      </p:sp>
+      <p:graphicFrame>
+        <p:nvGraphicFramePr>
+          <p:cNvPr id="4" name="Chart 0" descr=""/>
+          <p:cNvGraphicFramePr/>
+          <p:nvPr/>
+        </p:nvGraphicFramePr>
+        <p:xfrm>
+          <a:off x="548640" y="1737360"/>
+          <a:ext cx="7132320" cy="4389120"/>
+        </p:xfrm>
+        <a:graphic xmlns:a="http://schemas.openxmlformats.org/drawingml/2006/main">
+          <a:graphicData uri="http://schemas.openxmlformats.org/drawingml/2006/chart">
+            <c:chart xmlns:c="http://schemas.openxmlformats.org/drawingml/2006/chart" r:id="rId1"/>
+          </a:graphicData>
+        </a:graphic>
+      </p:graphicFrame>
       <p:sp>
         <p:nvSpPr>
           <p:cNvPr id="5" name="Text 2"/>
@@ -5169,8 +5237,8 @@
         </p:nvSpPr>
         <p:spPr>
           <a:xfrm>
-            <a:off x="822960" y="4864608"/>
-            <a:ext cx="4846320" cy="365760"/>
+            <a:off x="8138160" y="1920240"/>
+            <a:ext cx="3474720" cy="822960"/>
           </a:xfrm>
           <a:prstGeom prst="rect">
             <a:avLst/>
@@ -5186,14 +5254,17 @@
               <a:buNone/>
             </a:pPr>
             <a:r>
-              <a:rPr lang="en-US" sz="1700" b="1" dirty="0">
+              <a:rPr lang="en-US" sz="4800" b="1" dirty="0">
                 <a:solidFill>
                   <a:schemeClr val="accent3"/>
                 </a:solidFill>
-              </a:rPr>
-              <a:t>Avant</a:t>
-            </a:r>
-            <a:endParaRPr lang="en-US" sz="1700" dirty="0"/>
+                <a:latin typeface="Cambria" pitchFamily="34" charset="0"/>
+                <a:ea typeface="Cambria" pitchFamily="34" charset="-122"/>
+                <a:cs typeface="Cambria" pitchFamily="34" charset="-120"/>
+              </a:rPr>
+              <a:t>31 pts</a:t>
+            </a:r>
+            <a:endParaRPr lang="en-US" sz="4800" dirty="0"/>
           </a:p>
         </p:txBody>
       </p:sp>
@@ -5205,8 +5276,8 @@
         </p:nvSpPr>
         <p:spPr>
           <a:xfrm>
-            <a:off x="822960" y="5230368"/>
-            <a:ext cx="4846320" cy="868680"/>
+            <a:off x="8138160" y="2743200"/>
+            <a:ext cx="3474720" cy="914400"/>
           </a:xfrm>
           <a:prstGeom prst="rect">
             <a:avLst/>
@@ -5227,7 +5298,7 @@
                   <a:schemeClr val="tx2"/>
                 </a:solidFill>
               </a:rPr>
-              <a:t>LIME : « Female » est le mot le plus négatif (−0,20). SHAP confirme : « Female » = −0,06, le plus fort effet négatif.</a:t>
+              <a:t>d'écart avant correction : une femme a deux fois moins de chances, à dossier identique</a:t>
             </a:r>
             <a:endParaRPr lang="en-US" sz="1400" dirty="0"/>
           </a:p>
@@ -5235,25 +5306,42 @@
       </p:sp>
       <p:sp>
         <p:nvSpPr>
-          <p:cNvPr id="7" name="xai-Après"/>
-          <p:cNvSpPr/>
-          <p:nvPr/>
-        </p:nvSpPr>
-        <p:spPr>
-          <a:xfrm>
-            <a:off x="6217920" y="4754880"/>
-            <a:ext cx="5394960" cy="1417320"/>
-          </a:xfrm>
-          <a:prstGeom prst="roundRect">
-            <a:avLst>
-              <a:gd name="adj" fmla="val 5161"/>
-            </a:avLst>
-          </a:prstGeom>
-          <a:solidFill>
-            <a:schemeClr val="bg2"/>
-          </a:solidFill>
-          <a:ln/>
-        </p:spPr>
+          <p:cNvPr id="7" name="Text 4"/>
+          <p:cNvSpPr txBox="1"/>
+          <p:nvPr/>
+        </p:nvSpPr>
+        <p:spPr>
+          <a:xfrm>
+            <a:off x="8138160" y="3931920"/>
+            <a:ext cx="3474720" cy="822960"/>
+          </a:xfrm>
+          <a:prstGeom prst="rect">
+            <a:avLst/>
+          </a:prstGeom>
+          <a:noFill/>
+          <a:ln/>
+        </p:spPr>
+        <p:txBody>
+          <a:bodyPr wrap="square" lIns="0" tIns="0" rIns="0" bIns="0" rtlCol="0" anchor="ctr"/>
+          <a:lstStyle/>
+          <a:p>
+            <a:pPr indent="0" marL="0">
+              <a:buNone/>
+            </a:pPr>
+            <a:r>
+              <a:rPr lang="en-US" sz="4800" b="1" dirty="0">
+                <a:solidFill>
+                  <a:schemeClr val="accent2"/>
+                </a:solidFill>
+                <a:latin typeface="Cambria" pitchFamily="34" charset="0"/>
+                <a:ea typeface="Cambria" pitchFamily="34" charset="-122"/>
+                <a:cs typeface="Cambria" pitchFamily="34" charset="-120"/>
+              </a:rPr>
+              <a:t>0,7 pt</a:t>
+            </a:r>
+            <a:endParaRPr lang="en-US" sz="4800" dirty="0"/>
+          </a:p>
+        </p:txBody>
       </p:sp>
       <p:sp>
         <p:nvSpPr>
@@ -5263,8 +5351,8 @@
         </p:nvSpPr>
         <p:spPr>
           <a:xfrm>
-            <a:off x="6492240" y="4864608"/>
-            <a:ext cx="4846320" cy="365760"/>
+            <a:off x="8138160" y="4754880"/>
+            <a:ext cx="3474720" cy="914400"/>
           </a:xfrm>
           <a:prstGeom prst="rect">
             <a:avLst/>
@@ -5280,48 +5368,12 @@
               <a:buNone/>
             </a:pPr>
             <a:r>
-              <a:rPr lang="en-US" sz="1700" b="1" dirty="0">
-                <a:solidFill>
-                  <a:schemeClr val="accent2"/>
-                </a:solidFill>
-              </a:rPr>
-              <a:t>Après</a:t>
-            </a:r>
-            <a:endParaRPr lang="en-US" sz="1700" dirty="0"/>
-          </a:p>
-        </p:txBody>
-      </p:sp>
-      <p:sp>
-        <p:nvSpPr>
-          <p:cNvPr id="9" name="Text 6"/>
-          <p:cNvSpPr txBox="1"/>
-          <p:nvPr/>
-        </p:nvSpPr>
-        <p:spPr>
-          <a:xfrm>
-            <a:off x="6492240" y="5230368"/>
-            <a:ext cx="4846320" cy="868680"/>
-          </a:xfrm>
-          <a:prstGeom prst="rect">
-            <a:avLst/>
-          </a:prstGeom>
-          <a:noFill/>
-          <a:ln/>
-        </p:spPr>
-        <p:txBody>
-          <a:bodyPr wrap="square" lIns="0" tIns="0" rIns="0" bIns="0" rtlCol="0" anchor="ctr"/>
-          <a:lstStyle/>
-          <a:p>
-            <a:pPr indent="0" marL="0">
-              <a:buNone/>
-            </a:pPr>
-            <a:r>
               <a:rPr lang="en-US" sz="1400" dirty="0">
                 <a:solidFill>
                   <a:schemeClr val="tx2"/>
                 </a:solidFill>
               </a:rPr>
-              <a:t>Les mots décisifs sont le diplôme, la profession et les heures. « Black » garde un faible effet résiduel (−0,02).</a:t>
+              <a:t>d'écart après : le sexe et l'origine ne changent plus la décision</a:t>
             </a:r>
             <a:endParaRPr lang="en-US" sz="1400" dirty="0"/>
           </a:p>
@@ -5407,8 +5459,8 @@
         </p:nvSpPr>
         <p:spPr>
           <a:xfrm>
-            <a:off x="548640" y="320040"/>
-            <a:ext cx="11064240" cy="822960"/>
+            <a:off x="548640" y="274320"/>
+            <a:ext cx="11064240" cy="914400"/>
           </a:xfrm>
           <a:prstGeom prst="rect">
             <a:avLst/>
@@ -5424,7 +5476,7 @@
               <a:buNone/>
             </a:pPr>
             <a:r>
-              <a:rPr lang="en-US" sz="3200" b="1" dirty="0">
+              <a:rPr lang="en-US" sz="3600" b="1" dirty="0">
                 <a:solidFill>
                   <a:schemeClr val="tx1"/>
                 </a:solidFill>
@@ -5432,26 +5484,50 @@
                 <a:ea typeface="Cambria" pitchFamily="34" charset="-122"/>
                 <a:cs typeface="Cambria" pitchFamily="34" charset="-120"/>
               </a:rPr>
-              <a:t>Les quatre biais du cours, appliqués au projet</a:t>
-            </a:r>
-            <a:endParaRPr lang="en-US" sz="3200" dirty="0"/>
-          </a:p>
-        </p:txBody>
-      </p:sp>
-      <p:sp>
-        <p:nvSpPr>
-          <p:cNvPr id="3" name="biais-Données"/>
+              <a:t>LIME et SHAP : « Female » ne pèse plus</a:t>
+            </a:r>
+            <a:endParaRPr lang="en-US" sz="3600" dirty="0"/>
+          </a:p>
+        </p:txBody>
+      </p:sp>
+      <p:pic>
+        <p:nvPicPr>
+          <p:cNvPr id="3" name="Image 0" descr="preencoded.png">    </p:cNvPr>
+          <p:cNvPicPr>
+            <a:picLocks noChangeAspect="1"/>
+          </p:cNvPicPr>
+          <p:nvPr/>
+        </p:nvPicPr>
+        <p:blipFill>
+          <a:blip r:embed="rId1"/>
+          <a:stretch>
+            <a:fillRect/>
+          </a:stretch>
+        </p:blipFill>
+        <p:spPr>
+          <a:xfrm>
+            <a:off x="548640" y="1371600"/>
+            <a:ext cx="11064240" cy="3104355"/>
+          </a:xfrm>
+          <a:prstGeom prst="rect">
+            <a:avLst/>
+          </a:prstGeom>
+        </p:spPr>
+      </p:pic>
+      <p:sp>
+        <p:nvSpPr>
+          <p:cNvPr id="4" name="xai-Avant"/>
           <p:cNvSpPr/>
           <p:nvPr/>
         </p:nvSpPr>
         <p:spPr>
           <a:xfrm>
-            <a:off x="548640" y="1417320"/>
-            <a:ext cx="3474720" cy="2103120"/>
+            <a:off x="548640" y="4754880"/>
+            <a:ext cx="5394960" cy="1417320"/>
           </a:xfrm>
           <a:prstGeom prst="roundRect">
             <a:avLst>
-              <a:gd name="adj" fmla="val 3478"/>
+              <a:gd name="adj" fmla="val 5161"/>
             </a:avLst>
           </a:prstGeom>
           <a:solidFill>
@@ -5462,14 +5538,14 @@
       </p:sp>
       <p:sp>
         <p:nvSpPr>
-          <p:cNvPr id="4" name="Text 2"/>
+          <p:cNvPr id="5" name="Text 2"/>
           <p:cNvSpPr txBox="1"/>
           <p:nvPr/>
         </p:nvSpPr>
         <p:spPr>
           <a:xfrm>
-            <a:off x="822960" y="1645920"/>
-            <a:ext cx="2926080" cy="411480"/>
+            <a:off x="822960" y="4864608"/>
+            <a:ext cx="4846320" cy="365760"/>
           </a:xfrm>
           <a:prstGeom prst="rect">
             <a:avLst/>
@@ -5485,27 +5561,27 @@
               <a:buNone/>
             </a:pPr>
             <a:r>
-              <a:rPr lang="en-US" sz="1800" b="1" dirty="0">
-                <a:solidFill>
-                  <a:schemeClr val="tx1"/>
-                </a:solidFill>
-              </a:rPr>
-              <a:t>Données</a:t>
-            </a:r>
-            <a:endParaRPr lang="en-US" sz="1800" dirty="0"/>
-          </a:p>
-        </p:txBody>
-      </p:sp>
-      <p:sp>
-        <p:nvSpPr>
-          <p:cNvPr id="5" name="Text 3"/>
+              <a:rPr lang="en-US" sz="1700" b="1" dirty="0">
+                <a:solidFill>
+                  <a:schemeClr val="accent3"/>
+                </a:solidFill>
+              </a:rPr>
+              <a:t>Avant</a:t>
+            </a:r>
+            <a:endParaRPr lang="en-US" sz="1700" dirty="0"/>
+          </a:p>
+        </p:txBody>
+      </p:sp>
+      <p:sp>
+        <p:nvSpPr>
+          <p:cNvPr id="6" name="Text 3"/>
           <p:cNvSpPr txBox="1"/>
           <p:nvPr/>
         </p:nvSpPr>
         <p:spPr>
           <a:xfrm>
-            <a:off x="822960" y="2148840"/>
-            <a:ext cx="2926080" cy="1188720"/>
+            <a:off x="822960" y="5230368"/>
+            <a:ext cx="4846320" cy="868680"/>
           </a:xfrm>
           <a:prstGeom prst="rect">
             <a:avLst/>
@@ -5526,7 +5602,7 @@
                   <a:schemeClr val="tx2"/>
                 </a:solidFill>
               </a:rPr>
-              <a:t>Écarts historiques de revenu selon le sexe et l'origine (1994)</a:t>
+              <a:t>LIME : « Female » est le mot le plus négatif (−0,20). SHAP confirme : « Female » = −0,06, le plus fort effet négatif.</a:t>
             </a:r>
             <a:endParaRPr lang="en-US" sz="1400" dirty="0"/>
           </a:p>
@@ -5534,18 +5610,18 @@
       </p:sp>
       <p:sp>
         <p:nvSpPr>
-          <p:cNvPr id="6" name="biais-Algorithmique"/>
+          <p:cNvPr id="7" name="xai-Après"/>
           <p:cNvSpPr/>
           <p:nvPr/>
         </p:nvSpPr>
         <p:spPr>
           <a:xfrm>
-            <a:off x="4297680" y="1417320"/>
-            <a:ext cx="3474720" cy="2103120"/>
+            <a:off x="6217920" y="4754880"/>
+            <a:ext cx="5394960" cy="1417320"/>
           </a:xfrm>
           <a:prstGeom prst="roundRect">
             <a:avLst>
-              <a:gd name="adj" fmla="val 3478"/>
+              <a:gd name="adj" fmla="val 5161"/>
             </a:avLst>
           </a:prstGeom>
           <a:solidFill>
@@ -5556,14 +5632,14 @@
       </p:sp>
       <p:sp>
         <p:nvSpPr>
-          <p:cNvPr id="7" name="Text 5"/>
+          <p:cNvPr id="8" name="Text 5"/>
           <p:cNvSpPr txBox="1"/>
           <p:nvPr/>
         </p:nvSpPr>
         <p:spPr>
           <a:xfrm>
-            <a:off x="4572000" y="1645920"/>
-            <a:ext cx="2926080" cy="411480"/>
+            <a:off x="6492240" y="4864608"/>
+            <a:ext cx="4846320" cy="365760"/>
           </a:xfrm>
           <a:prstGeom prst="rect">
             <a:avLst/>
@@ -5579,27 +5655,27 @@
               <a:buNone/>
             </a:pPr>
             <a:r>
-              <a:rPr lang="en-US" sz="1800" b="1" dirty="0">
-                <a:solidFill>
-                  <a:schemeClr val="tx1"/>
-                </a:solidFill>
-              </a:rPr>
-              <a:t>Algorithmique</a:t>
-            </a:r>
-            <a:endParaRPr lang="en-US" sz="1800" dirty="0"/>
-          </a:p>
-        </p:txBody>
-      </p:sp>
-      <p:sp>
-        <p:nvSpPr>
-          <p:cNvPr id="8" name="Text 6"/>
+              <a:rPr lang="en-US" sz="1700" b="1" dirty="0">
+                <a:solidFill>
+                  <a:schemeClr val="accent2"/>
+                </a:solidFill>
+              </a:rPr>
+              <a:t>Après</a:t>
+            </a:r>
+            <a:endParaRPr lang="en-US" sz="1700" dirty="0"/>
+          </a:p>
+        </p:txBody>
+      </p:sp>
+      <p:sp>
+        <p:nvSpPr>
+          <p:cNvPr id="9" name="Text 6"/>
           <p:cNvSpPr txBox="1"/>
           <p:nvPr/>
         </p:nvSpPr>
         <p:spPr>
           <a:xfrm>
-            <a:off x="4572000" y="2148840"/>
-            <a:ext cx="2926080" cy="1188720"/>
+            <a:off x="6492240" y="5230368"/>
+            <a:ext cx="4846320" cy="868680"/>
           </a:xfrm>
           <a:prstGeom prst="rect">
             <a:avLst/>
@@ -5620,469 +5696,7 @@
                   <a:schemeClr val="tx2"/>
                 </a:solidFill>
               </a:rPr>
-              <a:t>Le revenu comme indicateur de solvabilité ; attributs sensibles dans l'entrée</a:t>
-            </a:r>
-            <a:endParaRPr lang="en-US" sz="1400" dirty="0"/>
-          </a:p>
-        </p:txBody>
-      </p:sp>
-      <p:sp>
-        <p:nvSpPr>
-          <p:cNvPr id="9" name="biais-Évaluation"/>
-          <p:cNvSpPr/>
-          <p:nvPr/>
-        </p:nvSpPr>
-        <p:spPr>
-          <a:xfrm>
-            <a:off x="548640" y="3749040"/>
-            <a:ext cx="3474720" cy="2103120"/>
-          </a:xfrm>
-          <a:prstGeom prst="roundRect">
-            <a:avLst>
-              <a:gd name="adj" fmla="val 3478"/>
-            </a:avLst>
-          </a:prstGeom>
-          <a:solidFill>
-            <a:schemeClr val="bg2"/>
-          </a:solidFill>
-          <a:ln/>
-        </p:spPr>
-      </p:sp>
-      <p:sp>
-        <p:nvSpPr>
-          <p:cNvPr id="10" name="Text 8"/>
-          <p:cNvSpPr txBox="1"/>
-          <p:nvPr/>
-        </p:nvSpPr>
-        <p:spPr>
-          <a:xfrm>
-            <a:off x="822960" y="3977640"/>
-            <a:ext cx="2926080" cy="411480"/>
-          </a:xfrm>
-          <a:prstGeom prst="rect">
-            <a:avLst/>
-          </a:prstGeom>
-          <a:noFill/>
-          <a:ln/>
-        </p:spPr>
-        <p:txBody>
-          <a:bodyPr wrap="square" lIns="0" tIns="0" rIns="0" bIns="0" rtlCol="0" anchor="ctr"/>
-          <a:lstStyle/>
-          <a:p>
-            <a:pPr indent="0" marL="0">
-              <a:buNone/>
-            </a:pPr>
-            <a:r>
-              <a:rPr lang="en-US" sz="1800" b="1" dirty="0">
-                <a:solidFill>
-                  <a:schemeClr val="tx1"/>
-                </a:solidFill>
-              </a:rPr>
-              <a:t>Évaluation</a:t>
-            </a:r>
-            <a:endParaRPr lang="en-US" sz="1800" dirty="0"/>
-          </a:p>
-        </p:txBody>
-      </p:sp>
-      <p:sp>
-        <p:nvSpPr>
-          <p:cNvPr id="11" name="Text 9"/>
-          <p:cNvSpPr txBox="1"/>
-          <p:nvPr/>
-        </p:nvSpPr>
-        <p:spPr>
-          <a:xfrm>
-            <a:off x="822960" y="4480560"/>
-            <a:ext cx="2926080" cy="1188720"/>
-          </a:xfrm>
-          <a:prstGeom prst="rect">
-            <a:avLst/>
-          </a:prstGeom>
-          <a:noFill/>
-          <a:ln/>
-        </p:spPr>
-        <p:txBody>
-          <a:bodyPr wrap="square" lIns="0" tIns="0" rIns="0" bIns="0" rtlCol="0" anchor="ctr"/>
-          <a:lstStyle/>
-          <a:p>
-            <a:pPr indent="0" marL="0">
-              <a:buNone/>
-            </a:pPr>
-            <a:r>
-              <a:rPr lang="en-US" sz="1400" dirty="0">
-                <a:solidFill>
-                  <a:schemeClr val="tx2"/>
-                </a:solidFill>
-              </a:rPr>
-              <a:t>L'accuracy masque tout : on suit F1, taux prédit et écarts par groupe</a:t>
-            </a:r>
-            <a:endParaRPr lang="en-US" sz="1400" dirty="0"/>
-          </a:p>
-        </p:txBody>
-      </p:sp>
-      <p:sp>
-        <p:nvSpPr>
-          <p:cNvPr id="12" name="biais-Usage"/>
-          <p:cNvSpPr/>
-          <p:nvPr/>
-        </p:nvSpPr>
-        <p:spPr>
-          <a:xfrm>
-            <a:off x="4297680" y="3749040"/>
-            <a:ext cx="3474720" cy="2103120"/>
-          </a:xfrm>
-          <a:prstGeom prst="roundRect">
-            <a:avLst>
-              <a:gd name="adj" fmla="val 3478"/>
-            </a:avLst>
-          </a:prstGeom>
-          <a:solidFill>
-            <a:schemeClr val="bg2"/>
-          </a:solidFill>
-          <a:ln/>
-        </p:spPr>
-      </p:sp>
-      <p:sp>
-        <p:nvSpPr>
-          <p:cNvPr id="13" name="Text 11"/>
-          <p:cNvSpPr txBox="1"/>
-          <p:nvPr/>
-        </p:nvSpPr>
-        <p:spPr>
-          <a:xfrm>
-            <a:off x="4572000" y="3977640"/>
-            <a:ext cx="2926080" cy="411480"/>
-          </a:xfrm>
-          <a:prstGeom prst="rect">
-            <a:avLst/>
-          </a:prstGeom>
-          <a:noFill/>
-          <a:ln/>
-        </p:spPr>
-        <p:txBody>
-          <a:bodyPr wrap="square" lIns="0" tIns="0" rIns="0" bIns="0" rtlCol="0" anchor="ctr"/>
-          <a:lstStyle/>
-          <a:p>
-            <a:pPr indent="0" marL="0">
-              <a:buNone/>
-            </a:pPr>
-            <a:r>
-              <a:rPr lang="en-US" sz="1800" b="1" dirty="0">
-                <a:solidFill>
-                  <a:schemeClr val="tx1"/>
-                </a:solidFill>
-              </a:rPr>
-              <a:t>Usage</a:t>
-            </a:r>
-            <a:endParaRPr lang="en-US" sz="1800" dirty="0"/>
-          </a:p>
-        </p:txBody>
-      </p:sp>
-      <p:sp>
-        <p:nvSpPr>
-          <p:cNvPr id="14" name="Text 12"/>
-          <p:cNvSpPr txBox="1"/>
-          <p:nvPr/>
-        </p:nvSpPr>
-        <p:spPr>
-          <a:xfrm>
-            <a:off x="4572000" y="4480560"/>
-            <a:ext cx="2926080" cy="1188720"/>
-          </a:xfrm>
-          <a:prstGeom prst="rect">
-            <a:avLst/>
-          </a:prstGeom>
-          <a:noFill/>
-          <a:ln/>
-        </p:spPr>
-        <p:txBody>
-          <a:bodyPr wrap="square" lIns="0" tIns="0" rIns="0" bIns="0" rtlCol="0" anchor="ctr"/>
-          <a:lstStyle/>
-          <a:p>
-            <a:pPr indent="0" marL="0">
-              <a:buNone/>
-            </a:pPr>
-            <a:r>
-              <a:rPr lang="en-US" sz="1400" dirty="0">
-                <a:solidFill>
-                  <a:schemeClr val="tx2"/>
-                </a:solidFill>
-              </a:rPr>
-              <a:t>Boucle de rétroaction : refus de crédit, revenus plus bas, nouveaux refus</a:t>
-            </a:r>
-            <a:endParaRPr lang="en-US" sz="1400" dirty="0"/>
-          </a:p>
-        </p:txBody>
-      </p:sp>
-      <p:sp>
-        <p:nvSpPr>
-          <p:cNvPr id="15" name="amont-aval"/>
-          <p:cNvSpPr/>
-          <p:nvPr/>
-        </p:nvSpPr>
-        <p:spPr>
-          <a:xfrm>
-            <a:off x="8138160" y="1417320"/>
-            <a:ext cx="3474720" cy="4434840"/>
-          </a:xfrm>
-          <a:prstGeom prst="roundRect">
-            <a:avLst>
-              <a:gd name="adj" fmla="val 2105"/>
-            </a:avLst>
-          </a:prstGeom>
-          <a:solidFill>
-            <a:schemeClr val="tx1"/>
-          </a:solidFill>
-          <a:ln/>
-        </p:spPr>
-      </p:sp>
-      <p:sp>
-        <p:nvSpPr>
-          <p:cNvPr id="16" name="Text 14"/>
-          <p:cNvSpPr txBox="1"/>
-          <p:nvPr/>
-        </p:nvSpPr>
-        <p:spPr>
-          <a:xfrm>
-            <a:off x="8412480" y="1645920"/>
-            <a:ext cx="2926080" cy="411480"/>
-          </a:xfrm>
-          <a:prstGeom prst="rect">
-            <a:avLst/>
-          </a:prstGeom>
-          <a:noFill/>
-          <a:ln/>
-        </p:spPr>
-        <p:txBody>
-          <a:bodyPr wrap="square" lIns="0" tIns="0" rIns="0" bIns="0" rtlCol="0" anchor="ctr"/>
-          <a:lstStyle/>
-          <a:p>
-            <a:pPr indent="0" marL="0">
-              <a:buNone/>
-            </a:pPr>
-            <a:r>
-              <a:rPr lang="en-US" sz="1800" b="1" dirty="0">
-                <a:solidFill>
-                  <a:schemeClr val="bg1"/>
-                </a:solidFill>
-              </a:rPr>
-              <a:t>Tout au long du cycle</a:t>
-            </a:r>
-            <a:endParaRPr lang="en-US" sz="1800" dirty="0"/>
-          </a:p>
-        </p:txBody>
-      </p:sp>
-      <p:sp>
-        <p:nvSpPr>
-          <p:cNvPr id="17" name="Text 15"/>
-          <p:cNvSpPr txBox="1"/>
-          <p:nvPr/>
-        </p:nvSpPr>
-        <p:spPr>
-          <a:xfrm>
-            <a:off x="8412480" y="2286000"/>
-            <a:ext cx="2926080" cy="320040"/>
-          </a:xfrm>
-          <a:prstGeom prst="rect">
-            <a:avLst/>
-          </a:prstGeom>
-          <a:noFill/>
-          <a:ln/>
-        </p:spPr>
-        <p:txBody>
-          <a:bodyPr wrap="square" lIns="0" tIns="0" rIns="0" bIns="0" rtlCol="0" anchor="ctr"/>
-          <a:lstStyle/>
-          <a:p>
-            <a:pPr indent="0" marL="0">
-              <a:buNone/>
-            </a:pPr>
-            <a:r>
-              <a:rPr lang="en-US" sz="1500" b="1" dirty="0">
-                <a:solidFill>
-                  <a:schemeClr val="accent2"/>
-                </a:solidFill>
-              </a:rPr>
-              <a:t>Amont</a:t>
-            </a:r>
-            <a:endParaRPr lang="en-US" sz="1500" dirty="0"/>
-          </a:p>
-        </p:txBody>
-      </p:sp>
-      <p:sp>
-        <p:nvSpPr>
-          <p:cNvPr id="18" name="Text 16"/>
-          <p:cNvSpPr txBox="1"/>
-          <p:nvPr/>
-        </p:nvSpPr>
-        <p:spPr>
-          <a:xfrm>
-            <a:off x="8412480" y="2606040"/>
-            <a:ext cx="2926080" cy="731520"/>
-          </a:xfrm>
-          <a:prstGeom prst="rect">
-            <a:avLst/>
-          </a:prstGeom>
-          <a:noFill/>
-          <a:ln/>
-        </p:spPr>
-        <p:txBody>
-          <a:bodyPr wrap="square" lIns="0" tIns="0" rIns="0" bIns="0" rtlCol="0" anchor="ctr"/>
-          <a:lstStyle/>
-          <a:p>
-            <a:pPr indent="0" marL="0">
-              <a:buNone/>
-            </a:pPr>
-            <a:r>
-              <a:rPr lang="en-US" sz="1400" dirty="0">
-                <a:solidFill>
-                  <a:schemeClr val="bg2"/>
-                </a:solidFill>
-              </a:rPr>
-              <a:t>audit, y compris intersectionnel</a:t>
-            </a:r>
-            <a:endParaRPr lang="en-US" sz="1400" dirty="0"/>
-          </a:p>
-        </p:txBody>
-      </p:sp>
-      <p:sp>
-        <p:nvSpPr>
-          <p:cNvPr id="19" name="Text 17"/>
-          <p:cNvSpPr txBox="1"/>
-          <p:nvPr/>
-        </p:nvSpPr>
-        <p:spPr>
-          <a:xfrm>
-            <a:off x="8412480" y="3429000"/>
-            <a:ext cx="2926080" cy="320040"/>
-          </a:xfrm>
-          <a:prstGeom prst="rect">
-            <a:avLst/>
-          </a:prstGeom>
-          <a:noFill/>
-          <a:ln/>
-        </p:spPr>
-        <p:txBody>
-          <a:bodyPr wrap="square" lIns="0" tIns="0" rIns="0" bIns="0" rtlCol="0" anchor="ctr"/>
-          <a:lstStyle/>
-          <a:p>
-            <a:pPr indent="0" marL="0">
-              <a:buNone/>
-            </a:pPr>
-            <a:r>
-              <a:rPr lang="en-US" sz="1500" b="1" dirty="0">
-                <a:solidFill>
-                  <a:schemeClr val="accent2"/>
-                </a:solidFill>
-              </a:rPr>
-              <a:t>Pendant</a:t>
-            </a:r>
-            <a:endParaRPr lang="en-US" sz="1500" dirty="0"/>
-          </a:p>
-        </p:txBody>
-      </p:sp>
-      <p:sp>
-        <p:nvSpPr>
-          <p:cNvPr id="20" name="Text 18"/>
-          <p:cNvSpPr txBox="1"/>
-          <p:nvPr/>
-        </p:nvSpPr>
-        <p:spPr>
-          <a:xfrm>
-            <a:off x="8412480" y="3749040"/>
-            <a:ext cx="2926080" cy="731520"/>
-          </a:xfrm>
-          <a:prstGeom prst="rect">
-            <a:avLst/>
-          </a:prstGeom>
-          <a:noFill/>
-          <a:ln/>
-        </p:spPr>
-        <p:txBody>
-          <a:bodyPr wrap="square" lIns="0" tIns="0" rIns="0" bIns="0" rtlCol="0" anchor="ctr"/>
-          <a:lstStyle/>
-          <a:p>
-            <a:pPr indent="0" marL="0">
-              <a:buNone/>
-            </a:pPr>
-            <a:r>
-              <a:rPr lang="en-US" sz="1400" dirty="0">
-                <a:solidFill>
-                  <a:schemeClr val="bg2"/>
-                </a:solidFill>
-              </a:rPr>
-              <a:t>repondération, métriques par sous-groupe</a:t>
-            </a:r>
-            <a:endParaRPr lang="en-US" sz="1400" dirty="0"/>
-          </a:p>
-        </p:txBody>
-      </p:sp>
-      <p:sp>
-        <p:nvSpPr>
-          <p:cNvPr id="21" name="Text 19"/>
-          <p:cNvSpPr txBox="1"/>
-          <p:nvPr/>
-        </p:nvSpPr>
-        <p:spPr>
-          <a:xfrm>
-            <a:off x="8412480" y="4572000"/>
-            <a:ext cx="2926080" cy="320040"/>
-          </a:xfrm>
-          <a:prstGeom prst="rect">
-            <a:avLst/>
-          </a:prstGeom>
-          <a:noFill/>
-          <a:ln/>
-        </p:spPr>
-        <p:txBody>
-          <a:bodyPr wrap="square" lIns="0" tIns="0" rIns="0" bIns="0" rtlCol="0" anchor="ctr"/>
-          <a:lstStyle/>
-          <a:p>
-            <a:pPr indent="0" marL="0">
-              <a:buNone/>
-            </a:pPr>
-            <a:r>
-              <a:rPr lang="en-US" sz="1500" b="1" dirty="0">
-                <a:solidFill>
-                  <a:schemeClr val="accent2"/>
-                </a:solidFill>
-              </a:rPr>
-              <a:t>Aval</a:t>
-            </a:r>
-            <a:endParaRPr lang="en-US" sz="1500" dirty="0"/>
-          </a:p>
-        </p:txBody>
-      </p:sp>
-      <p:sp>
-        <p:nvSpPr>
-          <p:cNvPr id="22" name="Text 20"/>
-          <p:cNvSpPr txBox="1"/>
-          <p:nvPr/>
-        </p:nvSpPr>
-        <p:spPr>
-          <a:xfrm>
-            <a:off x="8412480" y="4892040"/>
-            <a:ext cx="2926080" cy="731520"/>
-          </a:xfrm>
-          <a:prstGeom prst="rect">
-            <a:avLst/>
-          </a:prstGeom>
-          <a:noFill/>
-          <a:ln/>
-        </p:spPr>
-        <p:txBody>
-          <a:bodyPr wrap="square" lIns="0" tIns="0" rIns="0" bIns="0" rtlCol="0" anchor="ctr"/>
-          <a:lstStyle/>
-          <a:p>
-            <a:pPr indent="0" marL="0">
-              <a:buNone/>
-            </a:pPr>
-            <a:r>
-              <a:rPr lang="en-US" sz="1400" dirty="0">
-                <a:solidFill>
-                  <a:schemeClr val="bg2"/>
-                </a:solidFill>
-              </a:rPr>
-              <a:t>explication au demandeur, recours humain, suivi des écarts</a:t>
+              <a:t>Les mots décisifs sont le diplôme, la profession et les heures. « Black » garde un faible effet résiduel (−0,02).</a:t>
             </a:r>
             <a:endParaRPr lang="en-US" sz="1400" dirty="0"/>
           </a:p>
@@ -6168,34 +5782,795 @@
         </p:nvSpPr>
         <p:spPr>
           <a:xfrm>
-            <a:off x="731520" y="2103120"/>
-            <a:ext cx="10698480" cy="1463040"/>
-          </a:xfrm>
-          <a:prstGeom prst="rect">
-            <a:avLst/>
-          </a:prstGeom>
-          <a:noFill/>
-          <a:ln/>
-        </p:spPr>
-        <p:txBody>
-          <a:bodyPr wrap="square" rtlCol="0" anchor="b"/>
-          <a:lstStyle/>
-          <a:p>
-            <a:pPr algn="l" indent="0" marL="0">
+            <a:off x="548640" y="274320"/>
+            <a:ext cx="11064240" cy="914400"/>
+          </a:xfrm>
+          <a:prstGeom prst="rect">
+            <a:avLst/>
+          </a:prstGeom>
+          <a:noFill/>
+          <a:ln/>
+        </p:spPr>
+        <p:txBody>
+          <a:bodyPr wrap="square" rtlCol="0" anchor="ctr"/>
+          <a:lstStyle/>
+          <a:p>
+            <a:pPr indent="0" marL="0">
               <a:buNone/>
             </a:pPr>
             <a:r>
-              <a:rPr lang="en-US" sz="4400" b="1" dirty="0">
-                <a:solidFill>
-                  <a:schemeClr val="bg1"/>
+              <a:rPr lang="en-US" sz="3600" b="1" dirty="0">
+                <a:solidFill>
+                  <a:schemeClr val="tx1"/>
                 </a:solidFill>
                 <a:latin typeface="Cambria" pitchFamily="34" charset="0"/>
                 <a:ea typeface="Cambria" pitchFamily="34" charset="-122"/>
                 <a:cs typeface="Cambria" pitchFamily="34" charset="-120"/>
               </a:rPr>
+              <a:t>Les quatre biais du cours, appliqués au projet</a:t>
+            </a:r>
+            <a:endParaRPr lang="en-US" sz="3600" dirty="0"/>
+          </a:p>
+        </p:txBody>
+      </p:sp>
+      <p:sp>
+        <p:nvSpPr>
+          <p:cNvPr id="3" name="biais-Données"/>
+          <p:cNvSpPr/>
+          <p:nvPr/>
+        </p:nvSpPr>
+        <p:spPr>
+          <a:xfrm>
+            <a:off x="548640" y="1417320"/>
+            <a:ext cx="3474720" cy="2103120"/>
+          </a:xfrm>
+          <a:prstGeom prst="roundRect">
+            <a:avLst>
+              <a:gd name="adj" fmla="val 3478"/>
+            </a:avLst>
+          </a:prstGeom>
+          <a:solidFill>
+            <a:schemeClr val="bg2"/>
+          </a:solidFill>
+          <a:ln/>
+        </p:spPr>
+      </p:sp>
+      <p:sp>
+        <p:nvSpPr>
+          <p:cNvPr id="4" name="Text 2"/>
+          <p:cNvSpPr txBox="1"/>
+          <p:nvPr/>
+        </p:nvSpPr>
+        <p:spPr>
+          <a:xfrm>
+            <a:off x="822960" y="1645920"/>
+            <a:ext cx="2926080" cy="411480"/>
+          </a:xfrm>
+          <a:prstGeom prst="rect">
+            <a:avLst/>
+          </a:prstGeom>
+          <a:noFill/>
+          <a:ln/>
+        </p:spPr>
+        <p:txBody>
+          <a:bodyPr wrap="square" lIns="0" tIns="0" rIns="0" bIns="0" rtlCol="0" anchor="ctr"/>
+          <a:lstStyle/>
+          <a:p>
+            <a:pPr indent="0" marL="0">
+              <a:buNone/>
+            </a:pPr>
+            <a:r>
+              <a:rPr lang="en-US" sz="1800" b="1" dirty="0">
+                <a:solidFill>
+                  <a:schemeClr val="tx1"/>
+                </a:solidFill>
+              </a:rPr>
+              <a:t>Données</a:t>
+            </a:r>
+            <a:endParaRPr lang="en-US" sz="1800" dirty="0"/>
+          </a:p>
+        </p:txBody>
+      </p:sp>
+      <p:sp>
+        <p:nvSpPr>
+          <p:cNvPr id="5" name="Text 3"/>
+          <p:cNvSpPr txBox="1"/>
+          <p:nvPr/>
+        </p:nvSpPr>
+        <p:spPr>
+          <a:xfrm>
+            <a:off x="822960" y="2148840"/>
+            <a:ext cx="2926080" cy="1188720"/>
+          </a:xfrm>
+          <a:prstGeom prst="rect">
+            <a:avLst/>
+          </a:prstGeom>
+          <a:noFill/>
+          <a:ln/>
+        </p:spPr>
+        <p:txBody>
+          <a:bodyPr wrap="square" lIns="0" tIns="0" rIns="0" bIns="0" rtlCol="0" anchor="ctr"/>
+          <a:lstStyle/>
+          <a:p>
+            <a:pPr indent="0" marL="0">
+              <a:buNone/>
+            </a:pPr>
+            <a:r>
+              <a:rPr lang="en-US" sz="1400" dirty="0">
+                <a:solidFill>
+                  <a:schemeClr val="tx2"/>
+                </a:solidFill>
+              </a:rPr>
+              <a:t>Écarts historiques de revenu selon le sexe et l'origine (1994)</a:t>
+            </a:r>
+            <a:endParaRPr lang="en-US" sz="1400" dirty="0"/>
+          </a:p>
+        </p:txBody>
+      </p:sp>
+      <p:sp>
+        <p:nvSpPr>
+          <p:cNvPr id="6" name="biais-Algorithmique"/>
+          <p:cNvSpPr/>
+          <p:nvPr/>
+        </p:nvSpPr>
+        <p:spPr>
+          <a:xfrm>
+            <a:off x="4297680" y="1417320"/>
+            <a:ext cx="3474720" cy="2103120"/>
+          </a:xfrm>
+          <a:prstGeom prst="roundRect">
+            <a:avLst>
+              <a:gd name="adj" fmla="val 3478"/>
+            </a:avLst>
+          </a:prstGeom>
+          <a:solidFill>
+            <a:schemeClr val="bg2"/>
+          </a:solidFill>
+          <a:ln/>
+        </p:spPr>
+      </p:sp>
+      <p:sp>
+        <p:nvSpPr>
+          <p:cNvPr id="7" name="Text 5"/>
+          <p:cNvSpPr txBox="1"/>
+          <p:nvPr/>
+        </p:nvSpPr>
+        <p:spPr>
+          <a:xfrm>
+            <a:off x="4572000" y="1645920"/>
+            <a:ext cx="2926080" cy="411480"/>
+          </a:xfrm>
+          <a:prstGeom prst="rect">
+            <a:avLst/>
+          </a:prstGeom>
+          <a:noFill/>
+          <a:ln/>
+        </p:spPr>
+        <p:txBody>
+          <a:bodyPr wrap="square" lIns="0" tIns="0" rIns="0" bIns="0" rtlCol="0" anchor="ctr"/>
+          <a:lstStyle/>
+          <a:p>
+            <a:pPr indent="0" marL="0">
+              <a:buNone/>
+            </a:pPr>
+            <a:r>
+              <a:rPr lang="en-US" sz="1800" b="1" dirty="0">
+                <a:solidFill>
+                  <a:schemeClr val="tx1"/>
+                </a:solidFill>
+              </a:rPr>
+              <a:t>Algorithmique</a:t>
+            </a:r>
+            <a:endParaRPr lang="en-US" sz="1800" dirty="0"/>
+          </a:p>
+        </p:txBody>
+      </p:sp>
+      <p:sp>
+        <p:nvSpPr>
+          <p:cNvPr id="8" name="Text 6"/>
+          <p:cNvSpPr txBox="1"/>
+          <p:nvPr/>
+        </p:nvSpPr>
+        <p:spPr>
+          <a:xfrm>
+            <a:off x="4572000" y="2148840"/>
+            <a:ext cx="2926080" cy="1188720"/>
+          </a:xfrm>
+          <a:prstGeom prst="rect">
+            <a:avLst/>
+          </a:prstGeom>
+          <a:noFill/>
+          <a:ln/>
+        </p:spPr>
+        <p:txBody>
+          <a:bodyPr wrap="square" lIns="0" tIns="0" rIns="0" bIns="0" rtlCol="0" anchor="ctr"/>
+          <a:lstStyle/>
+          <a:p>
+            <a:pPr indent="0" marL="0">
+              <a:buNone/>
+            </a:pPr>
+            <a:r>
+              <a:rPr lang="en-US" sz="1400" dirty="0">
+                <a:solidFill>
+                  <a:schemeClr val="tx2"/>
+                </a:solidFill>
+              </a:rPr>
+              <a:t>Le revenu comme indicateur de solvabilité ; attributs sensibles dans l'entrée</a:t>
+            </a:r>
+            <a:endParaRPr lang="en-US" sz="1400" dirty="0"/>
+          </a:p>
+        </p:txBody>
+      </p:sp>
+      <p:sp>
+        <p:nvSpPr>
+          <p:cNvPr id="9" name="biais-Évaluation"/>
+          <p:cNvSpPr/>
+          <p:nvPr/>
+        </p:nvSpPr>
+        <p:spPr>
+          <a:xfrm>
+            <a:off x="548640" y="3749040"/>
+            <a:ext cx="3474720" cy="2103120"/>
+          </a:xfrm>
+          <a:prstGeom prst="roundRect">
+            <a:avLst>
+              <a:gd name="adj" fmla="val 3478"/>
+            </a:avLst>
+          </a:prstGeom>
+          <a:solidFill>
+            <a:schemeClr val="bg2"/>
+          </a:solidFill>
+          <a:ln/>
+        </p:spPr>
+      </p:sp>
+      <p:sp>
+        <p:nvSpPr>
+          <p:cNvPr id="10" name="Text 8"/>
+          <p:cNvSpPr txBox="1"/>
+          <p:nvPr/>
+        </p:nvSpPr>
+        <p:spPr>
+          <a:xfrm>
+            <a:off x="822960" y="3977640"/>
+            <a:ext cx="2926080" cy="411480"/>
+          </a:xfrm>
+          <a:prstGeom prst="rect">
+            <a:avLst/>
+          </a:prstGeom>
+          <a:noFill/>
+          <a:ln/>
+        </p:spPr>
+        <p:txBody>
+          <a:bodyPr wrap="square" lIns="0" tIns="0" rIns="0" bIns="0" rtlCol="0" anchor="ctr"/>
+          <a:lstStyle/>
+          <a:p>
+            <a:pPr indent="0" marL="0">
+              <a:buNone/>
+            </a:pPr>
+            <a:r>
+              <a:rPr lang="en-US" sz="1800" b="1" dirty="0">
+                <a:solidFill>
+                  <a:schemeClr val="tx1"/>
+                </a:solidFill>
+              </a:rPr>
+              <a:t>Évaluation</a:t>
+            </a:r>
+            <a:endParaRPr lang="en-US" sz="1800" dirty="0"/>
+          </a:p>
+        </p:txBody>
+      </p:sp>
+      <p:sp>
+        <p:nvSpPr>
+          <p:cNvPr id="11" name="Text 9"/>
+          <p:cNvSpPr txBox="1"/>
+          <p:nvPr/>
+        </p:nvSpPr>
+        <p:spPr>
+          <a:xfrm>
+            <a:off x="822960" y="4480560"/>
+            <a:ext cx="2926080" cy="1188720"/>
+          </a:xfrm>
+          <a:prstGeom prst="rect">
+            <a:avLst/>
+          </a:prstGeom>
+          <a:noFill/>
+          <a:ln/>
+        </p:spPr>
+        <p:txBody>
+          <a:bodyPr wrap="square" lIns="0" tIns="0" rIns="0" bIns="0" rtlCol="0" anchor="ctr"/>
+          <a:lstStyle/>
+          <a:p>
+            <a:pPr indent="0" marL="0">
+              <a:buNone/>
+            </a:pPr>
+            <a:r>
+              <a:rPr lang="en-US" sz="1400" dirty="0">
+                <a:solidFill>
+                  <a:schemeClr val="tx2"/>
+                </a:solidFill>
+              </a:rPr>
+              <a:t>L'accuracy masque tout : on suit F1, taux prédit et écarts par groupe</a:t>
+            </a:r>
+            <a:endParaRPr lang="en-US" sz="1400" dirty="0"/>
+          </a:p>
+        </p:txBody>
+      </p:sp>
+      <p:sp>
+        <p:nvSpPr>
+          <p:cNvPr id="12" name="biais-Usage"/>
+          <p:cNvSpPr/>
+          <p:nvPr/>
+        </p:nvSpPr>
+        <p:spPr>
+          <a:xfrm>
+            <a:off x="4297680" y="3749040"/>
+            <a:ext cx="3474720" cy="2103120"/>
+          </a:xfrm>
+          <a:prstGeom prst="roundRect">
+            <a:avLst>
+              <a:gd name="adj" fmla="val 3478"/>
+            </a:avLst>
+          </a:prstGeom>
+          <a:solidFill>
+            <a:schemeClr val="bg2"/>
+          </a:solidFill>
+          <a:ln/>
+        </p:spPr>
+      </p:sp>
+      <p:sp>
+        <p:nvSpPr>
+          <p:cNvPr id="13" name="Text 11"/>
+          <p:cNvSpPr txBox="1"/>
+          <p:nvPr/>
+        </p:nvSpPr>
+        <p:spPr>
+          <a:xfrm>
+            <a:off x="4572000" y="3977640"/>
+            <a:ext cx="2926080" cy="411480"/>
+          </a:xfrm>
+          <a:prstGeom prst="rect">
+            <a:avLst/>
+          </a:prstGeom>
+          <a:noFill/>
+          <a:ln/>
+        </p:spPr>
+        <p:txBody>
+          <a:bodyPr wrap="square" lIns="0" tIns="0" rIns="0" bIns="0" rtlCol="0" anchor="ctr"/>
+          <a:lstStyle/>
+          <a:p>
+            <a:pPr indent="0" marL="0">
+              <a:buNone/>
+            </a:pPr>
+            <a:r>
+              <a:rPr lang="en-US" sz="1800" b="1" dirty="0">
+                <a:solidFill>
+                  <a:schemeClr val="tx1"/>
+                </a:solidFill>
+              </a:rPr>
+              <a:t>Usage</a:t>
+            </a:r>
+            <a:endParaRPr lang="en-US" sz="1800" dirty="0"/>
+          </a:p>
+        </p:txBody>
+      </p:sp>
+      <p:sp>
+        <p:nvSpPr>
+          <p:cNvPr id="14" name="Text 12"/>
+          <p:cNvSpPr txBox="1"/>
+          <p:nvPr/>
+        </p:nvSpPr>
+        <p:spPr>
+          <a:xfrm>
+            <a:off x="4572000" y="4480560"/>
+            <a:ext cx="2926080" cy="1188720"/>
+          </a:xfrm>
+          <a:prstGeom prst="rect">
+            <a:avLst/>
+          </a:prstGeom>
+          <a:noFill/>
+          <a:ln/>
+        </p:spPr>
+        <p:txBody>
+          <a:bodyPr wrap="square" lIns="0" tIns="0" rIns="0" bIns="0" rtlCol="0" anchor="ctr"/>
+          <a:lstStyle/>
+          <a:p>
+            <a:pPr indent="0" marL="0">
+              <a:buNone/>
+            </a:pPr>
+            <a:r>
+              <a:rPr lang="en-US" sz="1400" dirty="0">
+                <a:solidFill>
+                  <a:schemeClr val="tx2"/>
+                </a:solidFill>
+              </a:rPr>
+              <a:t>Boucle de rétroaction : refus de crédit, revenus plus bas, nouveaux refus</a:t>
+            </a:r>
+            <a:endParaRPr lang="en-US" sz="1400" dirty="0"/>
+          </a:p>
+        </p:txBody>
+      </p:sp>
+      <p:sp>
+        <p:nvSpPr>
+          <p:cNvPr id="15" name="amont-aval"/>
+          <p:cNvSpPr/>
+          <p:nvPr/>
+        </p:nvSpPr>
+        <p:spPr>
+          <a:xfrm>
+            <a:off x="8138160" y="1417320"/>
+            <a:ext cx="3474720" cy="4434840"/>
+          </a:xfrm>
+          <a:prstGeom prst="roundRect">
+            <a:avLst>
+              <a:gd name="adj" fmla="val 2105"/>
+            </a:avLst>
+          </a:prstGeom>
+          <a:solidFill>
+            <a:schemeClr val="tx1"/>
+          </a:solidFill>
+          <a:ln/>
+        </p:spPr>
+      </p:sp>
+      <p:sp>
+        <p:nvSpPr>
+          <p:cNvPr id="16" name="Text 14"/>
+          <p:cNvSpPr txBox="1"/>
+          <p:nvPr/>
+        </p:nvSpPr>
+        <p:spPr>
+          <a:xfrm>
+            <a:off x="8412480" y="1645920"/>
+            <a:ext cx="2926080" cy="411480"/>
+          </a:xfrm>
+          <a:prstGeom prst="rect">
+            <a:avLst/>
+          </a:prstGeom>
+          <a:noFill/>
+          <a:ln/>
+        </p:spPr>
+        <p:txBody>
+          <a:bodyPr wrap="square" lIns="0" tIns="0" rIns="0" bIns="0" rtlCol="0" anchor="ctr"/>
+          <a:lstStyle/>
+          <a:p>
+            <a:pPr indent="0" marL="0">
+              <a:buNone/>
+            </a:pPr>
+            <a:r>
+              <a:rPr lang="en-US" sz="1800" b="1" dirty="0">
+                <a:solidFill>
+                  <a:schemeClr val="bg1"/>
+                </a:solidFill>
+              </a:rPr>
+              <a:t>Tout au long du cycle</a:t>
+            </a:r>
+            <a:endParaRPr lang="en-US" sz="1800" dirty="0"/>
+          </a:p>
+        </p:txBody>
+      </p:sp>
+      <p:sp>
+        <p:nvSpPr>
+          <p:cNvPr id="17" name="Text 15"/>
+          <p:cNvSpPr txBox="1"/>
+          <p:nvPr/>
+        </p:nvSpPr>
+        <p:spPr>
+          <a:xfrm>
+            <a:off x="8412480" y="2286000"/>
+            <a:ext cx="2926080" cy="320040"/>
+          </a:xfrm>
+          <a:prstGeom prst="rect">
+            <a:avLst/>
+          </a:prstGeom>
+          <a:noFill/>
+          <a:ln/>
+        </p:spPr>
+        <p:txBody>
+          <a:bodyPr wrap="square" lIns="0" tIns="0" rIns="0" bIns="0" rtlCol="0" anchor="ctr"/>
+          <a:lstStyle/>
+          <a:p>
+            <a:pPr indent="0" marL="0">
+              <a:buNone/>
+            </a:pPr>
+            <a:r>
+              <a:rPr lang="en-US" sz="1500" b="1" dirty="0">
+                <a:solidFill>
+                  <a:schemeClr val="accent2"/>
+                </a:solidFill>
+              </a:rPr>
+              <a:t>Amont</a:t>
+            </a:r>
+            <a:endParaRPr lang="en-US" sz="1500" dirty="0"/>
+          </a:p>
+        </p:txBody>
+      </p:sp>
+      <p:sp>
+        <p:nvSpPr>
+          <p:cNvPr id="18" name="Text 16"/>
+          <p:cNvSpPr txBox="1"/>
+          <p:nvPr/>
+        </p:nvSpPr>
+        <p:spPr>
+          <a:xfrm>
+            <a:off x="8412480" y="2606040"/>
+            <a:ext cx="2926080" cy="731520"/>
+          </a:xfrm>
+          <a:prstGeom prst="rect">
+            <a:avLst/>
+          </a:prstGeom>
+          <a:noFill/>
+          <a:ln/>
+        </p:spPr>
+        <p:txBody>
+          <a:bodyPr wrap="square" lIns="0" tIns="0" rIns="0" bIns="0" rtlCol="0" anchor="ctr"/>
+          <a:lstStyle/>
+          <a:p>
+            <a:pPr indent="0" marL="0">
+              <a:buNone/>
+            </a:pPr>
+            <a:r>
+              <a:rPr lang="en-US" sz="1400" dirty="0">
+                <a:solidFill>
+                  <a:schemeClr val="bg2"/>
+                </a:solidFill>
+              </a:rPr>
+              <a:t>audit, y compris intersectionnel</a:t>
+            </a:r>
+            <a:endParaRPr lang="en-US" sz="1400" dirty="0"/>
+          </a:p>
+        </p:txBody>
+      </p:sp>
+      <p:sp>
+        <p:nvSpPr>
+          <p:cNvPr id="19" name="Text 17"/>
+          <p:cNvSpPr txBox="1"/>
+          <p:nvPr/>
+        </p:nvSpPr>
+        <p:spPr>
+          <a:xfrm>
+            <a:off x="8412480" y="3429000"/>
+            <a:ext cx="2926080" cy="320040"/>
+          </a:xfrm>
+          <a:prstGeom prst="rect">
+            <a:avLst/>
+          </a:prstGeom>
+          <a:noFill/>
+          <a:ln/>
+        </p:spPr>
+        <p:txBody>
+          <a:bodyPr wrap="square" lIns="0" tIns="0" rIns="0" bIns="0" rtlCol="0" anchor="ctr"/>
+          <a:lstStyle/>
+          <a:p>
+            <a:pPr indent="0" marL="0">
+              <a:buNone/>
+            </a:pPr>
+            <a:r>
+              <a:rPr lang="en-US" sz="1500" b="1" dirty="0">
+                <a:solidFill>
+                  <a:schemeClr val="accent2"/>
+                </a:solidFill>
+              </a:rPr>
+              <a:t>Pendant</a:t>
+            </a:r>
+            <a:endParaRPr lang="en-US" sz="1500" dirty="0"/>
+          </a:p>
+        </p:txBody>
+      </p:sp>
+      <p:sp>
+        <p:nvSpPr>
+          <p:cNvPr id="20" name="Text 18"/>
+          <p:cNvSpPr txBox="1"/>
+          <p:nvPr/>
+        </p:nvSpPr>
+        <p:spPr>
+          <a:xfrm>
+            <a:off x="8412480" y="3749040"/>
+            <a:ext cx="2926080" cy="731520"/>
+          </a:xfrm>
+          <a:prstGeom prst="rect">
+            <a:avLst/>
+          </a:prstGeom>
+          <a:noFill/>
+          <a:ln/>
+        </p:spPr>
+        <p:txBody>
+          <a:bodyPr wrap="square" lIns="0" tIns="0" rIns="0" bIns="0" rtlCol="0" anchor="ctr"/>
+          <a:lstStyle/>
+          <a:p>
+            <a:pPr indent="0" marL="0">
+              <a:buNone/>
+            </a:pPr>
+            <a:r>
+              <a:rPr lang="en-US" sz="1400" dirty="0">
+                <a:solidFill>
+                  <a:schemeClr val="bg2"/>
+                </a:solidFill>
+              </a:rPr>
+              <a:t>repondération, métriques par sous-groupe</a:t>
+            </a:r>
+            <a:endParaRPr lang="en-US" sz="1400" dirty="0"/>
+          </a:p>
+        </p:txBody>
+      </p:sp>
+      <p:sp>
+        <p:nvSpPr>
+          <p:cNvPr id="21" name="Text 19"/>
+          <p:cNvSpPr txBox="1"/>
+          <p:nvPr/>
+        </p:nvSpPr>
+        <p:spPr>
+          <a:xfrm>
+            <a:off x="8412480" y="4572000"/>
+            <a:ext cx="2926080" cy="320040"/>
+          </a:xfrm>
+          <a:prstGeom prst="rect">
+            <a:avLst/>
+          </a:prstGeom>
+          <a:noFill/>
+          <a:ln/>
+        </p:spPr>
+        <p:txBody>
+          <a:bodyPr wrap="square" lIns="0" tIns="0" rIns="0" bIns="0" rtlCol="0" anchor="ctr"/>
+          <a:lstStyle/>
+          <a:p>
+            <a:pPr indent="0" marL="0">
+              <a:buNone/>
+            </a:pPr>
+            <a:r>
+              <a:rPr lang="en-US" sz="1500" b="1" dirty="0">
+                <a:solidFill>
+                  <a:schemeClr val="accent2"/>
+                </a:solidFill>
+              </a:rPr>
+              <a:t>Aval</a:t>
+            </a:r>
+            <a:endParaRPr lang="en-US" sz="1500" dirty="0"/>
+          </a:p>
+        </p:txBody>
+      </p:sp>
+      <p:sp>
+        <p:nvSpPr>
+          <p:cNvPr id="22" name="Text 20"/>
+          <p:cNvSpPr txBox="1"/>
+          <p:nvPr/>
+        </p:nvSpPr>
+        <p:spPr>
+          <a:xfrm>
+            <a:off x="8412480" y="4892040"/>
+            <a:ext cx="2926080" cy="731520"/>
+          </a:xfrm>
+          <a:prstGeom prst="rect">
+            <a:avLst/>
+          </a:prstGeom>
+          <a:noFill/>
+          <a:ln/>
+        </p:spPr>
+        <p:txBody>
+          <a:bodyPr wrap="square" lIns="0" tIns="0" rIns="0" bIns="0" rtlCol="0" anchor="ctr"/>
+          <a:lstStyle/>
+          <a:p>
+            <a:pPr indent="0" marL="0">
+              <a:buNone/>
+            </a:pPr>
+            <a:r>
+              <a:rPr lang="en-US" sz="1400" dirty="0">
+                <a:solidFill>
+                  <a:schemeClr val="bg2"/>
+                </a:solidFill>
+              </a:rPr>
+              <a:t>explication au demandeur, recours humain, suivi des écarts</a:t>
+            </a:r>
+            <a:endParaRPr lang="en-US" sz="1400" dirty="0"/>
+          </a:p>
+        </p:txBody>
+      </p:sp>
+      <p:sp>
+        <p:nvSpPr>
+          <p:cNvPr id="25" name="Slide Number Placeholder 0"/>
+          <p:cNvSpPr>
+            <a:spLocks noGrp="1"/>
+          </p:cNvSpPr>
+          <p:nvPr>
+            <p:ph type="sldNum" sz="quarter" idx="4294967295"/>
+          </p:nvPr>
+        </p:nvSpPr>
+        <p:spPr>
+          <a:xfrm>
+            <a:off x="11155680" y="6400800"/>
+            <a:ext cx="457200" cy="274320"/>
+          </a:xfrm>
+          <a:prstGeom prst="rect">
+            <a:avLst/>
+          </a:prstGeom>
+          <a:extLst>
+            <a:ext uri="{C572A759-6A51-4108-AA02-DFA0A04FC94B}">
+              <ma14:wrappingTextBoxFlag xmlns:ma14="http://schemas.microsoft.com/office/mac/drawingml/2011/main" val="0"/>
+            </a:ext>
+          </a:extLst>
+        </p:spPr>
+        <p:txBody>
+          <a:bodyPr/>
+          <a:lstStyle>
+            <a:lvl1pPr>
+              <a:defRPr sz="1000">
+                <a:solidFill>
+                  <a:srgbClr val="8E93B5"/>
+                </a:solidFill>
+              </a:defRPr>
+            </a:lvl1pPr>
+          </a:lstStyle>
+          <a:p>
+            <a:pPr algn="l"/>
+            <a:fld id="{F7021451-1387-4CA6-816F-3879F97B5CBC}" type="slidenum">
+              <a:rPr b="0" lang="en-US"/>
+              <a:t>14</a:t>
+            </a:fld>
+            <a:endParaRPr lang="en-US"/>
+          </a:p>
+        </p:txBody>
+      </p:sp>
+    </p:spTree>
+  </p:cSld>
+  <p:clrMapOvr>
+    <a:masterClrMapping/>
+  </p:clrMapOvr>
+</p:sld>
+</file>
+
+<file path=ppt/slides/slide15.xml><?xml version="1.0" encoding="utf-8"?>
+<p:sld xmlns:a="http://schemas.openxmlformats.org/drawingml/2006/main" xmlns:r="http://schemas.openxmlformats.org/officeDocument/2006/relationships" xmlns:p="http://schemas.openxmlformats.org/presentationml/2006/main">
+  <p:cSld name="Slide 15">
+    <p:spTree>
+      <p:nvGrpSpPr>
+        <p:cNvPr id="1" name=""/>
+        <p:cNvGrpSpPr/>
+        <p:nvPr/>
+      </p:nvGrpSpPr>
+      <p:grpSpPr>
+        <a:xfrm>
+          <a:off x="0" y="0"/>
+          <a:ext cx="0" cy="0"/>
+          <a:chOff x="0" y="0"/>
+          <a:chExt cx="0" cy="0"/>
+        </a:xfrm>
+      </p:grpSpPr>
+      <p:sp>
+        <p:nvSpPr>
+          <p:cNvPr id="2" name="Text 0"/>
+          <p:cNvSpPr/>
+          <p:nvPr>
+            <p:ph idx="100" type="title" hasCustomPrompt="1"/>
+          </p:nvPr>
+        </p:nvSpPr>
+        <p:spPr>
+          <a:xfrm>
+            <a:off x="731520" y="1280160"/>
+            <a:ext cx="10698480" cy="2286000"/>
+          </a:xfrm>
+          <a:prstGeom prst="rect">
+            <a:avLst/>
+          </a:prstGeom>
+          <a:noFill/>
+          <a:ln/>
+        </p:spPr>
+        <p:txBody>
+          <a:bodyPr wrap="square" rtlCol="0" anchor="b"/>
+          <a:lstStyle/>
+          <a:p>
+            <a:pPr algn="l" indent="0" marL="0">
+              <a:buNone/>
+            </a:pPr>
+            <a:r>
+              <a:rPr lang="en-US" sz="6600" b="1" dirty="0">
+                <a:solidFill>
+                  <a:schemeClr val="bg1"/>
+                </a:solidFill>
+                <a:latin typeface="Cambria" pitchFamily="34" charset="0"/>
+                <a:ea typeface="Cambria" pitchFamily="34" charset="-122"/>
+                <a:cs typeface="Cambria" pitchFamily="34" charset="-120"/>
+              </a:rPr>
               <a:t>Plus équitable, pas encore juste</a:t>
             </a:r>
-            <a:endParaRPr lang="en-US" sz="4400" dirty="0"/>
+            <a:endParaRPr lang="en-US" sz="6600" dirty="0"/>
           </a:p>
         </p:txBody>
       </p:sp>
@@ -6312,8 +6687,8 @@
         </p:nvSpPr>
         <p:spPr>
           <a:xfrm>
-            <a:off x="548640" y="320040"/>
-            <a:ext cx="11064240" cy="822960"/>
+            <a:off x="548640" y="274320"/>
+            <a:ext cx="11064240" cy="914400"/>
           </a:xfrm>
           <a:prstGeom prst="rect">
             <a:avLst/>
@@ -6329,7 +6704,7 @@
               <a:buNone/>
             </a:pPr>
             <a:r>
-              <a:rPr lang="en-US" sz="3200" b="1" dirty="0">
+              <a:rPr lang="en-US" sz="3600" b="1" dirty="0">
                 <a:solidFill>
                   <a:schemeClr val="tx1"/>
                 </a:solidFill>
@@ -6337,26 +6712,212 @@
                 <a:ea typeface="Cambria" pitchFamily="34" charset="-122"/>
                 <a:cs typeface="Cambria" pitchFamily="34" charset="-120"/>
               </a:rPr>
-              <a:t>Cas d'usage : pré-qualifier une demande de crédit</a:t>
-            </a:r>
-            <a:endParaRPr lang="en-US" sz="3200" dirty="0"/>
-          </a:p>
-        </p:txBody>
-      </p:sp>
-      <p:sp>
-        <p:nvSpPr>
-          <p:cNvPr id="3" name="carte-cas"/>
+              <a:t>Le but : une IA éthique dès la conception</a:t>
+            </a:r>
+            <a:endParaRPr lang="en-US" sz="3600" dirty="0"/>
+          </a:p>
+        </p:txBody>
+      </p:sp>
+      <p:sp>
+        <p:nvSpPr>
+          <p:cNvPr id="3" name="Text 1"/>
+          <p:cNvSpPr txBox="1"/>
+          <p:nvPr/>
+        </p:nvSpPr>
+        <p:spPr>
+          <a:xfrm>
+            <a:off x="548640" y="1463040"/>
+            <a:ext cx="11064240" cy="365760"/>
+          </a:xfrm>
+          <a:prstGeom prst="rect">
+            <a:avLst/>
+          </a:prstGeom>
+          <a:noFill/>
+          <a:ln/>
+        </p:spPr>
+        <p:txBody>
+          <a:bodyPr wrap="square" lIns="0" tIns="0" rIns="0" bIns="0" rtlCol="0" anchor="ctr"/>
+          <a:lstStyle/>
+          <a:p>
+            <a:pPr indent="0" marL="0">
+              <a:buNone/>
+            </a:pPr>
+            <a:r>
+              <a:rPr lang="en-US" sz="1600" dirty="0">
+                <a:solidFill>
+                  <a:schemeClr val="accent5"/>
+                </a:solidFill>
+              </a:rPr>
+              <a:t>Consigne du projet (cours 4)</a:t>
+            </a:r>
+            <a:endParaRPr lang="en-US" sz="1600" dirty="0"/>
+          </a:p>
+        </p:txBody>
+      </p:sp>
+      <p:sp>
+        <p:nvSpPr>
+          <p:cNvPr id="4" name="objectif-1"/>
           <p:cNvSpPr/>
           <p:nvPr/>
         </p:nvSpPr>
         <p:spPr>
           <a:xfrm>
-            <a:off x="548640" y="1371600"/>
-            <a:ext cx="5486400" cy="4663440"/>
+            <a:off x="548640" y="2057400"/>
+            <a:ext cx="2606040" cy="3291840"/>
           </a:xfrm>
           <a:prstGeom prst="roundRect">
             <a:avLst>
-              <a:gd name="adj" fmla="val 1569"/>
+              <a:gd name="adj" fmla="val 2807"/>
+            </a:avLst>
+          </a:prstGeom>
+          <a:solidFill>
+            <a:srgbClr val="FCE9E4"/>
+          </a:solidFill>
+          <a:ln/>
+        </p:spPr>
+      </p:sp>
+      <p:sp>
+        <p:nvSpPr>
+          <p:cNvPr id="5" name="Shape 3"/>
+          <p:cNvSpPr/>
+          <p:nvPr/>
+        </p:nvSpPr>
+        <p:spPr>
+          <a:xfrm>
+            <a:off x="822960" y="2331720"/>
+            <a:ext cx="502920" cy="502920"/>
+          </a:xfrm>
+          <a:prstGeom prst="ellipse">
+            <a:avLst/>
+          </a:prstGeom>
+          <a:solidFill>
+            <a:schemeClr val="accent3"/>
+          </a:solidFill>
+          <a:ln/>
+        </p:spPr>
+      </p:sp>
+      <p:sp>
+        <p:nvSpPr>
+          <p:cNvPr id="6" name="Text 4"/>
+          <p:cNvSpPr txBox="1"/>
+          <p:nvPr/>
+        </p:nvSpPr>
+        <p:spPr>
+          <a:xfrm>
+            <a:off x="822960" y="2331720"/>
+            <a:ext cx="502920" cy="502920"/>
+          </a:xfrm>
+          <a:prstGeom prst="rect">
+            <a:avLst/>
+          </a:prstGeom>
+          <a:noFill/>
+          <a:ln/>
+        </p:spPr>
+        <p:txBody>
+          <a:bodyPr wrap="square" lIns="0" tIns="0" rIns="0" bIns="0" rtlCol="0" anchor="ctr"/>
+          <a:lstStyle/>
+          <a:p>
+            <a:pPr algn="ctr" indent="0" marL="0">
+              <a:buNone/>
+            </a:pPr>
+            <a:r>
+              <a:rPr lang="en-US" sz="1600" b="1" dirty="0">
+                <a:solidFill>
+                  <a:schemeClr val="bg1"/>
+                </a:solidFill>
+              </a:rPr>
+              <a:t>1</a:t>
+            </a:r>
+            <a:endParaRPr lang="en-US" sz="1600" dirty="0"/>
+          </a:p>
+        </p:txBody>
+      </p:sp>
+      <p:sp>
+        <p:nvSpPr>
+          <p:cNvPr id="7" name="Text 5"/>
+          <p:cNvSpPr txBox="1"/>
+          <p:nvPr/>
+        </p:nvSpPr>
+        <p:spPr>
+          <a:xfrm>
+            <a:off x="822960" y="3063240"/>
+            <a:ext cx="2103120" cy="457200"/>
+          </a:xfrm>
+          <a:prstGeom prst="rect">
+            <a:avLst/>
+          </a:prstGeom>
+          <a:noFill/>
+          <a:ln/>
+        </p:spPr>
+        <p:txBody>
+          <a:bodyPr wrap="square" lIns="0" tIns="0" rIns="0" bIns="0" rtlCol="0" anchor="ctr"/>
+          <a:lstStyle/>
+          <a:p>
+            <a:pPr indent="0" marL="0">
+              <a:buNone/>
+            </a:pPr>
+            <a:r>
+              <a:rPr lang="en-US" sz="1900" b="1" dirty="0">
+                <a:solidFill>
+                  <a:schemeClr val="tx1"/>
+                </a:solidFill>
+              </a:rPr>
+              <a:t>Trouver les biais</a:t>
+            </a:r>
+            <a:endParaRPr lang="en-US" sz="1900" dirty="0"/>
+          </a:p>
+        </p:txBody>
+      </p:sp>
+      <p:sp>
+        <p:nvSpPr>
+          <p:cNvPr id="8" name="Text 6"/>
+          <p:cNvSpPr txBox="1"/>
+          <p:nvPr/>
+        </p:nvSpPr>
+        <p:spPr>
+          <a:xfrm>
+            <a:off x="822960" y="3566160"/>
+            <a:ext cx="2103120" cy="1554480"/>
+          </a:xfrm>
+          <a:prstGeom prst="rect">
+            <a:avLst/>
+          </a:prstGeom>
+          <a:noFill/>
+          <a:ln/>
+        </p:spPr>
+        <p:txBody>
+          <a:bodyPr wrap="square" lIns="0" tIns="0" rIns="0" bIns="0" rtlCol="0" anchor="ctr"/>
+          <a:lstStyle/>
+          <a:p>
+            <a:pPr indent="0" marL="0">
+              <a:buNone/>
+            </a:pPr>
+            <a:r>
+              <a:rPr lang="en-US" sz="1500" dirty="0">
+                <a:solidFill>
+                  <a:schemeClr val="tx2"/>
+                </a:solidFill>
+              </a:rPr>
+              <a:t>dans un jeu de données réel, et les réduire pour une prise de décision</a:t>
+            </a:r>
+            <a:endParaRPr lang="en-US" sz="1500" dirty="0"/>
+          </a:p>
+        </p:txBody>
+      </p:sp>
+      <p:sp>
+        <p:nvSpPr>
+          <p:cNvPr id="9" name="objectif-2"/>
+          <p:cNvSpPr/>
+          <p:nvPr/>
+        </p:nvSpPr>
+        <p:spPr>
+          <a:xfrm>
+            <a:off x="3383280" y="2057400"/>
+            <a:ext cx="2606040" cy="3291840"/>
+          </a:xfrm>
+          <a:prstGeom prst="roundRect">
+            <a:avLst>
+              <a:gd name="adj" fmla="val 2807"/>
             </a:avLst>
           </a:prstGeom>
           <a:solidFill>
@@ -6367,14 +6928,70 @@
       </p:sp>
       <p:sp>
         <p:nvSpPr>
-          <p:cNvPr id="4" name="Text 2"/>
+          <p:cNvPr id="10" name="Shape 8"/>
+          <p:cNvSpPr/>
+          <p:nvPr/>
+        </p:nvSpPr>
+        <p:spPr>
+          <a:xfrm>
+            <a:off x="3657600" y="2331720"/>
+            <a:ext cx="502920" cy="502920"/>
+          </a:xfrm>
+          <a:prstGeom prst="ellipse">
+            <a:avLst/>
+          </a:prstGeom>
+          <a:solidFill>
+            <a:schemeClr val="accent2"/>
+          </a:solidFill>
+          <a:ln/>
+        </p:spPr>
+      </p:sp>
+      <p:sp>
+        <p:nvSpPr>
+          <p:cNvPr id="11" name="Text 9"/>
           <p:cNvSpPr txBox="1"/>
           <p:nvPr/>
         </p:nvSpPr>
         <p:spPr>
           <a:xfrm>
-            <a:off x="868680" y="1645920"/>
-            <a:ext cx="4846320" cy="365760"/>
+            <a:off x="3657600" y="2331720"/>
+            <a:ext cx="502920" cy="502920"/>
+          </a:xfrm>
+          <a:prstGeom prst="rect">
+            <a:avLst/>
+          </a:prstGeom>
+          <a:noFill/>
+          <a:ln/>
+        </p:spPr>
+        <p:txBody>
+          <a:bodyPr wrap="square" lIns="0" tIns="0" rIns="0" bIns="0" rtlCol="0" anchor="ctr"/>
+          <a:lstStyle/>
+          <a:p>
+            <a:pPr algn="ctr" indent="0" marL="0">
+              <a:buNone/>
+            </a:pPr>
+            <a:r>
+              <a:rPr lang="en-US" sz="1600" b="1" dirty="0">
+                <a:solidFill>
+                  <a:schemeClr val="bg1"/>
+                </a:solidFill>
+              </a:rPr>
+              <a:t>2</a:t>
+            </a:r>
+            <a:endParaRPr lang="en-US" sz="1600" dirty="0"/>
+          </a:p>
+        </p:txBody>
+      </p:sp>
+      <p:sp>
+        <p:nvSpPr>
+          <p:cNvPr id="12" name="Text 10"/>
+          <p:cNvSpPr txBox="1"/>
+          <p:nvPr/>
+        </p:nvSpPr>
+        <p:spPr>
+          <a:xfrm>
+            <a:off x="3657600" y="3063240"/>
+            <a:ext cx="2103120" cy="457200"/>
           </a:xfrm>
           <a:prstGeom prst="rect">
             <a:avLst/>
@@ -6390,27 +7007,27 @@
               <a:buNone/>
             </a:pPr>
             <a:r>
-              <a:rPr lang="en-US" sz="2000" b="1" dirty="0">
+              <a:rPr lang="en-US" sz="1900" b="1" dirty="0">
                 <a:solidFill>
                   <a:schemeClr val="tx1"/>
                 </a:solidFill>
               </a:rPr>
-              <a:t>La question</a:t>
-            </a:r>
-            <a:endParaRPr lang="en-US" sz="2000" dirty="0"/>
-          </a:p>
-        </p:txBody>
-      </p:sp>
-      <p:sp>
-        <p:nvSpPr>
-          <p:cNvPr id="5" name="Text 3"/>
+              <a:t>Adapter un LLM</a:t>
+            </a:r>
+            <a:endParaRPr lang="en-US" sz="1900" dirty="0"/>
+          </a:p>
+        </p:txBody>
+      </p:sp>
+      <p:sp>
+        <p:nvSpPr>
+          <p:cNvPr id="13" name="Text 11"/>
           <p:cNvSpPr txBox="1"/>
           <p:nvPr/>
         </p:nvSpPr>
         <p:spPr>
           <a:xfrm>
-            <a:off x="868680" y="2103120"/>
-            <a:ext cx="4846320" cy="1005840"/>
+            <a:off x="3657600" y="3566160"/>
+            <a:ext cx="2103120" cy="1554480"/>
           </a:xfrm>
           <a:prstGeom prst="rect">
             <a:avLst/>
@@ -6426,12 +7043,90 @@
               <a:buNone/>
             </a:pPr>
             <a:r>
-              <a:rPr lang="en-US" sz="1600" dirty="0">
+              <a:rPr lang="en-US" sz="1500" dirty="0">
                 <a:solidFill>
                   <a:schemeClr val="tx2"/>
                 </a:solidFill>
               </a:rPr>
-              <a:t>Une banque fictive veut savoir si le revenu d'un demandeur dépasse 50 000 $ pour l'orienter vers une offre de crédit.</a:t>
+              <a:t>avec les 3 méthodes du cours, puis comparer et garder la meilleure</a:t>
+            </a:r>
+            <a:endParaRPr lang="en-US" sz="1500" dirty="0"/>
+          </a:p>
+        </p:txBody>
+      </p:sp>
+      <p:sp>
+        <p:nvSpPr>
+          <p:cNvPr id="14" name="objectif-3"/>
+          <p:cNvSpPr/>
+          <p:nvPr/>
+        </p:nvSpPr>
+        <p:spPr>
+          <a:xfrm>
+            <a:off x="6217920" y="2057400"/>
+            <a:ext cx="2606040" cy="3291840"/>
+          </a:xfrm>
+          <a:prstGeom prst="roundRect">
+            <a:avLst>
+              <a:gd name="adj" fmla="val 2807"/>
+            </a:avLst>
+          </a:prstGeom>
+          <a:solidFill>
+            <a:schemeClr val="bg2"/>
+          </a:solidFill>
+          <a:ln/>
+        </p:spPr>
+      </p:sp>
+      <p:sp>
+        <p:nvSpPr>
+          <p:cNvPr id="15" name="Shape 13"/>
+          <p:cNvSpPr/>
+          <p:nvPr/>
+        </p:nvSpPr>
+        <p:spPr>
+          <a:xfrm>
+            <a:off x="6492240" y="2331720"/>
+            <a:ext cx="502920" cy="502920"/>
+          </a:xfrm>
+          <a:prstGeom prst="ellipse">
+            <a:avLst/>
+          </a:prstGeom>
+          <a:solidFill>
+            <a:schemeClr val="accent2"/>
+          </a:solidFill>
+          <a:ln/>
+        </p:spPr>
+      </p:sp>
+      <p:sp>
+        <p:nvSpPr>
+          <p:cNvPr id="16" name="Text 14"/>
+          <p:cNvSpPr txBox="1"/>
+          <p:nvPr/>
+        </p:nvSpPr>
+        <p:spPr>
+          <a:xfrm>
+            <a:off x="6492240" y="2331720"/>
+            <a:ext cx="502920" cy="502920"/>
+          </a:xfrm>
+          <a:prstGeom prst="rect">
+            <a:avLst/>
+          </a:prstGeom>
+          <a:noFill/>
+          <a:ln/>
+        </p:spPr>
+        <p:txBody>
+          <a:bodyPr wrap="square" lIns="0" tIns="0" rIns="0" bIns="0" rtlCol="0" anchor="ctr"/>
+          <a:lstStyle/>
+          <a:p>
+            <a:pPr algn="ctr" indent="0" marL="0">
+              <a:buNone/>
+            </a:pPr>
+            <a:r>
+              <a:rPr lang="en-US" sz="1600" b="1" dirty="0">
+                <a:solidFill>
+                  <a:schemeClr val="bg1"/>
+                </a:solidFill>
+              </a:rPr>
+              <a:t>3</a:t>
             </a:r>
             <a:endParaRPr lang="en-US" sz="1600" dirty="0"/>
           </a:p>
@@ -6439,90 +7134,14 @@
       </p:sp>
       <p:sp>
         <p:nvSpPr>
-          <p:cNvPr id="6" name="Text 4"/>
+          <p:cNvPr id="17" name="Text 15"/>
           <p:cNvSpPr txBox="1"/>
           <p:nvPr/>
         </p:nvSpPr>
         <p:spPr>
           <a:xfrm>
-            <a:off x="868680" y="3291840"/>
-            <a:ext cx="4846320" cy="1463040"/>
-          </a:xfrm>
-          <a:prstGeom prst="rect">
-            <a:avLst/>
-          </a:prstGeom>
-          <a:noFill/>
-          <a:ln/>
-        </p:spPr>
-        <p:txBody>
-          <a:bodyPr wrap="square" lIns="0" tIns="0" rIns="0" bIns="0" rtlCol="0" anchor="ctr"/>
-          <a:lstStyle/>
-          <a:p>
-            <a:pPr marL="342900" indent="-342900">
-              <a:spcAft>
-                <a:spcPts val="800"/>
-              </a:spcAft>
-              <a:buSzPct val="100000"/>
-              <a:buChar char="•"/>
-            </a:pPr>
-            <a:r>
-              <a:rPr lang="en-US" sz="1500" dirty="0">
-                <a:solidFill>
-                  <a:schemeClr val="tx2"/>
-                </a:solidFill>
-              </a:rPr>
-              <a:t>Données : Adult Income (recensement US, 1994)</a:t>
-            </a:r>
-            <a:endParaRPr lang="en-US" sz="1500" dirty="0"/>
-          </a:p>
-          <a:p>
-            <a:pPr marL="342900" indent="-342900">
-              <a:spcAft>
-                <a:spcPts val="800"/>
-              </a:spcAft>
-              <a:buSzPct val="100000"/>
-              <a:buChar char="•"/>
-            </a:pPr>
-            <a:r>
-              <a:rPr lang="en-US" sz="1500" dirty="0">
-                <a:solidFill>
-                  <a:schemeClr val="tx2"/>
-                </a:solidFill>
-              </a:rPr>
-              <a:t>3 000 personnes, 23,9 % gagnent plus de 50 K$</a:t>
-            </a:r>
-            <a:endParaRPr lang="en-US" sz="1500" dirty="0"/>
-          </a:p>
-          <a:p>
-            <a:pPr marL="342900" indent="-342900">
-              <a:spcAft>
-                <a:spcPts val="800"/>
-              </a:spcAft>
-              <a:buSzPct val="100000"/>
-              <a:buChar char="•"/>
-            </a:pPr>
-            <a:r>
-              <a:rPr lang="en-US" sz="1500" dirty="0">
-                <a:solidFill>
-                  <a:schemeClr val="tx2"/>
-                </a:solidFill>
-              </a:rPr>
-              <a:t>Attributs sensibles audités : sexe, origine et leur croisement</a:t>
-            </a:r>
-            <a:endParaRPr lang="en-US" sz="1500" dirty="0"/>
-          </a:p>
-        </p:txBody>
-      </p:sp>
-      <p:sp>
-        <p:nvSpPr>
-          <p:cNvPr id="7" name="Text 5"/>
-          <p:cNvSpPr txBox="1"/>
-          <p:nvPr/>
-        </p:nvSpPr>
-        <p:spPr>
-          <a:xfrm>
-            <a:off x="868680" y="5029200"/>
-            <a:ext cx="4846320" cy="731520"/>
+            <a:off x="6492240" y="3063240"/>
+            <a:ext cx="2103120" cy="457200"/>
           </a:xfrm>
           <a:prstGeom prst="rect">
             <a:avLst/>
@@ -6538,12 +7157,48 @@
               <a:buNone/>
             </a:pPr>
             <a:r>
-              <a:rPr lang="en-US" sz="1500" i="1" dirty="0">
-                <a:solidFill>
-                  <a:schemeClr val="accent2"/>
-                </a:solidFill>
-              </a:rPr>
-              <a:t>C'est une aide à la décision : on audite et on corrige les biais.</a:t>
+              <a:rPr lang="en-US" sz="1900" b="1" dirty="0">
+                <a:solidFill>
+                  <a:schemeClr val="tx1"/>
+                </a:solidFill>
+              </a:rPr>
+              <a:t>Résoudre un problème</a:t>
+            </a:r>
+            <a:endParaRPr lang="en-US" sz="1900" dirty="0"/>
+          </a:p>
+        </p:txBody>
+      </p:sp>
+      <p:sp>
+        <p:nvSpPr>
+          <p:cNvPr id="18" name="Text 16"/>
+          <p:cNvSpPr txBox="1"/>
+          <p:nvPr/>
+        </p:nvSpPr>
+        <p:spPr>
+          <a:xfrm>
+            <a:off x="6492240" y="3566160"/>
+            <a:ext cx="2103120" cy="1554480"/>
+          </a:xfrm>
+          <a:prstGeom prst="rect">
+            <a:avLst/>
+          </a:prstGeom>
+          <a:noFill/>
+          <a:ln/>
+        </p:spPr>
+        <p:txBody>
+          <a:bodyPr wrap="square" lIns="0" tIns="0" rIns="0" bIns="0" rtlCol="0" anchor="ctr"/>
+          <a:lstStyle/>
+          <a:p>
+            <a:pPr indent="0" marL="0">
+              <a:buNone/>
+            </a:pPr>
+            <a:r>
+              <a:rPr lang="en-US" sz="1500" dirty="0">
+                <a:solidFill>
+                  <a:schemeClr val="tx2"/>
+                </a:solidFill>
+              </a:rPr>
+              <a:t>concret avec le modèle retenu : ici, la pré-qualification d'un crédit</a:t>
             </a:r>
             <a:endParaRPr lang="en-US" sz="1500" dirty="0"/>
           </a:p>
@@ -6551,36 +7206,92 @@
       </p:sp>
       <p:sp>
         <p:nvSpPr>
-          <p:cNvPr id="8" name="carte-reglementation"/>
+          <p:cNvPr id="19" name="objectif-4"/>
           <p:cNvSpPr/>
           <p:nvPr/>
         </p:nvSpPr>
         <p:spPr>
           <a:xfrm>
-            <a:off x="6400800" y="1371600"/>
-            <a:ext cx="5212080" cy="4663440"/>
+            <a:off x="9052560" y="2057400"/>
+            <a:ext cx="2606040" cy="3291840"/>
           </a:xfrm>
           <a:prstGeom prst="roundRect">
             <a:avLst>
-              <a:gd name="adj" fmla="val 1569"/>
+              <a:gd name="adj" fmla="val 2807"/>
             </a:avLst>
           </a:prstGeom>
           <a:solidFill>
-            <a:schemeClr val="tx1"/>
+            <a:srgbClr val="E6F5F3"/>
           </a:solidFill>
           <a:ln/>
         </p:spPr>
       </p:sp>
       <p:sp>
         <p:nvSpPr>
-          <p:cNvPr id="9" name="Text 7"/>
+          <p:cNvPr id="20" name="Shape 18"/>
+          <p:cNvSpPr/>
+          <p:nvPr/>
+        </p:nvSpPr>
+        <p:spPr>
+          <a:xfrm>
+            <a:off x="9326880" y="2331720"/>
+            <a:ext cx="502920" cy="502920"/>
+          </a:xfrm>
+          <a:prstGeom prst="ellipse">
+            <a:avLst/>
+          </a:prstGeom>
+          <a:solidFill>
+            <a:schemeClr val="accent2"/>
+          </a:solidFill>
+          <a:ln/>
+        </p:spPr>
+      </p:sp>
+      <p:sp>
+        <p:nvSpPr>
+          <p:cNvPr id="21" name="Text 19"/>
           <p:cNvSpPr txBox="1"/>
           <p:nvPr/>
         </p:nvSpPr>
         <p:spPr>
           <a:xfrm>
-            <a:off x="6720840" y="1645920"/>
-            <a:ext cx="4572000" cy="365760"/>
+            <a:off x="9326880" y="2331720"/>
+            <a:ext cx="502920" cy="502920"/>
+          </a:xfrm>
+          <a:prstGeom prst="rect">
+            <a:avLst/>
+          </a:prstGeom>
+          <a:noFill/>
+          <a:ln/>
+        </p:spPr>
+        <p:txBody>
+          <a:bodyPr wrap="square" lIns="0" tIns="0" rIns="0" bIns="0" rtlCol="0" anchor="ctr"/>
+          <a:lstStyle/>
+          <a:p>
+            <a:pPr algn="ctr" indent="0" marL="0">
+              <a:buNone/>
+            </a:pPr>
+            <a:r>
+              <a:rPr lang="en-US" sz="1600" b="1" dirty="0">
+                <a:solidFill>
+                  <a:schemeClr val="bg1"/>
+                </a:solidFill>
+              </a:rPr>
+              <a:t>4</a:t>
+            </a:r>
+            <a:endParaRPr lang="en-US" sz="1600" dirty="0"/>
+          </a:p>
+        </p:txBody>
+      </p:sp>
+      <p:sp>
+        <p:nvSpPr>
+          <p:cNvPr id="22" name="Text 20"/>
+          <p:cNvSpPr txBox="1"/>
+          <p:nvPr/>
+        </p:nvSpPr>
+        <p:spPr>
+          <a:xfrm>
+            <a:off x="9326880" y="3063240"/>
+            <a:ext cx="2103120" cy="457200"/>
           </a:xfrm>
           <a:prstGeom prst="rect">
             <a:avLst/>
@@ -6596,27 +7307,27 @@
               <a:buNone/>
             </a:pPr>
             <a:r>
-              <a:rPr lang="en-US" sz="2000" b="1" dirty="0">
-                <a:solidFill>
-                  <a:schemeClr val="bg1"/>
-                </a:solidFill>
-              </a:rPr>
-              <a:t>Pourquoi c'est sensible</a:t>
-            </a:r>
-            <a:endParaRPr lang="en-US" sz="2000" dirty="0"/>
-          </a:p>
-        </p:txBody>
-      </p:sp>
-      <p:sp>
-        <p:nvSpPr>
-          <p:cNvPr id="10" name="Text 8"/>
+              <a:rPr lang="en-US" sz="1900" b="1" dirty="0">
+                <a:solidFill>
+                  <a:schemeClr val="tx1"/>
+                </a:solidFill>
+              </a:rPr>
+              <a:t>Expliquer</a:t>
+            </a:r>
+            <a:endParaRPr lang="en-US" sz="1900" dirty="0"/>
+          </a:p>
+        </p:txBody>
+      </p:sp>
+      <p:sp>
+        <p:nvSpPr>
+          <p:cNvPr id="23" name="Text 21"/>
           <p:cNvSpPr txBox="1"/>
           <p:nvPr/>
         </p:nvSpPr>
         <p:spPr>
           <a:xfrm>
-            <a:off x="6720840" y="2240280"/>
-            <a:ext cx="4572000" cy="320040"/>
+            <a:off x="9326880" y="3566160"/>
+            <a:ext cx="2103120" cy="1554480"/>
           </a:xfrm>
           <a:prstGeom prst="rect">
             <a:avLst/>
@@ -6632,27 +7343,27 @@
               <a:buNone/>
             </a:pPr>
             <a:r>
-              <a:rPr lang="en-US" sz="1600" b="1" dirty="0">
-                <a:solidFill>
-                  <a:schemeClr val="accent2"/>
-                </a:solidFill>
-              </a:rPr>
-              <a:t>AI Act</a:t>
-            </a:r>
-            <a:endParaRPr lang="en-US" sz="1600" dirty="0"/>
-          </a:p>
-        </p:txBody>
-      </p:sp>
-      <p:sp>
-        <p:nvSpPr>
-          <p:cNvPr id="11" name="Text 9"/>
+              <a:rPr lang="en-US" sz="1500" dirty="0">
+                <a:solidFill>
+                  <a:schemeClr val="tx2"/>
+                </a:solidFill>
+              </a:rPr>
+              <a:t>chaque décision avec deux outils d'XAI : LIME et SHAP</a:t>
+            </a:r>
+            <a:endParaRPr lang="en-US" sz="1500" dirty="0"/>
+          </a:p>
+        </p:txBody>
+      </p:sp>
+      <p:sp>
+        <p:nvSpPr>
+          <p:cNvPr id="24" name="Text 22"/>
           <p:cNvSpPr txBox="1"/>
           <p:nvPr/>
         </p:nvSpPr>
         <p:spPr>
           <a:xfrm>
-            <a:off x="6720840" y="2587752"/>
-            <a:ext cx="4572000" cy="777240"/>
+            <a:off x="548640" y="5623560"/>
+            <a:ext cx="11064240" cy="457200"/>
           </a:xfrm>
           <a:prstGeom prst="rect">
             <a:avLst/>
@@ -6668,158 +7379,14 @@
               <a:buNone/>
             </a:pPr>
             <a:r>
-              <a:rPr lang="en-US" sz="1400" dirty="0">
-                <a:solidFill>
-                  <a:schemeClr val="bg2"/>
-                </a:solidFill>
-              </a:rPr>
-              <a:t>La solvabilité des personnes est un usage à haut risque : documentation, supervision humaine, explicabilité.</a:t>
-            </a:r>
-            <a:endParaRPr lang="en-US" sz="1400" dirty="0"/>
-          </a:p>
-        </p:txBody>
-      </p:sp>
-      <p:sp>
-        <p:nvSpPr>
-          <p:cNvPr id="12" name="Text 10"/>
-          <p:cNvSpPr txBox="1"/>
-          <p:nvPr/>
-        </p:nvSpPr>
-        <p:spPr>
-          <a:xfrm>
-            <a:off x="6720840" y="3474720"/>
-            <a:ext cx="4572000" cy="320040"/>
-          </a:xfrm>
-          <a:prstGeom prst="rect">
-            <a:avLst/>
-          </a:prstGeom>
-          <a:noFill/>
-          <a:ln/>
-        </p:spPr>
-        <p:txBody>
-          <a:bodyPr wrap="square" lIns="0" tIns="0" rIns="0" bIns="0" rtlCol="0" anchor="ctr"/>
-          <a:lstStyle/>
-          <a:p>
-            <a:pPr indent="0" marL="0">
-              <a:buNone/>
-            </a:pPr>
-            <a:r>
-              <a:rPr lang="en-US" sz="1600" b="1" dirty="0">
+              <a:rPr lang="en-US" sz="1800" i="1" dirty="0">
                 <a:solidFill>
                   <a:schemeClr val="accent2"/>
                 </a:solidFill>
               </a:rPr>
-              <a:t>RGPD</a:t>
-            </a:r>
-            <a:endParaRPr lang="en-US" sz="1600" dirty="0"/>
-          </a:p>
-        </p:txBody>
-      </p:sp>
-      <p:sp>
-        <p:nvSpPr>
-          <p:cNvPr id="13" name="Text 11"/>
-          <p:cNvSpPr txBox="1"/>
-          <p:nvPr/>
-        </p:nvSpPr>
-        <p:spPr>
-          <a:xfrm>
-            <a:off x="6720840" y="3822192"/>
-            <a:ext cx="4572000" cy="777240"/>
-          </a:xfrm>
-          <a:prstGeom prst="rect">
-            <a:avLst/>
-          </a:prstGeom>
-          <a:noFill/>
-          <a:ln/>
-        </p:spPr>
-        <p:txBody>
-          <a:bodyPr wrap="square" lIns="0" tIns="0" rIns="0" bIns="0" rtlCol="0" anchor="ctr"/>
-          <a:lstStyle/>
-          <a:p>
-            <a:pPr indent="0" marL="0">
-              <a:buNone/>
-            </a:pPr>
-            <a:r>
-              <a:rPr lang="en-US" sz="1400" dirty="0">
-                <a:solidFill>
-                  <a:schemeClr val="bg2"/>
-                </a:solidFill>
-              </a:rPr>
-              <a:t>L'origine est une donnée sensible (art. 9). Droit de refuser une décision entièrement automatisée (art. 22).</a:t>
-            </a:r>
-            <a:endParaRPr lang="en-US" sz="1400" dirty="0"/>
-          </a:p>
-        </p:txBody>
-      </p:sp>
-      <p:sp>
-        <p:nvSpPr>
-          <p:cNvPr id="14" name="Text 12"/>
-          <p:cNvSpPr txBox="1"/>
-          <p:nvPr/>
-        </p:nvSpPr>
-        <p:spPr>
-          <a:xfrm>
-            <a:off x="6720840" y="4709160"/>
-            <a:ext cx="4572000" cy="320040"/>
-          </a:xfrm>
-          <a:prstGeom prst="rect">
-            <a:avLst/>
-          </a:prstGeom>
-          <a:noFill/>
-          <a:ln/>
-        </p:spPr>
-        <p:txBody>
-          <a:bodyPr wrap="square" lIns="0" tIns="0" rIns="0" bIns="0" rtlCol="0" anchor="ctr"/>
-          <a:lstStyle/>
-          <a:p>
-            <a:pPr indent="0" marL="0">
-              <a:buNone/>
-            </a:pPr>
-            <a:r>
-              <a:rPr lang="en-US" sz="1600" b="1" dirty="0">
-                <a:solidFill>
-                  <a:schemeClr val="accent2"/>
-                </a:solidFill>
-              </a:rPr>
-              <a:t>Par défaut</a:t>
-            </a:r>
-            <a:endParaRPr lang="en-US" sz="1600" dirty="0"/>
-          </a:p>
-        </p:txBody>
-      </p:sp>
-      <p:sp>
-        <p:nvSpPr>
-          <p:cNvPr id="15" name="Text 13"/>
-          <p:cNvSpPr txBox="1"/>
-          <p:nvPr/>
-        </p:nvSpPr>
-        <p:spPr>
-          <a:xfrm>
-            <a:off x="6720840" y="5056632"/>
-            <a:ext cx="4572000" cy="777240"/>
-          </a:xfrm>
-          <a:prstGeom prst="rect">
-            <a:avLst/>
-          </a:prstGeom>
-          <a:noFill/>
-          <a:ln/>
-        </p:spPr>
-        <p:txBody>
-          <a:bodyPr wrap="square" lIns="0" tIns="0" rIns="0" bIns="0" rtlCol="0" anchor="ctr"/>
-          <a:lstStyle/>
-          <a:p>
-            <a:pPr indent="0" marL="0">
-              <a:buNone/>
-            </a:pPr>
-            <a:r>
-              <a:rPr lang="en-US" sz="1400" dirty="0">
-                <a:solidFill>
-                  <a:schemeClr val="bg2"/>
-                </a:solidFill>
-              </a:rPr>
-              <a:t>Le modèle recommande, un humain décide, chaque score est expliqué.</a:t>
-            </a:r>
-            <a:endParaRPr lang="en-US" sz="1400" dirty="0"/>
+              <a:t>Notre question : peut-on prédire le revenu sans désavantager les femmes et les minorités ?</a:t>
+            </a:r>
+            <a:endParaRPr lang="en-US" sz="1800" dirty="0"/>
           </a:p>
         </p:txBody>
       </p:sp>
@@ -6903,8 +7470,8 @@
         </p:nvSpPr>
         <p:spPr>
           <a:xfrm>
-            <a:off x="548640" y="320040"/>
-            <a:ext cx="11064240" cy="822960"/>
+            <a:off x="548640" y="274320"/>
+            <a:ext cx="11064240" cy="914400"/>
           </a:xfrm>
           <a:prstGeom prst="rect">
             <a:avLst/>
@@ -6920,7 +7487,7 @@
               <a:buNone/>
             </a:pPr>
             <a:r>
-              <a:rPr lang="en-US" sz="3200" b="1" dirty="0">
+              <a:rPr lang="en-US" sz="3600" b="1" dirty="0">
                 <a:solidFill>
                   <a:schemeClr val="tx1"/>
                 </a:solidFill>
@@ -6928,196 +7495,7 @@
                 <a:ea typeface="Cambria" pitchFamily="34" charset="-122"/>
                 <a:cs typeface="Cambria" pitchFamily="34" charset="-120"/>
               </a:rPr>
-              <a:t>Les données reproduisent de fortes inégalités</a:t>
-            </a:r>
-            <a:endParaRPr lang="en-US" sz="3200" dirty="0"/>
-          </a:p>
-        </p:txBody>
-      </p:sp>
-      <p:sp>
-        <p:nvSpPr>
-          <p:cNvPr id="3" name="Text 1"/>
-          <p:cNvSpPr txBox="1"/>
-          <p:nvPr/>
-        </p:nvSpPr>
-        <p:spPr>
-          <a:xfrm>
-            <a:off x="548640" y="1417320"/>
-            <a:ext cx="3291840" cy="777240"/>
-          </a:xfrm>
-          <a:prstGeom prst="rect">
-            <a:avLst/>
-          </a:prstGeom>
-          <a:noFill/>
-          <a:ln/>
-        </p:spPr>
-        <p:txBody>
-          <a:bodyPr wrap="square" lIns="0" tIns="0" rIns="0" bIns="0" rtlCol="0" anchor="ctr"/>
-          <a:lstStyle/>
-          <a:p>
-            <a:pPr indent="0" marL="0">
-              <a:buNone/>
-            </a:pPr>
-            <a:r>
-              <a:rPr lang="en-US" sz="4800" b="1" dirty="0">
-                <a:solidFill>
-                  <a:schemeClr val="tx1"/>
-                </a:solidFill>
-                <a:latin typeface="Cambria" pitchFamily="34" charset="0"/>
-                <a:ea typeface="Cambria" pitchFamily="34" charset="-122"/>
-                <a:cs typeface="Cambria" pitchFamily="34" charset="-120"/>
-              </a:rPr>
-              <a:t>30 %</a:t>
-            </a:r>
-            <a:endParaRPr lang="en-US" sz="4800" dirty="0"/>
-          </a:p>
-        </p:txBody>
-      </p:sp>
-      <p:sp>
-        <p:nvSpPr>
-          <p:cNvPr id="4" name="Text 2"/>
-          <p:cNvSpPr txBox="1"/>
-          <p:nvPr/>
-        </p:nvSpPr>
-        <p:spPr>
-          <a:xfrm>
-            <a:off x="548640" y="2194560"/>
-            <a:ext cx="3291840" cy="640080"/>
-          </a:xfrm>
-          <a:prstGeom prst="rect">
-            <a:avLst/>
-          </a:prstGeom>
-          <a:noFill/>
-          <a:ln/>
-        </p:spPr>
-        <p:txBody>
-          <a:bodyPr wrap="square" lIns="0" tIns="0" rIns="0" bIns="0" rtlCol="0" anchor="ctr"/>
-          <a:lstStyle/>
-          <a:p>
-            <a:pPr indent="0" marL="0">
-              <a:buNone/>
-            </a:pPr>
-            <a:r>
-              <a:rPr lang="en-US" sz="1400" dirty="0">
-                <a:solidFill>
-                  <a:schemeClr val="tx2"/>
-                </a:solidFill>
-              </a:rPr>
-              <a:t>des hommes gagnent plus de 50 K$</a:t>
-            </a:r>
-            <a:endParaRPr lang="en-US" sz="1400" dirty="0"/>
-          </a:p>
-        </p:txBody>
-      </p:sp>
-      <p:sp>
-        <p:nvSpPr>
-          <p:cNvPr id="5" name="Text 3"/>
-          <p:cNvSpPr txBox="1"/>
-          <p:nvPr/>
-        </p:nvSpPr>
-        <p:spPr>
-          <a:xfrm>
-            <a:off x="548640" y="3017520"/>
-            <a:ext cx="3291840" cy="777240"/>
-          </a:xfrm>
-          <a:prstGeom prst="rect">
-            <a:avLst/>
-          </a:prstGeom>
-          <a:noFill/>
-          <a:ln/>
-        </p:spPr>
-        <p:txBody>
-          <a:bodyPr wrap="square" lIns="0" tIns="0" rIns="0" bIns="0" rtlCol="0" anchor="ctr"/>
-          <a:lstStyle/>
-          <a:p>
-            <a:pPr indent="0" marL="0">
-              <a:buNone/>
-            </a:pPr>
-            <a:r>
-              <a:rPr lang="en-US" sz="4800" b="1" dirty="0">
-                <a:solidFill>
-                  <a:schemeClr val="accent3"/>
-                </a:solidFill>
-                <a:latin typeface="Cambria" pitchFamily="34" charset="0"/>
-                <a:ea typeface="Cambria" pitchFamily="34" charset="-122"/>
-                <a:cs typeface="Cambria" pitchFamily="34" charset="-120"/>
-              </a:rPr>
-              <a:t>11 %</a:t>
-            </a:r>
-            <a:endParaRPr lang="en-US" sz="4800" dirty="0"/>
-          </a:p>
-        </p:txBody>
-      </p:sp>
-      <p:sp>
-        <p:nvSpPr>
-          <p:cNvPr id="6" name="Text 4"/>
-          <p:cNvSpPr txBox="1"/>
-          <p:nvPr/>
-        </p:nvSpPr>
-        <p:spPr>
-          <a:xfrm>
-            <a:off x="548640" y="3794760"/>
-            <a:ext cx="3291840" cy="640080"/>
-          </a:xfrm>
-          <a:prstGeom prst="rect">
-            <a:avLst/>
-          </a:prstGeom>
-          <a:noFill/>
-          <a:ln/>
-        </p:spPr>
-        <p:txBody>
-          <a:bodyPr wrap="square" lIns="0" tIns="0" rIns="0" bIns="0" rtlCol="0" anchor="ctr"/>
-          <a:lstStyle/>
-          <a:p>
-            <a:pPr indent="0" marL="0">
-              <a:buNone/>
-            </a:pPr>
-            <a:r>
-              <a:rPr lang="en-US" sz="1400" dirty="0">
-                <a:solidFill>
-                  <a:schemeClr val="tx2"/>
-                </a:solidFill>
-              </a:rPr>
-              <a:t>des femmes</a:t>
-            </a:r>
-            <a:endParaRPr lang="en-US" sz="1400" dirty="0"/>
-          </a:p>
-        </p:txBody>
-      </p:sp>
-      <p:sp>
-        <p:nvSpPr>
-          <p:cNvPr id="7" name="Text 5"/>
-          <p:cNvSpPr txBox="1"/>
-          <p:nvPr/>
-        </p:nvSpPr>
-        <p:spPr>
-          <a:xfrm>
-            <a:off x="548640" y="4617720"/>
-            <a:ext cx="3291840" cy="777240"/>
-          </a:xfrm>
-          <a:prstGeom prst="rect">
-            <a:avLst/>
-          </a:prstGeom>
-          <a:noFill/>
-          <a:ln/>
-        </p:spPr>
-        <p:txBody>
-          <a:bodyPr wrap="square" lIns="0" tIns="0" rIns="0" bIns="0" rtlCol="0" anchor="ctr"/>
-          <a:lstStyle/>
-          <a:p>
-            <a:pPr indent="0" marL="0">
-              <a:buNone/>
-            </a:pPr>
-            <a:r>
-              <a:rPr lang="en-US" sz="3600" b="1" dirty="0">
-                <a:solidFill>
-                  <a:schemeClr val="accent3"/>
-                </a:solidFill>
-                <a:latin typeface="Cambria" pitchFamily="34" charset="0"/>
-                <a:ea typeface="Cambria" pitchFamily="34" charset="-122"/>
-                <a:cs typeface="Cambria" pitchFamily="34" charset="-120"/>
-              </a:rPr>
-              <a:t>40 % vs 6 %</a:t>
+              <a:t>Cas d'usage : pré-qualifier une demande de crédit</a:t>
             </a:r>
             <a:endParaRPr lang="en-US" sz="3600" dirty="0"/>
           </a:p>
@@ -7125,78 +7503,18 @@
       </p:sp>
       <p:sp>
         <p:nvSpPr>
-          <p:cNvPr id="8" name="Text 6"/>
-          <p:cNvSpPr txBox="1"/>
-          <p:nvPr/>
-        </p:nvSpPr>
-        <p:spPr>
-          <a:xfrm>
-            <a:off x="548640" y="5394960"/>
-            <a:ext cx="3291840" cy="640080"/>
-          </a:xfrm>
-          <a:prstGeom prst="rect">
-            <a:avLst/>
-          </a:prstGeom>
-          <a:noFill/>
-          <a:ln/>
-        </p:spPr>
-        <p:txBody>
-          <a:bodyPr wrap="square" lIns="0" tIns="0" rIns="0" bIns="0" rtlCol="0" anchor="ctr"/>
-          <a:lstStyle/>
-          <a:p>
-            <a:pPr indent="0" marL="0">
-              <a:buNone/>
-            </a:pPr>
-            <a:r>
-              <a:rPr lang="en-US" sz="1400" dirty="0">
-                <a:solidFill>
-                  <a:schemeClr val="tx2"/>
-                </a:solidFill>
-              </a:rPr>
-              <a:t>hommes Asian-Pac-Islander vs femmes noires</a:t>
-            </a:r>
-            <a:endParaRPr lang="en-US" sz="1400" dirty="0"/>
-          </a:p>
-        </p:txBody>
-      </p:sp>
-      <p:pic>
-        <p:nvPicPr>
-          <p:cNvPr id="9" name="Image 0" descr="preencoded.png">    </p:cNvPr>
-          <p:cNvPicPr>
-            <a:picLocks noChangeAspect="1"/>
-          </p:cNvPicPr>
-          <p:nvPr/>
-        </p:nvPicPr>
-        <p:blipFill>
-          <a:blip r:embed="rId1"/>
-          <a:stretch>
-            <a:fillRect/>
-          </a:stretch>
-        </p:blipFill>
-        <p:spPr>
-          <a:xfrm>
-            <a:off x="4114800" y="1463040"/>
-            <a:ext cx="7498080" cy="2312183"/>
-          </a:xfrm>
-          <a:prstGeom prst="rect">
-            <a:avLst/>
-          </a:prstGeom>
-        </p:spPr>
-      </p:pic>
-      <p:sp>
-        <p:nvSpPr>
-          <p:cNvPr id="10" name="carte-lecture"/>
+          <p:cNvPr id="3" name="carte-cas"/>
           <p:cNvSpPr/>
           <p:nvPr/>
         </p:nvSpPr>
         <p:spPr>
           <a:xfrm>
-            <a:off x="4114800" y="4160520"/>
-            <a:ext cx="7498080" cy="1874520"/>
+            <a:off x="548640" y="1371600"/>
+            <a:ext cx="5486400" cy="4663440"/>
           </a:xfrm>
           <a:prstGeom prst="roundRect">
             <a:avLst>
-              <a:gd name="adj" fmla="val 3902"/>
+              <a:gd name="adj" fmla="val 1569"/>
             </a:avLst>
           </a:prstGeom>
           <a:solidFill>
@@ -7207,14 +7525,14 @@
       </p:sp>
       <p:sp>
         <p:nvSpPr>
-          <p:cNvPr id="11" name="Text 8"/>
+          <p:cNvPr id="4" name="Text 2"/>
           <p:cNvSpPr txBox="1"/>
           <p:nvPr/>
         </p:nvSpPr>
         <p:spPr>
           <a:xfrm>
-            <a:off x="4389120" y="4297680"/>
-            <a:ext cx="6949440" cy="365760"/>
+            <a:off x="868680" y="1645920"/>
+            <a:ext cx="4846320" cy="365760"/>
           </a:xfrm>
           <a:prstGeom prst="rect">
             <a:avLst/>
@@ -7230,12 +7548,48 @@
               <a:buNone/>
             </a:pPr>
             <a:r>
-              <a:rPr lang="en-US" sz="1600" b="1" dirty="0">
+              <a:rPr lang="en-US" sz="2000" b="1" dirty="0">
                 <a:solidFill>
                   <a:schemeClr val="tx1"/>
                 </a:solidFill>
               </a:rPr>
-              <a:t>Ce que montre le croisement</a:t>
+              <a:t>La question</a:t>
+            </a:r>
+            <a:endParaRPr lang="en-US" sz="2000" dirty="0"/>
+          </a:p>
+        </p:txBody>
+      </p:sp>
+      <p:sp>
+        <p:nvSpPr>
+          <p:cNvPr id="5" name="Text 3"/>
+          <p:cNvSpPr txBox="1"/>
+          <p:nvPr/>
+        </p:nvSpPr>
+        <p:spPr>
+          <a:xfrm>
+            <a:off x="868680" y="2103120"/>
+            <a:ext cx="4846320" cy="1005840"/>
+          </a:xfrm>
+          <a:prstGeom prst="rect">
+            <a:avLst/>
+          </a:prstGeom>
+          <a:noFill/>
+          <a:ln/>
+        </p:spPr>
+        <p:txBody>
+          <a:bodyPr wrap="square" lIns="0" tIns="0" rIns="0" bIns="0" rtlCol="0" anchor="ctr"/>
+          <a:lstStyle/>
+          <a:p>
+            <a:pPr indent="0" marL="0">
+              <a:buNone/>
+            </a:pPr>
+            <a:r>
+              <a:rPr lang="en-US" sz="1600" dirty="0">
+                <a:solidFill>
+                  <a:schemeClr val="tx2"/>
+                </a:solidFill>
+              </a:rPr>
+              <a:t>Une banque fictive veut savoir si le revenu d'un demandeur dépasse 50 000 $ pour l'orienter vers une offre de crédit.</a:t>
             </a:r>
             <a:endParaRPr lang="en-US" sz="1600" dirty="0"/>
           </a:p>
@@ -7243,14 +7597,14 @@
       </p:sp>
       <p:sp>
         <p:nvSpPr>
-          <p:cNvPr id="12" name="Text 9"/>
+          <p:cNvPr id="6" name="Text 4"/>
           <p:cNvSpPr txBox="1"/>
           <p:nvPr/>
         </p:nvSpPr>
         <p:spPr>
           <a:xfrm>
-            <a:off x="4389120" y="4709160"/>
-            <a:ext cx="6949440" cy="1188720"/>
+            <a:off x="868680" y="3291840"/>
+            <a:ext cx="4846320" cy="1463040"/>
           </a:xfrm>
           <a:prstGeom prst="rect">
             <a:avLst/>
@@ -7264,36 +7618,364 @@
           <a:p>
             <a:pPr marL="342900" indent="-342900">
               <a:spcAft>
-                <a:spcPts val="600"/>
+                <a:spcPts val="800"/>
               </a:spcAft>
               <a:buSzPct val="100000"/>
               <a:buChar char="•"/>
             </a:pPr>
             <a:r>
-              <a:rPr lang="en-US" sz="1400" dirty="0">
+              <a:rPr lang="en-US" sz="1500" dirty="0">
                 <a:solidFill>
                   <a:schemeClr val="tx2"/>
                 </a:solidFill>
               </a:rPr>
-              <a:t>Être une femme noire cumule deux désavantages : 6 % de &gt;50K, le taux le plus bas des groupes assez grands.</a:t>
-            </a:r>
-            <a:endParaRPr lang="en-US" sz="1400" dirty="0"/>
+              <a:t>Données : Adult Income (recensement US, 1994)</a:t>
+            </a:r>
+            <a:endParaRPr lang="en-US" sz="1500" dirty="0"/>
           </a:p>
           <a:p>
             <a:pPr marL="342900" indent="-342900">
               <a:spcAft>
-                <a:spcPts val="600"/>
+                <a:spcPts val="800"/>
               </a:spcAft>
               <a:buSzPct val="100000"/>
               <a:buChar char="•"/>
             </a:pPr>
             <a:r>
+              <a:rPr lang="en-US" sz="1500" dirty="0">
+                <a:solidFill>
+                  <a:schemeClr val="tx2"/>
+                </a:solidFill>
+              </a:rPr>
+              <a:t>3 000 personnes, 23,9 % gagnent plus de 50 K$</a:t>
+            </a:r>
+            <a:endParaRPr lang="en-US" sz="1500" dirty="0"/>
+          </a:p>
+          <a:p>
+            <a:pPr marL="342900" indent="-342900">
+              <a:spcAft>
+                <a:spcPts val="800"/>
+              </a:spcAft>
+              <a:buSzPct val="100000"/>
+              <a:buChar char="•"/>
+            </a:pPr>
+            <a:r>
+              <a:rPr lang="en-US" sz="1500" dirty="0">
+                <a:solidFill>
+                  <a:schemeClr val="tx2"/>
+                </a:solidFill>
+              </a:rPr>
+              <a:t>Attributs sensibles audités : sexe, origine et leur croisement</a:t>
+            </a:r>
+            <a:endParaRPr lang="en-US" sz="1500" dirty="0"/>
+          </a:p>
+        </p:txBody>
+      </p:sp>
+      <p:sp>
+        <p:nvSpPr>
+          <p:cNvPr id="7" name="Text 5"/>
+          <p:cNvSpPr txBox="1"/>
+          <p:nvPr/>
+        </p:nvSpPr>
+        <p:spPr>
+          <a:xfrm>
+            <a:off x="868680" y="5029200"/>
+            <a:ext cx="4846320" cy="731520"/>
+          </a:xfrm>
+          <a:prstGeom prst="rect">
+            <a:avLst/>
+          </a:prstGeom>
+          <a:noFill/>
+          <a:ln/>
+        </p:spPr>
+        <p:txBody>
+          <a:bodyPr wrap="square" lIns="0" tIns="0" rIns="0" bIns="0" rtlCol="0" anchor="ctr"/>
+          <a:lstStyle/>
+          <a:p>
+            <a:pPr indent="0" marL="0">
+              <a:buNone/>
+            </a:pPr>
+            <a:r>
+              <a:rPr lang="en-US" sz="1500" i="1" dirty="0">
+                <a:solidFill>
+                  <a:schemeClr val="accent2"/>
+                </a:solidFill>
+              </a:rPr>
+              <a:t>C'est une aide à la décision : on audite et on corrige les biais.</a:t>
+            </a:r>
+            <a:endParaRPr lang="en-US" sz="1500" dirty="0"/>
+          </a:p>
+        </p:txBody>
+      </p:sp>
+      <p:sp>
+        <p:nvSpPr>
+          <p:cNvPr id="8" name="carte-reglementation"/>
+          <p:cNvSpPr/>
+          <p:nvPr/>
+        </p:nvSpPr>
+        <p:spPr>
+          <a:xfrm>
+            <a:off x="6400800" y="1371600"/>
+            <a:ext cx="5212080" cy="4663440"/>
+          </a:xfrm>
+          <a:prstGeom prst="roundRect">
+            <a:avLst>
+              <a:gd name="adj" fmla="val 1569"/>
+            </a:avLst>
+          </a:prstGeom>
+          <a:solidFill>
+            <a:schemeClr val="tx1"/>
+          </a:solidFill>
+          <a:ln/>
+        </p:spPr>
+      </p:sp>
+      <p:sp>
+        <p:nvSpPr>
+          <p:cNvPr id="9" name="Text 7"/>
+          <p:cNvSpPr txBox="1"/>
+          <p:nvPr/>
+        </p:nvSpPr>
+        <p:spPr>
+          <a:xfrm>
+            <a:off x="6720840" y="1645920"/>
+            <a:ext cx="4572000" cy="365760"/>
+          </a:xfrm>
+          <a:prstGeom prst="rect">
+            <a:avLst/>
+          </a:prstGeom>
+          <a:noFill/>
+          <a:ln/>
+        </p:spPr>
+        <p:txBody>
+          <a:bodyPr wrap="square" lIns="0" tIns="0" rIns="0" bIns="0" rtlCol="0" anchor="ctr"/>
+          <a:lstStyle/>
+          <a:p>
+            <a:pPr indent="0" marL="0">
+              <a:buNone/>
+            </a:pPr>
+            <a:r>
+              <a:rPr lang="en-US" sz="2000" b="1" dirty="0">
+                <a:solidFill>
+                  <a:schemeClr val="bg1"/>
+                </a:solidFill>
+              </a:rPr>
+              <a:t>Pourquoi c'est sensible</a:t>
+            </a:r>
+            <a:endParaRPr lang="en-US" sz="2000" dirty="0"/>
+          </a:p>
+        </p:txBody>
+      </p:sp>
+      <p:sp>
+        <p:nvSpPr>
+          <p:cNvPr id="10" name="Text 8"/>
+          <p:cNvSpPr txBox="1"/>
+          <p:nvPr/>
+        </p:nvSpPr>
+        <p:spPr>
+          <a:xfrm>
+            <a:off x="6720840" y="2240280"/>
+            <a:ext cx="4572000" cy="320040"/>
+          </a:xfrm>
+          <a:prstGeom prst="rect">
+            <a:avLst/>
+          </a:prstGeom>
+          <a:noFill/>
+          <a:ln/>
+        </p:spPr>
+        <p:txBody>
+          <a:bodyPr wrap="square" lIns="0" tIns="0" rIns="0" bIns="0" rtlCol="0" anchor="ctr"/>
+          <a:lstStyle/>
+          <a:p>
+            <a:pPr indent="0" marL="0">
+              <a:buNone/>
+            </a:pPr>
+            <a:r>
+              <a:rPr lang="en-US" sz="1600" b="1" dirty="0">
+                <a:solidFill>
+                  <a:schemeClr val="accent2"/>
+                </a:solidFill>
+              </a:rPr>
+              <a:t>AI Act</a:t>
+            </a:r>
+            <a:endParaRPr lang="en-US" sz="1600" dirty="0"/>
+          </a:p>
+        </p:txBody>
+      </p:sp>
+      <p:sp>
+        <p:nvSpPr>
+          <p:cNvPr id="11" name="Text 9"/>
+          <p:cNvSpPr txBox="1"/>
+          <p:nvPr/>
+        </p:nvSpPr>
+        <p:spPr>
+          <a:xfrm>
+            <a:off x="6720840" y="2587752"/>
+            <a:ext cx="4572000" cy="777240"/>
+          </a:xfrm>
+          <a:prstGeom prst="rect">
+            <a:avLst/>
+          </a:prstGeom>
+          <a:noFill/>
+          <a:ln/>
+        </p:spPr>
+        <p:txBody>
+          <a:bodyPr wrap="square" lIns="0" tIns="0" rIns="0" bIns="0" rtlCol="0" anchor="ctr"/>
+          <a:lstStyle/>
+          <a:p>
+            <a:pPr indent="0" marL="0">
+              <a:buNone/>
+            </a:pPr>
+            <a:r>
               <a:rPr lang="en-US" sz="1400" dirty="0">
                 <a:solidFill>
-                  <a:schemeClr val="tx2"/>
-                </a:solidFill>
-              </a:rPr>
-              <a:t>Certains groupes sont trop petits pour conclure (Other : 15 personnes).</a:t>
+                  <a:schemeClr val="bg2"/>
+                </a:solidFill>
+              </a:rPr>
+              <a:t>La solvabilité des personnes est un usage à haut risque : documentation, supervision humaine, explicabilité.</a:t>
+            </a:r>
+            <a:endParaRPr lang="en-US" sz="1400" dirty="0"/>
+          </a:p>
+        </p:txBody>
+      </p:sp>
+      <p:sp>
+        <p:nvSpPr>
+          <p:cNvPr id="12" name="Text 10"/>
+          <p:cNvSpPr txBox="1"/>
+          <p:nvPr/>
+        </p:nvSpPr>
+        <p:spPr>
+          <a:xfrm>
+            <a:off x="6720840" y="3474720"/>
+            <a:ext cx="4572000" cy="320040"/>
+          </a:xfrm>
+          <a:prstGeom prst="rect">
+            <a:avLst/>
+          </a:prstGeom>
+          <a:noFill/>
+          <a:ln/>
+        </p:spPr>
+        <p:txBody>
+          <a:bodyPr wrap="square" lIns="0" tIns="0" rIns="0" bIns="0" rtlCol="0" anchor="ctr"/>
+          <a:lstStyle/>
+          <a:p>
+            <a:pPr indent="0" marL="0">
+              <a:buNone/>
+            </a:pPr>
+            <a:r>
+              <a:rPr lang="en-US" sz="1600" b="1" dirty="0">
+                <a:solidFill>
+                  <a:schemeClr val="accent2"/>
+                </a:solidFill>
+              </a:rPr>
+              <a:t>RGPD</a:t>
+            </a:r>
+            <a:endParaRPr lang="en-US" sz="1600" dirty="0"/>
+          </a:p>
+        </p:txBody>
+      </p:sp>
+      <p:sp>
+        <p:nvSpPr>
+          <p:cNvPr id="13" name="Text 11"/>
+          <p:cNvSpPr txBox="1"/>
+          <p:nvPr/>
+        </p:nvSpPr>
+        <p:spPr>
+          <a:xfrm>
+            <a:off x="6720840" y="3822192"/>
+            <a:ext cx="4572000" cy="777240"/>
+          </a:xfrm>
+          <a:prstGeom prst="rect">
+            <a:avLst/>
+          </a:prstGeom>
+          <a:noFill/>
+          <a:ln/>
+        </p:spPr>
+        <p:txBody>
+          <a:bodyPr wrap="square" lIns="0" tIns="0" rIns="0" bIns="0" rtlCol="0" anchor="ctr"/>
+          <a:lstStyle/>
+          <a:p>
+            <a:pPr indent="0" marL="0">
+              <a:buNone/>
+            </a:pPr>
+            <a:r>
+              <a:rPr lang="en-US" sz="1400" dirty="0">
+                <a:solidFill>
+                  <a:schemeClr val="bg2"/>
+                </a:solidFill>
+              </a:rPr>
+              <a:t>L'origine est une donnée sensible (art. 9). Droit de refuser une décision entièrement automatisée (art. 22).</a:t>
+            </a:r>
+            <a:endParaRPr lang="en-US" sz="1400" dirty="0"/>
+          </a:p>
+        </p:txBody>
+      </p:sp>
+      <p:sp>
+        <p:nvSpPr>
+          <p:cNvPr id="14" name="Text 12"/>
+          <p:cNvSpPr txBox="1"/>
+          <p:nvPr/>
+        </p:nvSpPr>
+        <p:spPr>
+          <a:xfrm>
+            <a:off x="6720840" y="4709160"/>
+            <a:ext cx="4572000" cy="320040"/>
+          </a:xfrm>
+          <a:prstGeom prst="rect">
+            <a:avLst/>
+          </a:prstGeom>
+          <a:noFill/>
+          <a:ln/>
+        </p:spPr>
+        <p:txBody>
+          <a:bodyPr wrap="square" lIns="0" tIns="0" rIns="0" bIns="0" rtlCol="0" anchor="ctr"/>
+          <a:lstStyle/>
+          <a:p>
+            <a:pPr indent="0" marL="0">
+              <a:buNone/>
+            </a:pPr>
+            <a:r>
+              <a:rPr lang="en-US" sz="1600" b="1" dirty="0">
+                <a:solidFill>
+                  <a:schemeClr val="accent2"/>
+                </a:solidFill>
+              </a:rPr>
+              <a:t>Par défaut</a:t>
+            </a:r>
+            <a:endParaRPr lang="en-US" sz="1600" dirty="0"/>
+          </a:p>
+        </p:txBody>
+      </p:sp>
+      <p:sp>
+        <p:nvSpPr>
+          <p:cNvPr id="15" name="Text 13"/>
+          <p:cNvSpPr txBox="1"/>
+          <p:nvPr/>
+        </p:nvSpPr>
+        <p:spPr>
+          <a:xfrm>
+            <a:off x="6720840" y="5056632"/>
+            <a:ext cx="4572000" cy="777240"/>
+          </a:xfrm>
+          <a:prstGeom prst="rect">
+            <a:avLst/>
+          </a:prstGeom>
+          <a:noFill/>
+          <a:ln/>
+        </p:spPr>
+        <p:txBody>
+          <a:bodyPr wrap="square" lIns="0" tIns="0" rIns="0" bIns="0" rtlCol="0" anchor="ctr"/>
+          <a:lstStyle/>
+          <a:p>
+            <a:pPr indent="0" marL="0">
+              <a:buNone/>
+            </a:pPr>
+            <a:r>
+              <a:rPr lang="en-US" sz="1400" dirty="0">
+                <a:solidFill>
+                  <a:schemeClr val="bg2"/>
+                </a:solidFill>
+              </a:rPr>
+              <a:t>Le modèle recommande, un humain décide, chaque score est expliqué.</a:t>
             </a:r>
             <a:endParaRPr lang="en-US" sz="1400" dirty="0"/>
           </a:p>
@@ -7379,8 +8061,8 @@
         </p:nvSpPr>
         <p:spPr>
           <a:xfrm>
-            <a:off x="548640" y="320040"/>
-            <a:ext cx="11064240" cy="822960"/>
+            <a:off x="548640" y="274320"/>
+            <a:ext cx="11064240" cy="914400"/>
           </a:xfrm>
           <a:prstGeom prst="rect">
             <a:avLst/>
@@ -7396,7 +8078,7 @@
               <a:buNone/>
             </a:pPr>
             <a:r>
-              <a:rPr lang="en-US" sz="3200" b="1" dirty="0">
+              <a:rPr lang="en-US" sz="3600" b="1" dirty="0">
                 <a:solidFill>
                   <a:schemeClr val="tx1"/>
                 </a:solidFill>
@@ -7404,176 +8086,275 @@
                 <a:ea typeface="Cambria" pitchFamily="34" charset="-122"/>
                 <a:cs typeface="Cambria" pitchFamily="34" charset="-120"/>
               </a:rPr>
-              <a:t>Une démarche éthique dès la conception</a:t>
-            </a:r>
-            <a:endParaRPr lang="en-US" sz="3200" dirty="0"/>
-          </a:p>
-        </p:txBody>
-      </p:sp>
-      <p:sp>
-        <p:nvSpPr>
-          <p:cNvPr id="3" name="etape-1"/>
+              <a:t>Les données reproduisent de fortes inégalités</a:t>
+            </a:r>
+            <a:endParaRPr lang="en-US" sz="3600" dirty="0"/>
+          </a:p>
+        </p:txBody>
+      </p:sp>
+      <p:sp>
+        <p:nvSpPr>
+          <p:cNvPr id="3" name="Text 1"/>
+          <p:cNvSpPr txBox="1"/>
+          <p:nvPr/>
+        </p:nvSpPr>
+        <p:spPr>
+          <a:xfrm>
+            <a:off x="548640" y="1417320"/>
+            <a:ext cx="3291840" cy="777240"/>
+          </a:xfrm>
+          <a:prstGeom prst="rect">
+            <a:avLst/>
+          </a:prstGeom>
+          <a:noFill/>
+          <a:ln/>
+        </p:spPr>
+        <p:txBody>
+          <a:bodyPr wrap="square" lIns="0" tIns="0" rIns="0" bIns="0" rtlCol="0" anchor="ctr"/>
+          <a:lstStyle/>
+          <a:p>
+            <a:pPr indent="0" marL="0">
+              <a:buNone/>
+            </a:pPr>
+            <a:r>
+              <a:rPr lang="en-US" sz="4800" b="1" dirty="0">
+                <a:solidFill>
+                  <a:schemeClr val="tx1"/>
+                </a:solidFill>
+                <a:latin typeface="Cambria" pitchFamily="34" charset="0"/>
+                <a:ea typeface="Cambria" pitchFamily="34" charset="-122"/>
+                <a:cs typeface="Cambria" pitchFamily="34" charset="-120"/>
+              </a:rPr>
+              <a:t>30 %</a:t>
+            </a:r>
+            <a:endParaRPr lang="en-US" sz="4800" dirty="0"/>
+          </a:p>
+        </p:txBody>
+      </p:sp>
+      <p:sp>
+        <p:nvSpPr>
+          <p:cNvPr id="4" name="Text 2"/>
+          <p:cNvSpPr txBox="1"/>
+          <p:nvPr/>
+        </p:nvSpPr>
+        <p:spPr>
+          <a:xfrm>
+            <a:off x="548640" y="2194560"/>
+            <a:ext cx="3291840" cy="640080"/>
+          </a:xfrm>
+          <a:prstGeom prst="rect">
+            <a:avLst/>
+          </a:prstGeom>
+          <a:noFill/>
+          <a:ln/>
+        </p:spPr>
+        <p:txBody>
+          <a:bodyPr wrap="square" lIns="0" tIns="0" rIns="0" bIns="0" rtlCol="0" anchor="ctr"/>
+          <a:lstStyle/>
+          <a:p>
+            <a:pPr indent="0" marL="0">
+              <a:buNone/>
+            </a:pPr>
+            <a:r>
+              <a:rPr lang="en-US" sz="1400" dirty="0">
+                <a:solidFill>
+                  <a:schemeClr val="tx2"/>
+                </a:solidFill>
+              </a:rPr>
+              <a:t>des hommes gagnent plus de 50 K$</a:t>
+            </a:r>
+            <a:endParaRPr lang="en-US" sz="1400" dirty="0"/>
+          </a:p>
+        </p:txBody>
+      </p:sp>
+      <p:sp>
+        <p:nvSpPr>
+          <p:cNvPr id="5" name="Text 3"/>
+          <p:cNvSpPr txBox="1"/>
+          <p:nvPr/>
+        </p:nvSpPr>
+        <p:spPr>
+          <a:xfrm>
+            <a:off x="548640" y="3017520"/>
+            <a:ext cx="3291840" cy="777240"/>
+          </a:xfrm>
+          <a:prstGeom prst="rect">
+            <a:avLst/>
+          </a:prstGeom>
+          <a:noFill/>
+          <a:ln/>
+        </p:spPr>
+        <p:txBody>
+          <a:bodyPr wrap="square" lIns="0" tIns="0" rIns="0" bIns="0" rtlCol="0" anchor="ctr"/>
+          <a:lstStyle/>
+          <a:p>
+            <a:pPr indent="0" marL="0">
+              <a:buNone/>
+            </a:pPr>
+            <a:r>
+              <a:rPr lang="en-US" sz="4800" b="1" dirty="0">
+                <a:solidFill>
+                  <a:schemeClr val="accent3"/>
+                </a:solidFill>
+                <a:latin typeface="Cambria" pitchFamily="34" charset="0"/>
+                <a:ea typeface="Cambria" pitchFamily="34" charset="-122"/>
+                <a:cs typeface="Cambria" pitchFamily="34" charset="-120"/>
+              </a:rPr>
+              <a:t>11 %</a:t>
+            </a:r>
+            <a:endParaRPr lang="en-US" sz="4800" dirty="0"/>
+          </a:p>
+        </p:txBody>
+      </p:sp>
+      <p:sp>
+        <p:nvSpPr>
+          <p:cNvPr id="6" name="Text 4"/>
+          <p:cNvSpPr txBox="1"/>
+          <p:nvPr/>
+        </p:nvSpPr>
+        <p:spPr>
+          <a:xfrm>
+            <a:off x="548640" y="3794760"/>
+            <a:ext cx="3291840" cy="640080"/>
+          </a:xfrm>
+          <a:prstGeom prst="rect">
+            <a:avLst/>
+          </a:prstGeom>
+          <a:noFill/>
+          <a:ln/>
+        </p:spPr>
+        <p:txBody>
+          <a:bodyPr wrap="square" lIns="0" tIns="0" rIns="0" bIns="0" rtlCol="0" anchor="ctr"/>
+          <a:lstStyle/>
+          <a:p>
+            <a:pPr indent="0" marL="0">
+              <a:buNone/>
+            </a:pPr>
+            <a:r>
+              <a:rPr lang="en-US" sz="1400" dirty="0">
+                <a:solidFill>
+                  <a:schemeClr val="tx2"/>
+                </a:solidFill>
+              </a:rPr>
+              <a:t>des femmes</a:t>
+            </a:r>
+            <a:endParaRPr lang="en-US" sz="1400" dirty="0"/>
+          </a:p>
+        </p:txBody>
+      </p:sp>
+      <p:sp>
+        <p:nvSpPr>
+          <p:cNvPr id="7" name="Text 5"/>
+          <p:cNvSpPr txBox="1"/>
+          <p:nvPr/>
+        </p:nvSpPr>
+        <p:spPr>
+          <a:xfrm>
+            <a:off x="548640" y="4617720"/>
+            <a:ext cx="3291840" cy="777240"/>
+          </a:xfrm>
+          <a:prstGeom prst="rect">
+            <a:avLst/>
+          </a:prstGeom>
+          <a:noFill/>
+          <a:ln/>
+        </p:spPr>
+        <p:txBody>
+          <a:bodyPr wrap="square" lIns="0" tIns="0" rIns="0" bIns="0" rtlCol="0" anchor="ctr"/>
+          <a:lstStyle/>
+          <a:p>
+            <a:pPr indent="0" marL="0">
+              <a:buNone/>
+            </a:pPr>
+            <a:r>
+              <a:rPr lang="en-US" sz="3600" b="1" dirty="0">
+                <a:solidFill>
+                  <a:schemeClr val="accent3"/>
+                </a:solidFill>
+                <a:latin typeface="Cambria" pitchFamily="34" charset="0"/>
+                <a:ea typeface="Cambria" pitchFamily="34" charset="-122"/>
+                <a:cs typeface="Cambria" pitchFamily="34" charset="-120"/>
+              </a:rPr>
+              <a:t>40 % vs 6 %</a:t>
+            </a:r>
+            <a:endParaRPr lang="en-US" sz="3600" dirty="0"/>
+          </a:p>
+        </p:txBody>
+      </p:sp>
+      <p:sp>
+        <p:nvSpPr>
+          <p:cNvPr id="8" name="Text 6"/>
+          <p:cNvSpPr txBox="1"/>
+          <p:nvPr/>
+        </p:nvSpPr>
+        <p:spPr>
+          <a:xfrm>
+            <a:off x="548640" y="5394960"/>
+            <a:ext cx="3291840" cy="640080"/>
+          </a:xfrm>
+          <a:prstGeom prst="rect">
+            <a:avLst/>
+          </a:prstGeom>
+          <a:noFill/>
+          <a:ln/>
+        </p:spPr>
+        <p:txBody>
+          <a:bodyPr wrap="square" lIns="0" tIns="0" rIns="0" bIns="0" rtlCol="0" anchor="ctr"/>
+          <a:lstStyle/>
+          <a:p>
+            <a:pPr indent="0" marL="0">
+              <a:buNone/>
+            </a:pPr>
+            <a:r>
+              <a:rPr lang="en-US" sz="1400" dirty="0">
+                <a:solidFill>
+                  <a:schemeClr val="tx2"/>
+                </a:solidFill>
+              </a:rPr>
+              <a:t>hommes Asian-Pac-Islander vs femmes noires</a:t>
+            </a:r>
+            <a:endParaRPr lang="en-US" sz="1400" dirty="0"/>
+          </a:p>
+        </p:txBody>
+      </p:sp>
+      <p:pic>
+        <p:nvPicPr>
+          <p:cNvPr id="9" name="Image 0" descr="preencoded.png">    </p:cNvPr>
+          <p:cNvPicPr>
+            <a:picLocks noChangeAspect="1"/>
+          </p:cNvPicPr>
+          <p:nvPr/>
+        </p:nvPicPr>
+        <p:blipFill>
+          <a:blip r:embed="rId1"/>
+          <a:stretch>
+            <a:fillRect/>
+          </a:stretch>
+        </p:blipFill>
+        <p:spPr>
+          <a:xfrm>
+            <a:off x="4114800" y="1463040"/>
+            <a:ext cx="7498080" cy="2312183"/>
+          </a:xfrm>
+          <a:prstGeom prst="rect">
+            <a:avLst/>
+          </a:prstGeom>
+        </p:spPr>
+      </p:pic>
+      <p:sp>
+        <p:nvSpPr>
+          <p:cNvPr id="10" name="carte-lecture"/>
           <p:cNvSpPr/>
           <p:nvPr/>
         </p:nvSpPr>
         <p:spPr>
           <a:xfrm>
-            <a:off x="548640" y="1828800"/>
-            <a:ext cx="2057400" cy="2926080"/>
+            <a:off x="4114800" y="4160520"/>
+            <a:ext cx="7498080" cy="1874520"/>
           </a:xfrm>
           <a:prstGeom prst="roundRect">
             <a:avLst>
-              <a:gd name="adj" fmla="val 3556"/>
-            </a:avLst>
-          </a:prstGeom>
-          <a:solidFill>
-            <a:srgbClr val="E6F5F3"/>
-          </a:solidFill>
-          <a:ln/>
-        </p:spPr>
-      </p:sp>
-      <p:sp>
-        <p:nvSpPr>
-          <p:cNvPr id="4" name="Shape 2"/>
-          <p:cNvSpPr/>
-          <p:nvPr/>
-        </p:nvSpPr>
-        <p:spPr>
-          <a:xfrm>
-            <a:off x="777240" y="2057400"/>
-            <a:ext cx="502920" cy="502920"/>
-          </a:xfrm>
-          <a:prstGeom prst="ellipse">
-            <a:avLst/>
-          </a:prstGeom>
-          <a:solidFill>
-            <a:schemeClr val="accent2"/>
-          </a:solidFill>
-          <a:ln/>
-        </p:spPr>
-      </p:sp>
-      <p:sp>
-        <p:nvSpPr>
-          <p:cNvPr id="5" name="Text 3"/>
-          <p:cNvSpPr txBox="1"/>
-          <p:nvPr/>
-        </p:nvSpPr>
-        <p:spPr>
-          <a:xfrm>
-            <a:off x="777240" y="2057400"/>
-            <a:ext cx="502920" cy="502920"/>
-          </a:xfrm>
-          <a:prstGeom prst="rect">
-            <a:avLst/>
-          </a:prstGeom>
-          <a:noFill/>
-          <a:ln/>
-        </p:spPr>
-        <p:txBody>
-          <a:bodyPr wrap="square" lIns="0" tIns="0" rIns="0" bIns="0" rtlCol="0" anchor="ctr"/>
-          <a:lstStyle/>
-          <a:p>
-            <a:pPr algn="ctr" indent="0" marL="0">
-              <a:buNone/>
-            </a:pPr>
-            <a:r>
-              <a:rPr lang="en-US" sz="1600" b="1" dirty="0">
-                <a:solidFill>
-                  <a:schemeClr val="bg1"/>
-                </a:solidFill>
-              </a:rPr>
-              <a:t>1</a:t>
-            </a:r>
-            <a:endParaRPr lang="en-US" sz="1600" dirty="0"/>
-          </a:p>
-        </p:txBody>
-      </p:sp>
-      <p:sp>
-        <p:nvSpPr>
-          <p:cNvPr id="6" name="Text 4"/>
-          <p:cNvSpPr txBox="1"/>
-          <p:nvPr/>
-        </p:nvSpPr>
-        <p:spPr>
-          <a:xfrm>
-            <a:off x="777240" y="2743200"/>
-            <a:ext cx="1691640" cy="411480"/>
-          </a:xfrm>
-          <a:prstGeom prst="rect">
-            <a:avLst/>
-          </a:prstGeom>
-          <a:noFill/>
-          <a:ln/>
-        </p:spPr>
-        <p:txBody>
-          <a:bodyPr wrap="square" lIns="0" tIns="0" rIns="0" bIns="0" rtlCol="0" anchor="ctr"/>
-          <a:lstStyle/>
-          <a:p>
-            <a:pPr indent="0" marL="0">
-              <a:buNone/>
-            </a:pPr>
-            <a:r>
-              <a:rPr lang="en-US" sz="1900" b="1" dirty="0">
-                <a:solidFill>
-                  <a:schemeClr val="tx1"/>
-                </a:solidFill>
-              </a:rPr>
-              <a:t>Auditer</a:t>
-            </a:r>
-            <a:endParaRPr lang="en-US" sz="1900" dirty="0"/>
-          </a:p>
-        </p:txBody>
-      </p:sp>
-      <p:sp>
-        <p:nvSpPr>
-          <p:cNvPr id="7" name="Text 5"/>
-          <p:cNvSpPr txBox="1"/>
-          <p:nvPr/>
-        </p:nvSpPr>
-        <p:spPr>
-          <a:xfrm>
-            <a:off x="777240" y="3200400"/>
-            <a:ext cx="1691640" cy="1371600"/>
-          </a:xfrm>
-          <a:prstGeom prst="rect">
-            <a:avLst/>
-          </a:prstGeom>
-          <a:noFill/>
-          <a:ln/>
-        </p:spPr>
-        <p:txBody>
-          <a:bodyPr wrap="square" lIns="0" tIns="0" rIns="0" bIns="0" rtlCol="0" anchor="ctr"/>
-          <a:lstStyle/>
-          <a:p>
-            <a:pPr indent="0" marL="0">
-              <a:buNone/>
-            </a:pPr>
-            <a:r>
-              <a:rPr lang="en-US" sz="1400" dirty="0">
-                <a:solidFill>
-                  <a:schemeClr val="tx2"/>
-                </a:solidFill>
-              </a:rPr>
-              <a:t>Taux de &gt;50K par sexe, origine et sexe × origine</a:t>
-            </a:r>
-            <a:endParaRPr lang="en-US" sz="1400" dirty="0"/>
-          </a:p>
-        </p:txBody>
-      </p:sp>
-      <p:sp>
-        <p:nvSpPr>
-          <p:cNvPr id="8" name="etape-2"/>
-          <p:cNvSpPr/>
-          <p:nvPr/>
-        </p:nvSpPr>
-        <p:spPr>
-          <a:xfrm>
-            <a:off x="2834640" y="1828800"/>
-            <a:ext cx="2057400" cy="2926080"/>
-          </a:xfrm>
-          <a:prstGeom prst="roundRect">
-            <a:avLst>
-              <a:gd name="adj" fmla="val 3556"/>
+              <a:gd name="adj" fmla="val 3902"/>
             </a:avLst>
           </a:prstGeom>
           <a:solidFill>
@@ -7584,70 +8365,14 @@
       </p:sp>
       <p:sp>
         <p:nvSpPr>
-          <p:cNvPr id="9" name="Shape 7"/>
-          <p:cNvSpPr/>
-          <p:nvPr/>
-        </p:nvSpPr>
-        <p:spPr>
-          <a:xfrm>
-            <a:off x="3063240" y="2057400"/>
-            <a:ext cx="502920" cy="502920"/>
-          </a:xfrm>
-          <a:prstGeom prst="ellipse">
-            <a:avLst/>
-          </a:prstGeom>
-          <a:solidFill>
-            <a:schemeClr val="accent3"/>
-          </a:solidFill>
-          <a:ln/>
-        </p:spPr>
-      </p:sp>
-      <p:sp>
-        <p:nvSpPr>
-          <p:cNvPr id="10" name="Text 8"/>
+          <p:cNvPr id="11" name="Text 8"/>
           <p:cNvSpPr txBox="1"/>
           <p:nvPr/>
         </p:nvSpPr>
         <p:spPr>
           <a:xfrm>
-            <a:off x="3063240" y="2057400"/>
-            <a:ext cx="502920" cy="502920"/>
-          </a:xfrm>
-          <a:prstGeom prst="rect">
-            <a:avLst/>
-          </a:prstGeom>
-          <a:noFill/>
-          <a:ln/>
-        </p:spPr>
-        <p:txBody>
-          <a:bodyPr wrap="square" lIns="0" tIns="0" rIns="0" bIns="0" rtlCol="0" anchor="ctr"/>
-          <a:lstStyle/>
-          <a:p>
-            <a:pPr algn="ctr" indent="0" marL="0">
-              <a:buNone/>
-            </a:pPr>
-            <a:r>
-              <a:rPr lang="en-US" sz="1600" b="1" dirty="0">
-                <a:solidFill>
-                  <a:schemeClr val="bg1"/>
-                </a:solidFill>
-              </a:rPr>
-              <a:t>2</a:t>
-            </a:r>
-            <a:endParaRPr lang="en-US" sz="1600" dirty="0"/>
-          </a:p>
-        </p:txBody>
-      </p:sp>
-      <p:sp>
-        <p:nvSpPr>
-          <p:cNvPr id="11" name="Text 9"/>
-          <p:cNvSpPr txBox="1"/>
-          <p:nvPr/>
-        </p:nvSpPr>
-        <p:spPr>
-          <a:xfrm>
-            <a:off x="3063240" y="2743200"/>
-            <a:ext cx="1691640" cy="411480"/>
+            <a:off x="4389120" y="4297680"/>
+            <a:ext cx="6949440" cy="365760"/>
           </a:xfrm>
           <a:prstGeom prst="rect">
             <a:avLst/>
@@ -7663,27 +8388,27 @@
               <a:buNone/>
             </a:pPr>
             <a:r>
-              <a:rPr lang="en-US" sz="1900" b="1" dirty="0">
+              <a:rPr lang="en-US" sz="1600" b="1" dirty="0">
                 <a:solidFill>
                   <a:schemeClr val="tx1"/>
                 </a:solidFill>
               </a:rPr>
-              <a:t>Corriger</a:t>
-            </a:r>
-            <a:endParaRPr lang="en-US" sz="1900" dirty="0"/>
-          </a:p>
-        </p:txBody>
-      </p:sp>
-      <p:sp>
-        <p:nvSpPr>
-          <p:cNvPr id="12" name="Text 10"/>
+              <a:t>Ce que montre le croisement</a:t>
+            </a:r>
+            <a:endParaRPr lang="en-US" sz="1600" dirty="0"/>
+          </a:p>
+        </p:txBody>
+      </p:sp>
+      <p:sp>
+        <p:nvSpPr>
+          <p:cNvPr id="12" name="Text 9"/>
           <p:cNvSpPr txBox="1"/>
           <p:nvPr/>
         </p:nvSpPr>
         <p:spPr>
           <a:xfrm>
-            <a:off x="3063240" y="3200400"/>
-            <a:ext cx="1691640" cy="1371600"/>
+            <a:off x="4389120" y="4709160"/>
+            <a:ext cx="6949440" cy="1188720"/>
           </a:xfrm>
           <a:prstGeom prst="rect">
             <a:avLst/>
@@ -7695,8 +8420,12 @@
           <a:bodyPr wrap="square" lIns="0" tIns="0" rIns="0" bIns="0" rtlCol="0" anchor="ctr"/>
           <a:lstStyle/>
           <a:p>
-            <a:pPr indent="0" marL="0">
-              <a:buNone/>
+            <a:pPr marL="342900" indent="-342900">
+              <a:spcAft>
+                <a:spcPts val="600"/>
+              </a:spcAft>
+              <a:buSzPct val="100000"/>
+              <a:buChar char="•"/>
             </a:pPr>
             <a:r>
               <a:rPr lang="en-US" sz="1400" dirty="0">
@@ -7704,149 +8433,17 @@
                   <a:schemeClr val="tx2"/>
                 </a:solidFill>
               </a:rPr>
-              <a:t>Repondération Kamiran–Calders sur sexe × origine</a:t>
+              <a:t>Être une femme noire cumule deux désavantages : 6 % de &gt;50K, le taux le plus bas des groupes assez grands.</a:t>
             </a:r>
             <a:endParaRPr lang="en-US" sz="1400" dirty="0"/>
           </a:p>
-        </p:txBody>
-      </p:sp>
-      <p:sp>
-        <p:nvSpPr>
-          <p:cNvPr id="13" name="etape-3"/>
-          <p:cNvSpPr/>
-          <p:nvPr/>
-        </p:nvSpPr>
-        <p:spPr>
-          <a:xfrm>
-            <a:off x="5120640" y="1828800"/>
-            <a:ext cx="2057400" cy="2926080"/>
-          </a:xfrm>
-          <a:prstGeom prst="roundRect">
-            <a:avLst>
-              <a:gd name="adj" fmla="val 3556"/>
-            </a:avLst>
-          </a:prstGeom>
-          <a:solidFill>
-            <a:srgbClr val="E6F5F3"/>
-          </a:solidFill>
-          <a:ln/>
-        </p:spPr>
-      </p:sp>
-      <p:sp>
-        <p:nvSpPr>
-          <p:cNvPr id="14" name="Shape 12"/>
-          <p:cNvSpPr/>
-          <p:nvPr/>
-        </p:nvSpPr>
-        <p:spPr>
-          <a:xfrm>
-            <a:off x="5349240" y="2057400"/>
-            <a:ext cx="502920" cy="502920"/>
-          </a:xfrm>
-          <a:prstGeom prst="ellipse">
-            <a:avLst/>
-          </a:prstGeom>
-          <a:solidFill>
-            <a:schemeClr val="accent2"/>
-          </a:solidFill>
-          <a:ln/>
-        </p:spPr>
-      </p:sp>
-      <p:sp>
-        <p:nvSpPr>
-          <p:cNvPr id="15" name="Text 13"/>
-          <p:cNvSpPr txBox="1"/>
-          <p:nvPr/>
-        </p:nvSpPr>
-        <p:spPr>
-          <a:xfrm>
-            <a:off x="5349240" y="2057400"/>
-            <a:ext cx="502920" cy="502920"/>
-          </a:xfrm>
-          <a:prstGeom prst="rect">
-            <a:avLst/>
-          </a:prstGeom>
-          <a:noFill/>
-          <a:ln/>
-        </p:spPr>
-        <p:txBody>
-          <a:bodyPr wrap="square" lIns="0" tIns="0" rIns="0" bIns="0" rtlCol="0" anchor="ctr"/>
-          <a:lstStyle/>
-          <a:p>
-            <a:pPr algn="ctr" indent="0" marL="0">
-              <a:buNone/>
-            </a:pPr>
-            <a:r>
-              <a:rPr lang="en-US" sz="1600" b="1" dirty="0">
-                <a:solidFill>
-                  <a:schemeClr val="bg1"/>
-                </a:solidFill>
-              </a:rPr>
-              <a:t>3</a:t>
-            </a:r>
-            <a:endParaRPr lang="en-US" sz="1600" dirty="0"/>
-          </a:p>
-        </p:txBody>
-      </p:sp>
-      <p:sp>
-        <p:nvSpPr>
-          <p:cNvPr id="16" name="Text 14"/>
-          <p:cNvSpPr txBox="1"/>
-          <p:nvPr/>
-        </p:nvSpPr>
-        <p:spPr>
-          <a:xfrm>
-            <a:off x="5349240" y="2743200"/>
-            <a:ext cx="1691640" cy="411480"/>
-          </a:xfrm>
-          <a:prstGeom prst="rect">
-            <a:avLst/>
-          </a:prstGeom>
-          <a:noFill/>
-          <a:ln/>
-        </p:spPr>
-        <p:txBody>
-          <a:bodyPr wrap="square" lIns="0" tIns="0" rIns="0" bIns="0" rtlCol="0" anchor="ctr"/>
-          <a:lstStyle/>
-          <a:p>
-            <a:pPr indent="0" marL="0">
-              <a:buNone/>
-            </a:pPr>
-            <a:r>
-              <a:rPr lang="en-US" sz="1900" b="1" dirty="0">
-                <a:solidFill>
-                  <a:schemeClr val="tx1"/>
-                </a:solidFill>
-              </a:rPr>
-              <a:t>Adapter</a:t>
-            </a:r>
-            <a:endParaRPr lang="en-US" sz="1900" dirty="0"/>
-          </a:p>
-        </p:txBody>
-      </p:sp>
-      <p:sp>
-        <p:nvSpPr>
-          <p:cNvPr id="17" name="Text 15"/>
-          <p:cNvSpPr txBox="1"/>
-          <p:nvPr/>
-        </p:nvSpPr>
-        <p:spPr>
-          <a:xfrm>
-            <a:off x="5349240" y="3200400"/>
-            <a:ext cx="1691640" cy="1371600"/>
-          </a:xfrm>
-          <a:prstGeom prst="rect">
-            <a:avLst/>
-          </a:prstGeom>
-          <a:noFill/>
-          <a:ln/>
-        </p:spPr>
-        <p:txBody>
-          <a:bodyPr wrap="square" lIns="0" tIns="0" rIns="0" bIns="0" rtlCol="0" anchor="ctr"/>
-          <a:lstStyle/>
-          <a:p>
-            <a:pPr indent="0" marL="0">
-              <a:buNone/>
+          <a:p>
+            <a:pPr marL="342900" indent="-342900">
+              <a:spcAft>
+                <a:spcPts val="600"/>
+              </a:spcAft>
+              <a:buSzPct val="100000"/>
+              <a:buChar char="•"/>
             </a:pPr>
             <a:r>
               <a:rPr lang="en-US" sz="1400" dirty="0">
@@ -7854,345 +8451,9 @@
                   <a:schemeClr val="tx2"/>
                 </a:solidFill>
               </a:rPr>
-              <a:t>Fine-tuning complet, LoRA, distillation</a:t>
+              <a:t>Certains groupes sont trop petits pour conclure (Other : 15 personnes).</a:t>
             </a:r>
             <a:endParaRPr lang="en-US" sz="1400" dirty="0"/>
-          </a:p>
-        </p:txBody>
-      </p:sp>
-      <p:sp>
-        <p:nvSpPr>
-          <p:cNvPr id="18" name="etape-4"/>
-          <p:cNvSpPr/>
-          <p:nvPr/>
-        </p:nvSpPr>
-        <p:spPr>
-          <a:xfrm>
-            <a:off x="7406640" y="1828800"/>
-            <a:ext cx="2057400" cy="2926080"/>
-          </a:xfrm>
-          <a:prstGeom prst="roundRect">
-            <a:avLst>
-              <a:gd name="adj" fmla="val 3556"/>
-            </a:avLst>
-          </a:prstGeom>
-          <a:solidFill>
-            <a:schemeClr val="bg2"/>
-          </a:solidFill>
-          <a:ln/>
-        </p:spPr>
-      </p:sp>
-      <p:sp>
-        <p:nvSpPr>
-          <p:cNvPr id="19" name="Shape 17"/>
-          <p:cNvSpPr/>
-          <p:nvPr/>
-        </p:nvSpPr>
-        <p:spPr>
-          <a:xfrm>
-            <a:off x="7635240" y="2057400"/>
-            <a:ext cx="502920" cy="502920"/>
-          </a:xfrm>
-          <a:prstGeom prst="ellipse">
-            <a:avLst/>
-          </a:prstGeom>
-          <a:solidFill>
-            <a:schemeClr val="accent2"/>
-          </a:solidFill>
-          <a:ln/>
-        </p:spPr>
-      </p:sp>
-      <p:sp>
-        <p:nvSpPr>
-          <p:cNvPr id="20" name="Text 18"/>
-          <p:cNvSpPr txBox="1"/>
-          <p:nvPr/>
-        </p:nvSpPr>
-        <p:spPr>
-          <a:xfrm>
-            <a:off x="7635240" y="2057400"/>
-            <a:ext cx="502920" cy="502920"/>
-          </a:xfrm>
-          <a:prstGeom prst="rect">
-            <a:avLst/>
-          </a:prstGeom>
-          <a:noFill/>
-          <a:ln/>
-        </p:spPr>
-        <p:txBody>
-          <a:bodyPr wrap="square" lIns="0" tIns="0" rIns="0" bIns="0" rtlCol="0" anchor="ctr"/>
-          <a:lstStyle/>
-          <a:p>
-            <a:pPr algn="ctr" indent="0" marL="0">
-              <a:buNone/>
-            </a:pPr>
-            <a:r>
-              <a:rPr lang="en-US" sz="1600" b="1" dirty="0">
-                <a:solidFill>
-                  <a:schemeClr val="bg1"/>
-                </a:solidFill>
-              </a:rPr>
-              <a:t>4</a:t>
-            </a:r>
-            <a:endParaRPr lang="en-US" sz="1600" dirty="0"/>
-          </a:p>
-        </p:txBody>
-      </p:sp>
-      <p:sp>
-        <p:nvSpPr>
-          <p:cNvPr id="21" name="Text 19"/>
-          <p:cNvSpPr txBox="1"/>
-          <p:nvPr/>
-        </p:nvSpPr>
-        <p:spPr>
-          <a:xfrm>
-            <a:off x="7635240" y="2743200"/>
-            <a:ext cx="1691640" cy="411480"/>
-          </a:xfrm>
-          <a:prstGeom prst="rect">
-            <a:avLst/>
-          </a:prstGeom>
-          <a:noFill/>
-          <a:ln/>
-        </p:spPr>
-        <p:txBody>
-          <a:bodyPr wrap="square" lIns="0" tIns="0" rIns="0" bIns="0" rtlCol="0" anchor="ctr"/>
-          <a:lstStyle/>
-          <a:p>
-            <a:pPr indent="0" marL="0">
-              <a:buNone/>
-            </a:pPr>
-            <a:r>
-              <a:rPr lang="en-US" sz="1900" b="1" dirty="0">
-                <a:solidFill>
-                  <a:schemeClr val="tx1"/>
-                </a:solidFill>
-              </a:rPr>
-              <a:t>Choisir</a:t>
-            </a:r>
-            <a:endParaRPr lang="en-US" sz="1900" dirty="0"/>
-          </a:p>
-        </p:txBody>
-      </p:sp>
-      <p:sp>
-        <p:nvSpPr>
-          <p:cNvPr id="22" name="Text 20"/>
-          <p:cNvSpPr txBox="1"/>
-          <p:nvPr/>
-        </p:nvSpPr>
-        <p:spPr>
-          <a:xfrm>
-            <a:off x="7635240" y="3200400"/>
-            <a:ext cx="1691640" cy="1371600"/>
-          </a:xfrm>
-          <a:prstGeom prst="rect">
-            <a:avLst/>
-          </a:prstGeom>
-          <a:noFill/>
-          <a:ln/>
-        </p:spPr>
-        <p:txBody>
-          <a:bodyPr wrap="square" lIns="0" tIns="0" rIns="0" bIns="0" rtlCol="0" anchor="ctr"/>
-          <a:lstStyle/>
-          <a:p>
-            <a:pPr indent="0" marL="0">
-              <a:buNone/>
-            </a:pPr>
-            <a:r>
-              <a:rPr lang="en-US" sz="1400" dirty="0">
-                <a:solidFill>
-                  <a:schemeClr val="tx2"/>
-                </a:solidFill>
-              </a:rPr>
-              <a:t>Critère explicite : équité, performance, sobriété</a:t>
-            </a:r>
-            <a:endParaRPr lang="en-US" sz="1400" dirty="0"/>
-          </a:p>
-        </p:txBody>
-      </p:sp>
-      <p:sp>
-        <p:nvSpPr>
-          <p:cNvPr id="23" name="etape-5"/>
-          <p:cNvSpPr/>
-          <p:nvPr/>
-        </p:nvSpPr>
-        <p:spPr>
-          <a:xfrm>
-            <a:off x="9692640" y="1828800"/>
-            <a:ext cx="2057400" cy="2926080"/>
-          </a:xfrm>
-          <a:prstGeom prst="roundRect">
-            <a:avLst>
-              <a:gd name="adj" fmla="val 3556"/>
-            </a:avLst>
-          </a:prstGeom>
-          <a:solidFill>
-            <a:srgbClr val="E6F5F3"/>
-          </a:solidFill>
-          <a:ln/>
-        </p:spPr>
-      </p:sp>
-      <p:sp>
-        <p:nvSpPr>
-          <p:cNvPr id="24" name="Shape 22"/>
-          <p:cNvSpPr/>
-          <p:nvPr/>
-        </p:nvSpPr>
-        <p:spPr>
-          <a:xfrm>
-            <a:off x="9921240" y="2057400"/>
-            <a:ext cx="502920" cy="502920"/>
-          </a:xfrm>
-          <a:prstGeom prst="ellipse">
-            <a:avLst/>
-          </a:prstGeom>
-          <a:solidFill>
-            <a:schemeClr val="accent2"/>
-          </a:solidFill>
-          <a:ln/>
-        </p:spPr>
-      </p:sp>
-      <p:sp>
-        <p:nvSpPr>
-          <p:cNvPr id="25" name="Text 23"/>
-          <p:cNvSpPr txBox="1"/>
-          <p:nvPr/>
-        </p:nvSpPr>
-        <p:spPr>
-          <a:xfrm>
-            <a:off x="9921240" y="2057400"/>
-            <a:ext cx="502920" cy="502920"/>
-          </a:xfrm>
-          <a:prstGeom prst="rect">
-            <a:avLst/>
-          </a:prstGeom>
-          <a:noFill/>
-          <a:ln/>
-        </p:spPr>
-        <p:txBody>
-          <a:bodyPr wrap="square" lIns="0" tIns="0" rIns="0" bIns="0" rtlCol="0" anchor="ctr"/>
-          <a:lstStyle/>
-          <a:p>
-            <a:pPr algn="ctr" indent="0" marL="0">
-              <a:buNone/>
-            </a:pPr>
-            <a:r>
-              <a:rPr lang="en-US" sz="1600" b="1" dirty="0">
-                <a:solidFill>
-                  <a:schemeClr val="bg1"/>
-                </a:solidFill>
-              </a:rPr>
-              <a:t>5</a:t>
-            </a:r>
-            <a:endParaRPr lang="en-US" sz="1600" dirty="0"/>
-          </a:p>
-        </p:txBody>
-      </p:sp>
-      <p:sp>
-        <p:nvSpPr>
-          <p:cNvPr id="26" name="Text 24"/>
-          <p:cNvSpPr txBox="1"/>
-          <p:nvPr/>
-        </p:nvSpPr>
-        <p:spPr>
-          <a:xfrm>
-            <a:off x="9921240" y="2743200"/>
-            <a:ext cx="1691640" cy="411480"/>
-          </a:xfrm>
-          <a:prstGeom prst="rect">
-            <a:avLst/>
-          </a:prstGeom>
-          <a:noFill/>
-          <a:ln/>
-        </p:spPr>
-        <p:txBody>
-          <a:bodyPr wrap="square" lIns="0" tIns="0" rIns="0" bIns="0" rtlCol="0" anchor="ctr"/>
-          <a:lstStyle/>
-          <a:p>
-            <a:pPr indent="0" marL="0">
-              <a:buNone/>
-            </a:pPr>
-            <a:r>
-              <a:rPr lang="en-US" sz="1900" b="1" dirty="0">
-                <a:solidFill>
-                  <a:schemeClr val="tx1"/>
-                </a:solidFill>
-              </a:rPr>
-              <a:t>Expliquer</a:t>
-            </a:r>
-            <a:endParaRPr lang="en-US" sz="1900" dirty="0"/>
-          </a:p>
-        </p:txBody>
-      </p:sp>
-      <p:sp>
-        <p:nvSpPr>
-          <p:cNvPr id="27" name="Text 25"/>
-          <p:cNvSpPr txBox="1"/>
-          <p:nvPr/>
-        </p:nvSpPr>
-        <p:spPr>
-          <a:xfrm>
-            <a:off x="9921240" y="3200400"/>
-            <a:ext cx="1691640" cy="1371600"/>
-          </a:xfrm>
-          <a:prstGeom prst="rect">
-            <a:avLst/>
-          </a:prstGeom>
-          <a:noFill/>
-          <a:ln/>
-        </p:spPr>
-        <p:txBody>
-          <a:bodyPr wrap="square" lIns="0" tIns="0" rIns="0" bIns="0" rtlCol="0" anchor="ctr"/>
-          <a:lstStyle/>
-          <a:p>
-            <a:pPr indent="0" marL="0">
-              <a:buNone/>
-            </a:pPr>
-            <a:r>
-              <a:rPr lang="en-US" sz="1400" dirty="0">
-                <a:solidFill>
-                  <a:schemeClr val="tx2"/>
-                </a:solidFill>
-              </a:rPr>
-              <a:t>Démo contrefactuelle, LIME et SHAP</a:t>
-            </a:r>
-            <a:endParaRPr lang="en-US" sz="1400" dirty="0"/>
-          </a:p>
-        </p:txBody>
-      </p:sp>
-      <p:sp>
-        <p:nvSpPr>
-          <p:cNvPr id="28" name="Text 26"/>
-          <p:cNvSpPr txBox="1"/>
-          <p:nvPr/>
-        </p:nvSpPr>
-        <p:spPr>
-          <a:xfrm>
-            <a:off x="548640" y="5212080"/>
-            <a:ext cx="11064240" cy="548640"/>
-          </a:xfrm>
-          <a:prstGeom prst="rect">
-            <a:avLst/>
-          </a:prstGeom>
-          <a:noFill/>
-          <a:ln/>
-        </p:spPr>
-        <p:txBody>
-          <a:bodyPr wrap="square" lIns="0" tIns="0" rIns="0" bIns="0" rtlCol="0" anchor="ctr"/>
-          <a:lstStyle/>
-          <a:p>
-            <a:pPr indent="0" marL="0">
-              <a:buNone/>
-            </a:pPr>
-            <a:r>
-              <a:rPr lang="en-US" sz="1600" i="1" dirty="0">
-                <a:solidFill>
-                  <a:schemeClr val="accent2"/>
-                </a:solidFill>
-              </a:rPr>
-              <a:t>Red teaming éthique : on teste le modèle en ne changeant que le sexe et l'origine d'un même dossier.</a:t>
-            </a:r>
-            <a:endParaRPr lang="en-US" sz="1600" dirty="0"/>
           </a:p>
         </p:txBody>
       </p:sp>
@@ -8276,8 +8537,8 @@
         </p:nvSpPr>
         <p:spPr>
           <a:xfrm>
-            <a:off x="548640" y="320040"/>
-            <a:ext cx="11064240" cy="822960"/>
+            <a:off x="548640" y="274320"/>
+            <a:ext cx="11064240" cy="914400"/>
           </a:xfrm>
           <a:prstGeom prst="rect">
             <a:avLst/>
@@ -8293,7 +8554,7 @@
               <a:buNone/>
             </a:pPr>
             <a:r>
-              <a:rPr lang="en-US" sz="3200" b="1" dirty="0">
+              <a:rPr lang="en-US" sz="3600" b="1" dirty="0">
                 <a:solidFill>
                   <a:schemeClr val="tx1"/>
                 </a:solidFill>
@@ -8301,22 +8562,100 @@
                 <a:ea typeface="Cambria" pitchFamily="34" charset="-122"/>
                 <a:cs typeface="Cambria" pitchFamily="34" charset="-120"/>
               </a:rPr>
-              <a:t>Repondérer pour casser le lien entre groupe et cible</a:t>
-            </a:r>
-            <a:endParaRPr lang="en-US" sz="3200" dirty="0"/>
-          </a:p>
-        </p:txBody>
-      </p:sp>
-      <p:sp>
-        <p:nvSpPr>
-          <p:cNvPr id="3" name="Text 1"/>
+              <a:t>Une démarche éthique dès la conception</a:t>
+            </a:r>
+            <a:endParaRPr lang="en-US" sz="3600" dirty="0"/>
+          </a:p>
+        </p:txBody>
+      </p:sp>
+      <p:sp>
+        <p:nvSpPr>
+          <p:cNvPr id="3" name="etape-1"/>
+          <p:cNvSpPr/>
+          <p:nvPr/>
+        </p:nvSpPr>
+        <p:spPr>
+          <a:xfrm>
+            <a:off x="548640" y="1828800"/>
+            <a:ext cx="2057400" cy="2926080"/>
+          </a:xfrm>
+          <a:prstGeom prst="roundRect">
+            <a:avLst>
+              <a:gd name="adj" fmla="val 3556"/>
+            </a:avLst>
+          </a:prstGeom>
+          <a:solidFill>
+            <a:srgbClr val="E6F5F3"/>
+          </a:solidFill>
+          <a:ln/>
+        </p:spPr>
+      </p:sp>
+      <p:sp>
+        <p:nvSpPr>
+          <p:cNvPr id="4" name="Shape 2"/>
+          <p:cNvSpPr/>
+          <p:nvPr/>
+        </p:nvSpPr>
+        <p:spPr>
+          <a:xfrm>
+            <a:off x="777240" y="2057400"/>
+            <a:ext cx="502920" cy="502920"/>
+          </a:xfrm>
+          <a:prstGeom prst="ellipse">
+            <a:avLst/>
+          </a:prstGeom>
+          <a:solidFill>
+            <a:schemeClr val="accent2"/>
+          </a:solidFill>
+          <a:ln/>
+        </p:spPr>
+      </p:sp>
+      <p:sp>
+        <p:nvSpPr>
+          <p:cNvPr id="5" name="Text 3"/>
           <p:cNvSpPr txBox="1"/>
           <p:nvPr/>
         </p:nvSpPr>
         <p:spPr>
           <a:xfrm>
-            <a:off x="548640" y="1463040"/>
-            <a:ext cx="5486400" cy="365760"/>
+            <a:off x="777240" y="2057400"/>
+            <a:ext cx="502920" cy="502920"/>
+          </a:xfrm>
+          <a:prstGeom prst="rect">
+            <a:avLst/>
+          </a:prstGeom>
+          <a:noFill/>
+          <a:ln/>
+        </p:spPr>
+        <p:txBody>
+          <a:bodyPr wrap="square" lIns="0" tIns="0" rIns="0" bIns="0" rtlCol="0" anchor="ctr"/>
+          <a:lstStyle/>
+          <a:p>
+            <a:pPr algn="ctr" indent="0" marL="0">
+              <a:buNone/>
+            </a:pPr>
+            <a:r>
+              <a:rPr lang="en-US" sz="1600" b="1" dirty="0">
+                <a:solidFill>
+                  <a:schemeClr val="bg1"/>
+                </a:solidFill>
+              </a:rPr>
+              <a:t>1</a:t>
+            </a:r>
+            <a:endParaRPr lang="en-US" sz="1600" dirty="0"/>
+          </a:p>
+        </p:txBody>
+      </p:sp>
+      <p:sp>
+        <p:nvSpPr>
+          <p:cNvPr id="6" name="Text 4"/>
+          <p:cNvSpPr txBox="1"/>
+          <p:nvPr/>
+        </p:nvSpPr>
+        <p:spPr>
+          <a:xfrm>
+            <a:off x="777240" y="2743200"/>
+            <a:ext cx="1691640" cy="411480"/>
           </a:xfrm>
           <a:prstGeom prst="rect">
             <a:avLst/>
@@ -8332,49 +8671,105 @@
               <a:buNone/>
             </a:pPr>
             <a:r>
-              <a:rPr lang="en-US" sz="1800" b="1" dirty="0">
+              <a:rPr lang="en-US" sz="1900" b="1" dirty="0">
                 <a:solidFill>
                   <a:schemeClr val="tx1"/>
                 </a:solidFill>
               </a:rPr>
-              <a:t>Poids d'un exemple</a:t>
-            </a:r>
-            <a:endParaRPr lang="en-US" sz="1800" dirty="0"/>
-          </a:p>
-        </p:txBody>
-      </p:sp>
-      <p:sp>
-        <p:nvSpPr>
-          <p:cNvPr id="4" name="formule"/>
+              <a:t>Auditer</a:t>
+            </a:r>
+            <a:endParaRPr lang="en-US" sz="1900" dirty="0"/>
+          </a:p>
+        </p:txBody>
+      </p:sp>
+      <p:sp>
+        <p:nvSpPr>
+          <p:cNvPr id="7" name="Text 5"/>
+          <p:cNvSpPr txBox="1"/>
+          <p:nvPr/>
+        </p:nvSpPr>
+        <p:spPr>
+          <a:xfrm>
+            <a:off x="777240" y="3200400"/>
+            <a:ext cx="1691640" cy="1371600"/>
+          </a:xfrm>
+          <a:prstGeom prst="rect">
+            <a:avLst/>
+          </a:prstGeom>
+          <a:noFill/>
+          <a:ln/>
+        </p:spPr>
+        <p:txBody>
+          <a:bodyPr wrap="square" lIns="0" tIns="0" rIns="0" bIns="0" rtlCol="0" anchor="ctr"/>
+          <a:lstStyle/>
+          <a:p>
+            <a:pPr indent="0" marL="0">
+              <a:buNone/>
+            </a:pPr>
+            <a:r>
+              <a:rPr lang="en-US" sz="1400" dirty="0">
+                <a:solidFill>
+                  <a:schemeClr val="tx2"/>
+                </a:solidFill>
+              </a:rPr>
+              <a:t>Taux de &gt;50K par sexe, origine et sexe × origine</a:t>
+            </a:r>
+            <a:endParaRPr lang="en-US" sz="1400" dirty="0"/>
+          </a:p>
+        </p:txBody>
+      </p:sp>
+      <p:sp>
+        <p:nvSpPr>
+          <p:cNvPr id="8" name="etape-2"/>
           <p:cNvSpPr/>
           <p:nvPr/>
         </p:nvSpPr>
         <p:spPr>
           <a:xfrm>
-            <a:off x="548640" y="1920240"/>
-            <a:ext cx="5486400" cy="1005840"/>
+            <a:off x="2834640" y="1828800"/>
+            <a:ext cx="2057400" cy="2926080"/>
           </a:xfrm>
           <a:prstGeom prst="roundRect">
             <a:avLst>
-              <a:gd name="adj" fmla="val 7273"/>
+              <a:gd name="adj" fmla="val 3556"/>
             </a:avLst>
           </a:prstGeom>
           <a:solidFill>
-            <a:schemeClr val="tx1"/>
+            <a:schemeClr val="bg2"/>
           </a:solidFill>
           <a:ln/>
         </p:spPr>
       </p:sp>
       <p:sp>
         <p:nvSpPr>
-          <p:cNvPr id="5" name="Text 3"/>
+          <p:cNvPr id="9" name="Shape 7"/>
+          <p:cNvSpPr/>
+          <p:nvPr/>
+        </p:nvSpPr>
+        <p:spPr>
+          <a:xfrm>
+            <a:off x="3063240" y="2057400"/>
+            <a:ext cx="502920" cy="502920"/>
+          </a:xfrm>
+          <a:prstGeom prst="ellipse">
+            <a:avLst/>
+          </a:prstGeom>
+          <a:solidFill>
+            <a:schemeClr val="accent3"/>
+          </a:solidFill>
+          <a:ln/>
+        </p:spPr>
+      </p:sp>
+      <p:sp>
+        <p:nvSpPr>
+          <p:cNvPr id="10" name="Text 8"/>
           <p:cNvSpPr txBox="1"/>
           <p:nvPr/>
         </p:nvSpPr>
         <p:spPr>
           <a:xfrm>
-            <a:off x="731520" y="1920240"/>
-            <a:ext cx="5120640" cy="1005840"/>
+            <a:off x="3063240" y="2057400"/>
+            <a:ext cx="502920" cy="502920"/>
           </a:xfrm>
           <a:prstGeom prst="rect">
             <a:avLst/>
@@ -8390,30 +8785,27 @@
               <a:buNone/>
             </a:pPr>
             <a:r>
-              <a:rPr lang="en-US" sz="2000" dirty="0">
+              <a:rPr lang="en-US" sz="1600" b="1" dirty="0">
                 <a:solidFill>
                   <a:schemeClr val="bg1"/>
                 </a:solidFill>
-                <a:latin typeface="Cambria" pitchFamily="34" charset="0"/>
-                <a:ea typeface="Cambria" pitchFamily="34" charset="-122"/>
-                <a:cs typeface="Cambria" pitchFamily="34" charset="-120"/>
-              </a:rPr>
-              <a:t>w = P(groupe) × P(cible) / P(groupe, cible)</a:t>
-            </a:r>
-            <a:endParaRPr lang="en-US" sz="2000" dirty="0"/>
-          </a:p>
-        </p:txBody>
-      </p:sp>
-      <p:sp>
-        <p:nvSpPr>
-          <p:cNvPr id="6" name="Text 4"/>
+              </a:rPr>
+              <a:t>2</a:t>
+            </a:r>
+            <a:endParaRPr lang="en-US" sz="1600" dirty="0"/>
+          </a:p>
+        </p:txBody>
+      </p:sp>
+      <p:sp>
+        <p:nvSpPr>
+          <p:cNvPr id="11" name="Text 9"/>
           <p:cNvSpPr txBox="1"/>
           <p:nvPr/>
         </p:nvSpPr>
         <p:spPr>
           <a:xfrm>
-            <a:off x="548640" y="3200400"/>
-            <a:ext cx="5486400" cy="2377440"/>
+            <a:off x="3063240" y="2743200"/>
+            <a:ext cx="1691640" cy="411480"/>
           </a:xfrm>
           <a:prstGeom prst="rect">
             <a:avLst/>
@@ -8425,95 +8817,543 @@
           <a:bodyPr wrap="square" lIns="0" tIns="0" rIns="0" bIns="0" rtlCol="0" anchor="ctr"/>
           <a:lstStyle/>
           <a:p>
-            <a:pPr marL="342900" indent="-342900">
-              <a:spcAft>
-                <a:spcPts val="800"/>
-              </a:spcAft>
-              <a:buSzPct val="100000"/>
-              <a:buChar char="•"/>
-            </a:pPr>
-            <a:r>
-              <a:rPr lang="en-US" sz="1500" dirty="0">
+            <a:pPr indent="0" marL="0">
+              <a:buNone/>
+            </a:pPr>
+            <a:r>
+              <a:rPr lang="en-US" sz="1900" b="1" dirty="0">
+                <a:solidFill>
+                  <a:schemeClr val="tx1"/>
+                </a:solidFill>
+              </a:rPr>
+              <a:t>Corriger</a:t>
+            </a:r>
+            <a:endParaRPr lang="en-US" sz="1900" dirty="0"/>
+          </a:p>
+        </p:txBody>
+      </p:sp>
+      <p:sp>
+        <p:nvSpPr>
+          <p:cNvPr id="12" name="Text 10"/>
+          <p:cNvSpPr txBox="1"/>
+          <p:nvPr/>
+        </p:nvSpPr>
+        <p:spPr>
+          <a:xfrm>
+            <a:off x="3063240" y="3200400"/>
+            <a:ext cx="1691640" cy="1371600"/>
+          </a:xfrm>
+          <a:prstGeom prst="rect">
+            <a:avLst/>
+          </a:prstGeom>
+          <a:noFill/>
+          <a:ln/>
+        </p:spPr>
+        <p:txBody>
+          <a:bodyPr wrap="square" lIns="0" tIns="0" rIns="0" bIns="0" rtlCol="0" anchor="ctr"/>
+          <a:lstStyle/>
+          <a:p>
+            <a:pPr indent="0" marL="0">
+              <a:buNone/>
+            </a:pPr>
+            <a:r>
+              <a:rPr lang="en-US" sz="1400" dirty="0">
                 <a:solidFill>
                   <a:schemeClr val="tx2"/>
                 </a:solidFill>
               </a:rPr>
-              <a:t>Les exemples rares (femme noire à &gt;50K) pèsent plus, les fréquents moins</a:t>
-            </a:r>
-            <a:endParaRPr lang="en-US" sz="1500" dirty="0"/>
-          </a:p>
-          <a:p>
-            <a:pPr marL="342900" indent="-342900">
-              <a:spcAft>
-                <a:spcPts val="800"/>
-              </a:spcAft>
-              <a:buSzPct val="100000"/>
-              <a:buChar char="•"/>
-            </a:pPr>
-            <a:r>
-              <a:rPr lang="en-US" sz="1500" dirty="0">
+              <a:t>Repondération Kamiran–Calders sur sexe × origine</a:t>
+            </a:r>
+            <a:endParaRPr lang="en-US" sz="1400" dirty="0"/>
+          </a:p>
+        </p:txBody>
+      </p:sp>
+      <p:sp>
+        <p:nvSpPr>
+          <p:cNvPr id="13" name="etape-3"/>
+          <p:cNvSpPr/>
+          <p:nvPr/>
+        </p:nvSpPr>
+        <p:spPr>
+          <a:xfrm>
+            <a:off x="5120640" y="1828800"/>
+            <a:ext cx="2057400" cy="2926080"/>
+          </a:xfrm>
+          <a:prstGeom prst="roundRect">
+            <a:avLst>
+              <a:gd name="adj" fmla="val 3556"/>
+            </a:avLst>
+          </a:prstGeom>
+          <a:solidFill>
+            <a:srgbClr val="E6F5F3"/>
+          </a:solidFill>
+          <a:ln/>
+        </p:spPr>
+      </p:sp>
+      <p:sp>
+        <p:nvSpPr>
+          <p:cNvPr id="14" name="Shape 12"/>
+          <p:cNvSpPr/>
+          <p:nvPr/>
+        </p:nvSpPr>
+        <p:spPr>
+          <a:xfrm>
+            <a:off x="5349240" y="2057400"/>
+            <a:ext cx="502920" cy="502920"/>
+          </a:xfrm>
+          <a:prstGeom prst="ellipse">
+            <a:avLst/>
+          </a:prstGeom>
+          <a:solidFill>
+            <a:schemeClr val="accent2"/>
+          </a:solidFill>
+          <a:ln/>
+        </p:spPr>
+      </p:sp>
+      <p:sp>
+        <p:nvSpPr>
+          <p:cNvPr id="15" name="Text 13"/>
+          <p:cNvSpPr txBox="1"/>
+          <p:nvPr/>
+        </p:nvSpPr>
+        <p:spPr>
+          <a:xfrm>
+            <a:off x="5349240" y="2057400"/>
+            <a:ext cx="502920" cy="502920"/>
+          </a:xfrm>
+          <a:prstGeom prst="rect">
+            <a:avLst/>
+          </a:prstGeom>
+          <a:noFill/>
+          <a:ln/>
+        </p:spPr>
+        <p:txBody>
+          <a:bodyPr wrap="square" lIns="0" tIns="0" rIns="0" bIns="0" rtlCol="0" anchor="ctr"/>
+          <a:lstStyle/>
+          <a:p>
+            <a:pPr algn="ctr" indent="0" marL="0">
+              <a:buNone/>
+            </a:pPr>
+            <a:r>
+              <a:rPr lang="en-US" sz="1600" b="1" dirty="0">
+                <a:solidFill>
+                  <a:schemeClr val="bg1"/>
+                </a:solidFill>
+              </a:rPr>
+              <a:t>3</a:t>
+            </a:r>
+            <a:endParaRPr lang="en-US" sz="1600" dirty="0"/>
+          </a:p>
+        </p:txBody>
+      </p:sp>
+      <p:sp>
+        <p:nvSpPr>
+          <p:cNvPr id="16" name="Text 14"/>
+          <p:cNvSpPr txBox="1"/>
+          <p:nvPr/>
+        </p:nvSpPr>
+        <p:spPr>
+          <a:xfrm>
+            <a:off x="5349240" y="2743200"/>
+            <a:ext cx="1691640" cy="411480"/>
+          </a:xfrm>
+          <a:prstGeom prst="rect">
+            <a:avLst/>
+          </a:prstGeom>
+          <a:noFill/>
+          <a:ln/>
+        </p:spPr>
+        <p:txBody>
+          <a:bodyPr wrap="square" lIns="0" tIns="0" rIns="0" bIns="0" rtlCol="0" anchor="ctr"/>
+          <a:lstStyle/>
+          <a:p>
+            <a:pPr indent="0" marL="0">
+              <a:buNone/>
+            </a:pPr>
+            <a:r>
+              <a:rPr lang="en-US" sz="1900" b="1" dirty="0">
+                <a:solidFill>
+                  <a:schemeClr val="tx1"/>
+                </a:solidFill>
+              </a:rPr>
+              <a:t>Adapter</a:t>
+            </a:r>
+            <a:endParaRPr lang="en-US" sz="1900" dirty="0"/>
+          </a:p>
+        </p:txBody>
+      </p:sp>
+      <p:sp>
+        <p:nvSpPr>
+          <p:cNvPr id="17" name="Text 15"/>
+          <p:cNvSpPr txBox="1"/>
+          <p:nvPr/>
+        </p:nvSpPr>
+        <p:spPr>
+          <a:xfrm>
+            <a:off x="5349240" y="3200400"/>
+            <a:ext cx="1691640" cy="1371600"/>
+          </a:xfrm>
+          <a:prstGeom prst="rect">
+            <a:avLst/>
+          </a:prstGeom>
+          <a:noFill/>
+          <a:ln/>
+        </p:spPr>
+        <p:txBody>
+          <a:bodyPr wrap="square" lIns="0" tIns="0" rIns="0" bIns="0" rtlCol="0" anchor="ctr"/>
+          <a:lstStyle/>
+          <a:p>
+            <a:pPr indent="0" marL="0">
+              <a:buNone/>
+            </a:pPr>
+            <a:r>
+              <a:rPr lang="en-US" sz="1400" dirty="0">
                 <a:solidFill>
                   <a:schemeClr val="tx2"/>
                 </a:solidFill>
               </a:rPr>
-              <a:t>Calculé sur le train uniquement, sur le croisement sexe × origine</a:t>
-            </a:r>
-            <a:endParaRPr lang="en-US" sz="1500" dirty="0"/>
-          </a:p>
-          <a:p>
-            <a:pPr marL="342900" indent="-342900">
-              <a:spcAft>
-                <a:spcPts val="800"/>
-              </a:spcAft>
-              <a:buSzPct val="100000"/>
-              <a:buChar char="•"/>
-            </a:pPr>
-            <a:r>
-              <a:rPr lang="en-US" sz="1500" dirty="0">
+              <a:t>Fine-tuning complet, LoRA, distillation</a:t>
+            </a:r>
+            <a:endParaRPr lang="en-US" sz="1400" dirty="0"/>
+          </a:p>
+        </p:txBody>
+      </p:sp>
+      <p:sp>
+        <p:nvSpPr>
+          <p:cNvPr id="18" name="etape-4"/>
+          <p:cNvSpPr/>
+          <p:nvPr/>
+        </p:nvSpPr>
+        <p:spPr>
+          <a:xfrm>
+            <a:off x="7406640" y="1828800"/>
+            <a:ext cx="2057400" cy="2926080"/>
+          </a:xfrm>
+          <a:prstGeom prst="roundRect">
+            <a:avLst>
+              <a:gd name="adj" fmla="val 3556"/>
+            </a:avLst>
+          </a:prstGeom>
+          <a:solidFill>
+            <a:schemeClr val="bg2"/>
+          </a:solidFill>
+          <a:ln/>
+        </p:spPr>
+      </p:sp>
+      <p:sp>
+        <p:nvSpPr>
+          <p:cNvPr id="19" name="Shape 17"/>
+          <p:cNvSpPr/>
+          <p:nvPr/>
+        </p:nvSpPr>
+        <p:spPr>
+          <a:xfrm>
+            <a:off x="7635240" y="2057400"/>
+            <a:ext cx="502920" cy="502920"/>
+          </a:xfrm>
+          <a:prstGeom prst="ellipse">
+            <a:avLst/>
+          </a:prstGeom>
+          <a:solidFill>
+            <a:schemeClr val="accent2"/>
+          </a:solidFill>
+          <a:ln/>
+        </p:spPr>
+      </p:sp>
+      <p:sp>
+        <p:nvSpPr>
+          <p:cNvPr id="20" name="Text 18"/>
+          <p:cNvSpPr txBox="1"/>
+          <p:nvPr/>
+        </p:nvSpPr>
+        <p:spPr>
+          <a:xfrm>
+            <a:off x="7635240" y="2057400"/>
+            <a:ext cx="502920" cy="502920"/>
+          </a:xfrm>
+          <a:prstGeom prst="rect">
+            <a:avLst/>
+          </a:prstGeom>
+          <a:noFill/>
+          <a:ln/>
+        </p:spPr>
+        <p:txBody>
+          <a:bodyPr wrap="square" lIns="0" tIns="0" rIns="0" bIns="0" rtlCol="0" anchor="ctr"/>
+          <a:lstStyle/>
+          <a:p>
+            <a:pPr algn="ctr" indent="0" marL="0">
+              <a:buNone/>
+            </a:pPr>
+            <a:r>
+              <a:rPr lang="en-US" sz="1600" b="1" dirty="0">
+                <a:solidFill>
+                  <a:schemeClr val="bg1"/>
+                </a:solidFill>
+              </a:rPr>
+              <a:t>4</a:t>
+            </a:r>
+            <a:endParaRPr lang="en-US" sz="1600" dirty="0"/>
+          </a:p>
+        </p:txBody>
+      </p:sp>
+      <p:sp>
+        <p:nvSpPr>
+          <p:cNvPr id="21" name="Text 19"/>
+          <p:cNvSpPr txBox="1"/>
+          <p:nvPr/>
+        </p:nvSpPr>
+        <p:spPr>
+          <a:xfrm>
+            <a:off x="7635240" y="2743200"/>
+            <a:ext cx="1691640" cy="411480"/>
+          </a:xfrm>
+          <a:prstGeom prst="rect">
+            <a:avLst/>
+          </a:prstGeom>
+          <a:noFill/>
+          <a:ln/>
+        </p:spPr>
+        <p:txBody>
+          <a:bodyPr wrap="square" lIns="0" tIns="0" rIns="0" bIns="0" rtlCol="0" anchor="ctr"/>
+          <a:lstStyle/>
+          <a:p>
+            <a:pPr indent="0" marL="0">
+              <a:buNone/>
+            </a:pPr>
+            <a:r>
+              <a:rPr lang="en-US" sz="1900" b="1" dirty="0">
+                <a:solidFill>
+                  <a:schemeClr val="tx1"/>
+                </a:solidFill>
+              </a:rPr>
+              <a:t>Choisir</a:t>
+            </a:r>
+            <a:endParaRPr lang="en-US" sz="1900" dirty="0"/>
+          </a:p>
+        </p:txBody>
+      </p:sp>
+      <p:sp>
+        <p:nvSpPr>
+          <p:cNvPr id="22" name="Text 20"/>
+          <p:cNvSpPr txBox="1"/>
+          <p:nvPr/>
+        </p:nvSpPr>
+        <p:spPr>
+          <a:xfrm>
+            <a:off x="7635240" y="3200400"/>
+            <a:ext cx="1691640" cy="1371600"/>
+          </a:xfrm>
+          <a:prstGeom prst="rect">
+            <a:avLst/>
+          </a:prstGeom>
+          <a:noFill/>
+          <a:ln/>
+        </p:spPr>
+        <p:txBody>
+          <a:bodyPr wrap="square" lIns="0" tIns="0" rIns="0" bIns="0" rtlCol="0" anchor="ctr"/>
+          <a:lstStyle/>
+          <a:p>
+            <a:pPr indent="0" marL="0">
+              <a:buNone/>
+            </a:pPr>
+            <a:r>
+              <a:rPr lang="en-US" sz="1400" dirty="0">
                 <a:solidFill>
                   <a:schemeClr val="tx2"/>
                 </a:solidFill>
               </a:rPr>
-              <a:t>Poids bornés entre 0,5 et 3 pour la stabilité</a:t>
-            </a:r>
-            <a:endParaRPr lang="en-US" sz="1500" dirty="0"/>
-          </a:p>
-          <a:p>
-            <a:pPr marL="342900" indent="-342900">
-              <a:spcAft>
-                <a:spcPts val="800"/>
-              </a:spcAft>
-              <a:buSzPct val="100000"/>
-              <a:buChar char="•"/>
-            </a:pPr>
-            <a:r>
-              <a:rPr lang="en-US" sz="1500" dirty="0">
+              <a:t>Critère explicite : équité, performance, sobriété</a:t>
+            </a:r>
+            <a:endParaRPr lang="en-US" sz="1400" dirty="0"/>
+          </a:p>
+        </p:txBody>
+      </p:sp>
+      <p:sp>
+        <p:nvSpPr>
+          <p:cNvPr id="23" name="etape-5"/>
+          <p:cNvSpPr/>
+          <p:nvPr/>
+        </p:nvSpPr>
+        <p:spPr>
+          <a:xfrm>
+            <a:off x="9692640" y="1828800"/>
+            <a:ext cx="2057400" cy="2926080"/>
+          </a:xfrm>
+          <a:prstGeom prst="roundRect">
+            <a:avLst>
+              <a:gd name="adj" fmla="val 3556"/>
+            </a:avLst>
+          </a:prstGeom>
+          <a:solidFill>
+            <a:srgbClr val="E6F5F3"/>
+          </a:solidFill>
+          <a:ln/>
+        </p:spPr>
+      </p:sp>
+      <p:sp>
+        <p:nvSpPr>
+          <p:cNvPr id="24" name="Shape 22"/>
+          <p:cNvSpPr/>
+          <p:nvPr/>
+        </p:nvSpPr>
+        <p:spPr>
+          <a:xfrm>
+            <a:off x="9921240" y="2057400"/>
+            <a:ext cx="502920" cy="502920"/>
+          </a:xfrm>
+          <a:prstGeom prst="ellipse">
+            <a:avLst/>
+          </a:prstGeom>
+          <a:solidFill>
+            <a:schemeClr val="accent2"/>
+          </a:solidFill>
+          <a:ln/>
+        </p:spPr>
+      </p:sp>
+      <p:sp>
+        <p:nvSpPr>
+          <p:cNvPr id="25" name="Text 23"/>
+          <p:cNvSpPr txBox="1"/>
+          <p:nvPr/>
+        </p:nvSpPr>
+        <p:spPr>
+          <a:xfrm>
+            <a:off x="9921240" y="2057400"/>
+            <a:ext cx="502920" cy="502920"/>
+          </a:xfrm>
+          <a:prstGeom prst="rect">
+            <a:avLst/>
+          </a:prstGeom>
+          <a:noFill/>
+          <a:ln/>
+        </p:spPr>
+        <p:txBody>
+          <a:bodyPr wrap="square" lIns="0" tIns="0" rIns="0" bIns="0" rtlCol="0" anchor="ctr"/>
+          <a:lstStyle/>
+          <a:p>
+            <a:pPr algn="ctr" indent="0" marL="0">
+              <a:buNone/>
+            </a:pPr>
+            <a:r>
+              <a:rPr lang="en-US" sz="1600" b="1" dirty="0">
+                <a:solidFill>
+                  <a:schemeClr val="bg1"/>
+                </a:solidFill>
+              </a:rPr>
+              <a:t>5</a:t>
+            </a:r>
+            <a:endParaRPr lang="en-US" sz="1600" dirty="0"/>
+          </a:p>
+        </p:txBody>
+      </p:sp>
+      <p:sp>
+        <p:nvSpPr>
+          <p:cNvPr id="26" name="Text 24"/>
+          <p:cNvSpPr txBox="1"/>
+          <p:nvPr/>
+        </p:nvSpPr>
+        <p:spPr>
+          <a:xfrm>
+            <a:off x="9921240" y="2743200"/>
+            <a:ext cx="1691640" cy="411480"/>
+          </a:xfrm>
+          <a:prstGeom prst="rect">
+            <a:avLst/>
+          </a:prstGeom>
+          <a:noFill/>
+          <a:ln/>
+        </p:spPr>
+        <p:txBody>
+          <a:bodyPr wrap="square" lIns="0" tIns="0" rIns="0" bIns="0" rtlCol="0" anchor="ctr"/>
+          <a:lstStyle/>
+          <a:p>
+            <a:pPr indent="0" marL="0">
+              <a:buNone/>
+            </a:pPr>
+            <a:r>
+              <a:rPr lang="en-US" sz="1900" b="1" dirty="0">
+                <a:solidFill>
+                  <a:schemeClr val="tx1"/>
+                </a:solidFill>
+              </a:rPr>
+              <a:t>Expliquer</a:t>
+            </a:r>
+            <a:endParaRPr lang="en-US" sz="1900" dirty="0"/>
+          </a:p>
+        </p:txBody>
+      </p:sp>
+      <p:sp>
+        <p:nvSpPr>
+          <p:cNvPr id="27" name="Text 25"/>
+          <p:cNvSpPr txBox="1"/>
+          <p:nvPr/>
+        </p:nvSpPr>
+        <p:spPr>
+          <a:xfrm>
+            <a:off x="9921240" y="3200400"/>
+            <a:ext cx="1691640" cy="1371600"/>
+          </a:xfrm>
+          <a:prstGeom prst="rect">
+            <a:avLst/>
+          </a:prstGeom>
+          <a:noFill/>
+          <a:ln/>
+        </p:spPr>
+        <p:txBody>
+          <a:bodyPr wrap="square" lIns="0" tIns="0" rIns="0" bIns="0" rtlCol="0" anchor="ctr"/>
+          <a:lstStyle/>
+          <a:p>
+            <a:pPr indent="0" marL="0">
+              <a:buNone/>
+            </a:pPr>
+            <a:r>
+              <a:rPr lang="en-US" sz="1400" dirty="0">
                 <a:solidFill>
                   <a:schemeClr val="tx2"/>
                 </a:solidFill>
               </a:rPr>
-              <a:t>Variante : retirer sexe et origine du texte (« sans attributs »)</a:t>
-            </a:r>
-            <a:endParaRPr lang="en-US" sz="1500" dirty="0"/>
-          </a:p>
-        </p:txBody>
-      </p:sp>
-      <p:graphicFrame>
-        <p:nvGraphicFramePr>
-          <p:cNvPr id="7" name="Chart 0" descr=""/>
-          <p:cNvGraphicFramePr/>
-          <p:nvPr/>
-        </p:nvGraphicFramePr>
-        <p:xfrm>
-          <a:off x="6400800" y="1371600"/>
-          <a:ext cx="5212080" cy="4480560"/>
-        </p:xfrm>
-        <a:graphic xmlns:a="http://schemas.openxmlformats.org/drawingml/2006/main">
-          <a:graphicData uri="http://schemas.openxmlformats.org/drawingml/2006/chart">
-            <c:chart xmlns:c="http://schemas.openxmlformats.org/drawingml/2006/chart" r:id="rId1"/>
-          </a:graphicData>
-        </a:graphic>
-      </p:graphicFrame>
+              <a:t>Démo contrefactuelle, LIME et SHAP</a:t>
+            </a:r>
+            <a:endParaRPr lang="en-US" sz="1400" dirty="0"/>
+          </a:p>
+        </p:txBody>
+      </p:sp>
+      <p:sp>
+        <p:nvSpPr>
+          <p:cNvPr id="28" name="Text 26"/>
+          <p:cNvSpPr txBox="1"/>
+          <p:nvPr/>
+        </p:nvSpPr>
+        <p:spPr>
+          <a:xfrm>
+            <a:off x="548640" y="5212080"/>
+            <a:ext cx="11064240" cy="548640"/>
+          </a:xfrm>
+          <a:prstGeom prst="rect">
+            <a:avLst/>
+          </a:prstGeom>
+          <a:noFill/>
+          <a:ln/>
+        </p:spPr>
+        <p:txBody>
+          <a:bodyPr wrap="square" lIns="0" tIns="0" rIns="0" bIns="0" rtlCol="0" anchor="ctr"/>
+          <a:lstStyle/>
+          <a:p>
+            <a:pPr indent="0" marL="0">
+              <a:buNone/>
+            </a:pPr>
+            <a:r>
+              <a:rPr lang="en-US" sz="1600" i="1" dirty="0">
+                <a:solidFill>
+                  <a:schemeClr val="accent2"/>
+                </a:solidFill>
+              </a:rPr>
+              <a:t>Red teaming éthique : on teste le modèle en ne changeant que le sexe et l'origine d'un même dossier.</a:t>
+            </a:r>
+            <a:endParaRPr lang="en-US" sz="1600" dirty="0"/>
+          </a:p>
+        </p:txBody>
+      </p:sp>
       <p:sp>
         <p:nvSpPr>
           <p:cNvPr id="25" name="Slide Number Placeholder 0"/>
@@ -8594,8 +9434,8 @@
         </p:nvSpPr>
         <p:spPr>
           <a:xfrm>
-            <a:off x="548640" y="320040"/>
-            <a:ext cx="11064240" cy="822960"/>
+            <a:off x="548640" y="274320"/>
+            <a:ext cx="11064240" cy="914400"/>
           </a:xfrm>
           <a:prstGeom prst="rect">
             <a:avLst/>
@@ -8611,7 +9451,7 @@
               <a:buNone/>
             </a:pPr>
             <a:r>
-              <a:rPr lang="en-US" sz="3200" b="1" dirty="0">
+              <a:rPr lang="en-US" sz="3600" b="1" dirty="0">
                 <a:solidFill>
                   <a:schemeClr val="tx1"/>
                 </a:solidFill>
@@ -8619,69 +9459,69 @@
                 <a:ea typeface="Cambria" pitchFamily="34" charset="-122"/>
                 <a:cs typeface="Cambria" pitchFamily="34" charset="-120"/>
               </a:rPr>
-              <a:t>Trois façons d'adapter DistilBERT</a:t>
-            </a:r>
-            <a:endParaRPr lang="en-US" sz="3200" dirty="0"/>
-          </a:p>
-        </p:txBody>
-      </p:sp>
-      <p:sp>
-        <p:nvSpPr>
-          <p:cNvPr id="3" name="methode-1"/>
+              <a:t>Repondérer pour casser le lien entre groupe et cible</a:t>
+            </a:r>
+            <a:endParaRPr lang="en-US" sz="3600" dirty="0"/>
+          </a:p>
+        </p:txBody>
+      </p:sp>
+      <p:sp>
+        <p:nvSpPr>
+          <p:cNvPr id="3" name="Text 1"/>
+          <p:cNvSpPr txBox="1"/>
+          <p:nvPr/>
+        </p:nvSpPr>
+        <p:spPr>
+          <a:xfrm>
+            <a:off x="548640" y="1463040"/>
+            <a:ext cx="5486400" cy="365760"/>
+          </a:xfrm>
+          <a:prstGeom prst="rect">
+            <a:avLst/>
+          </a:prstGeom>
+          <a:noFill/>
+          <a:ln/>
+        </p:spPr>
+        <p:txBody>
+          <a:bodyPr wrap="square" lIns="0" tIns="0" rIns="0" bIns="0" rtlCol="0" anchor="ctr"/>
+          <a:lstStyle/>
+          <a:p>
+            <a:pPr indent="0" marL="0">
+              <a:buNone/>
+            </a:pPr>
+            <a:r>
+              <a:rPr lang="en-US" sz="1800" b="1" dirty="0">
+                <a:solidFill>
+                  <a:schemeClr val="tx1"/>
+                </a:solidFill>
+              </a:rPr>
+              <a:t>Poids d'un exemple</a:t>
+            </a:r>
+            <a:endParaRPr lang="en-US" sz="1800" dirty="0"/>
+          </a:p>
+        </p:txBody>
+      </p:sp>
+      <p:sp>
+        <p:nvSpPr>
+          <p:cNvPr id="4" name="formule"/>
           <p:cNvSpPr/>
           <p:nvPr/>
         </p:nvSpPr>
         <p:spPr>
           <a:xfrm>
-            <a:off x="548640" y="1463040"/>
-            <a:ext cx="3474720" cy="4480560"/>
+            <a:off x="548640" y="1920240"/>
+            <a:ext cx="5486400" cy="1005840"/>
           </a:xfrm>
           <a:prstGeom prst="roundRect">
             <a:avLst>
-              <a:gd name="adj" fmla="val 2105"/>
+              <a:gd name="adj" fmla="val 7273"/>
             </a:avLst>
           </a:prstGeom>
           <a:solidFill>
-            <a:schemeClr val="bg2"/>
+            <a:schemeClr val="tx1"/>
           </a:solidFill>
           <a:ln/>
         </p:spPr>
-      </p:sp>
-      <p:sp>
-        <p:nvSpPr>
-          <p:cNvPr id="4" name="Text 2"/>
-          <p:cNvSpPr txBox="1"/>
-          <p:nvPr/>
-        </p:nvSpPr>
-        <p:spPr>
-          <a:xfrm>
-            <a:off x="822960" y="1691640"/>
-            <a:ext cx="2926080" cy="457200"/>
-          </a:xfrm>
-          <a:prstGeom prst="rect">
-            <a:avLst/>
-          </a:prstGeom>
-          <a:noFill/>
-          <a:ln/>
-        </p:spPr>
-        <p:txBody>
-          <a:bodyPr wrap="square" lIns="0" tIns="0" rIns="0" bIns="0" rtlCol="0" anchor="ctr"/>
-          <a:lstStyle/>
-          <a:p>
-            <a:pPr indent="0" marL="0">
-              <a:buNone/>
-            </a:pPr>
-            <a:r>
-              <a:rPr lang="en-US" sz="2000" b="1" dirty="0">
-                <a:solidFill>
-                  <a:schemeClr val="tx1"/>
-                </a:solidFill>
-              </a:rPr>
-              <a:t>Fine-tuning complet</a:t>
-            </a:r>
-            <a:endParaRPr lang="en-US" sz="2000" dirty="0"/>
-          </a:p>
-        </p:txBody>
       </p:sp>
       <p:sp>
         <p:nvSpPr>
@@ -8691,8 +9531,8 @@
         </p:nvSpPr>
         <p:spPr>
           <a:xfrm>
-            <a:off x="822960" y="2194560"/>
-            <a:ext cx="2926080" cy="822960"/>
+            <a:off x="731520" y="1920240"/>
+            <a:ext cx="5120640" cy="1005840"/>
           </a:xfrm>
           <a:prstGeom prst="rect">
             <a:avLst/>
@@ -8704,70 +9544,34 @@
           <a:bodyPr wrap="square" lIns="0" tIns="0" rIns="0" bIns="0" rtlCol="0" anchor="ctr"/>
           <a:lstStyle/>
           <a:p>
-            <a:pPr indent="0" marL="0">
+            <a:pPr algn="ctr" indent="0" marL="0">
               <a:buNone/>
             </a:pPr>
             <a:r>
-              <a:rPr lang="en-US" sz="1400" dirty="0">
-                <a:solidFill>
-                  <a:schemeClr val="tx2"/>
-                </a:solidFill>
-              </a:rPr>
-              <a:t>Tous les paramètres sont ajustés</a:t>
-            </a:r>
-            <a:endParaRPr lang="en-US" sz="1400" dirty="0"/>
-          </a:p>
-        </p:txBody>
-      </p:sp>
-      <p:sp>
-        <p:nvSpPr>
-          <p:cNvPr id="6" name="Text 4"/>
-          <p:cNvSpPr txBox="1"/>
-          <p:nvPr/>
-        </p:nvSpPr>
-        <p:spPr>
-          <a:xfrm>
-            <a:off x="822960" y="3063240"/>
-            <a:ext cx="2926080" cy="685800"/>
-          </a:xfrm>
-          <a:prstGeom prst="rect">
-            <a:avLst/>
-          </a:prstGeom>
-          <a:noFill/>
-          <a:ln/>
-        </p:spPr>
-        <p:txBody>
-          <a:bodyPr wrap="square" lIns="0" tIns="0" rIns="0" bIns="0" rtlCol="0" anchor="ctr"/>
-          <a:lstStyle/>
-          <a:p>
-            <a:pPr indent="0" marL="0">
-              <a:buNone/>
-            </a:pPr>
-            <a:r>
-              <a:rPr lang="en-US" sz="4000" b="1" dirty="0">
-                <a:solidFill>
-                  <a:schemeClr val="accent2"/>
+              <a:rPr lang="en-US" sz="2000" dirty="0">
+                <a:solidFill>
+                  <a:schemeClr val="bg1"/>
                 </a:solidFill>
                 <a:latin typeface="Cambria" pitchFamily="34" charset="0"/>
                 <a:ea typeface="Cambria" pitchFamily="34" charset="-122"/>
                 <a:cs typeface="Cambria" pitchFamily="34" charset="-120"/>
               </a:rPr>
-              <a:t>67 M</a:t>
-            </a:r>
-            <a:endParaRPr lang="en-US" sz="4000" dirty="0"/>
-          </a:p>
-        </p:txBody>
-      </p:sp>
-      <p:sp>
-        <p:nvSpPr>
-          <p:cNvPr id="7" name="Text 5"/>
+              <a:t>w = P(groupe) × P(cible) / P(groupe, cible)</a:t>
+            </a:r>
+            <a:endParaRPr lang="en-US" sz="2000" dirty="0"/>
+          </a:p>
+        </p:txBody>
+      </p:sp>
+      <p:sp>
+        <p:nvSpPr>
+          <p:cNvPr id="6" name="Text 4"/>
           <p:cNvSpPr txBox="1"/>
           <p:nvPr/>
         </p:nvSpPr>
         <p:spPr>
           <a:xfrm>
-            <a:off x="822960" y="3749040"/>
-            <a:ext cx="2926080" cy="320040"/>
+            <a:off x="548640" y="3200400"/>
+            <a:ext cx="5486400" cy="2377440"/>
           </a:xfrm>
           <a:prstGeom prst="rect">
             <a:avLst/>
@@ -8779,611 +9583,95 @@
           <a:bodyPr wrap="square" lIns="0" tIns="0" rIns="0" bIns="0" rtlCol="0" anchor="ctr"/>
           <a:lstStyle/>
           <a:p>
-            <a:pPr indent="0" marL="0">
-              <a:buNone/>
-            </a:pPr>
-            <a:r>
-              <a:rPr lang="en-US" sz="1200" dirty="0">
-                <a:solidFill>
-                  <a:schemeClr val="accent5"/>
-                </a:solidFill>
-              </a:rPr>
-              <a:t>paramètres entraînés</a:t>
-            </a:r>
-            <a:endParaRPr lang="en-US" sz="1200" dirty="0"/>
-          </a:p>
-        </p:txBody>
-      </p:sp>
-      <p:sp>
-        <p:nvSpPr>
-          <p:cNvPr id="8" name="Text 6"/>
-          <p:cNvSpPr txBox="1"/>
-          <p:nvPr/>
-        </p:nvSpPr>
-        <p:spPr>
-          <a:xfrm>
-            <a:off x="822960" y="4114800"/>
-            <a:ext cx="2926080" cy="365760"/>
-          </a:xfrm>
-          <a:prstGeom prst="rect">
-            <a:avLst/>
-          </a:prstGeom>
-          <a:noFill/>
-          <a:ln/>
-        </p:spPr>
-        <p:txBody>
-          <a:bodyPr wrap="square" lIns="0" tIns="0" rIns="0" bIns="0" rtlCol="0" anchor="ctr"/>
-          <a:lstStyle/>
-          <a:p>
-            <a:pPr indent="0" marL="0">
-              <a:buNone/>
-            </a:pPr>
-            <a:r>
-              <a:rPr lang="en-US" sz="1600" b="1" dirty="0">
-                <a:solidFill>
-                  <a:schemeClr val="tx1"/>
-                </a:solidFill>
-              </a:rPr>
-              <a:t>268 Mo sur disque</a:t>
-            </a:r>
-            <a:endParaRPr lang="en-US" sz="1600" dirty="0"/>
-          </a:p>
-        </p:txBody>
-      </p:sp>
-      <p:sp>
-        <p:nvSpPr>
-          <p:cNvPr id="9" name="Text 7"/>
-          <p:cNvSpPr txBox="1"/>
-          <p:nvPr/>
-        </p:nvSpPr>
-        <p:spPr>
-          <a:xfrm>
-            <a:off x="822960" y="4572000"/>
-            <a:ext cx="2926080" cy="914400"/>
-          </a:xfrm>
-          <a:prstGeom prst="rect">
-            <a:avLst/>
-          </a:prstGeom>
-          <a:noFill/>
-          <a:ln/>
-        </p:spPr>
-        <p:txBody>
-          <a:bodyPr wrap="square" lIns="0" tIns="0" rIns="0" bIns="0" rtlCol="0" anchor="ctr"/>
-          <a:lstStyle/>
-          <a:p>
-            <a:pPr indent="0" marL="0">
-              <a:buNone/>
-            </a:pPr>
-            <a:r>
-              <a:rPr lang="en-US" sz="1400" i="1" dirty="0">
+            <a:pPr marL="342900" indent="-342900">
+              <a:spcAft>
+                <a:spcPts val="800"/>
+              </a:spcAft>
+              <a:buSzPct val="100000"/>
+              <a:buChar char="•"/>
+            </a:pPr>
+            <a:r>
+              <a:rPr lang="en-US" sz="1500" dirty="0">
                 <a:solidFill>
                   <a:schemeClr val="tx2"/>
                 </a:solidFill>
               </a:rPr>
-              <a:t>Meilleure performance, coûteux</a:t>
-            </a:r>
-            <a:endParaRPr lang="en-US" sz="1400" dirty="0"/>
-          </a:p>
-        </p:txBody>
-      </p:sp>
-      <p:sp>
-        <p:nvSpPr>
-          <p:cNvPr id="10" name="methode-2"/>
-          <p:cNvSpPr/>
-          <p:nvPr/>
-        </p:nvSpPr>
-        <p:spPr>
-          <a:xfrm>
-            <a:off x="4297680" y="1463040"/>
-            <a:ext cx="3474720" cy="4480560"/>
-          </a:xfrm>
-          <a:prstGeom prst="roundRect">
-            <a:avLst>
-              <a:gd name="adj" fmla="val 2105"/>
-            </a:avLst>
-          </a:prstGeom>
-          <a:solidFill>
-            <a:schemeClr val="bg2"/>
-          </a:solidFill>
-          <a:ln/>
-        </p:spPr>
-      </p:sp>
-      <p:sp>
-        <p:nvSpPr>
-          <p:cNvPr id="11" name="Text 9"/>
-          <p:cNvSpPr txBox="1"/>
-          <p:nvPr/>
-        </p:nvSpPr>
-        <p:spPr>
-          <a:xfrm>
-            <a:off x="4572000" y="1691640"/>
-            <a:ext cx="2926080" cy="457200"/>
-          </a:xfrm>
-          <a:prstGeom prst="rect">
-            <a:avLst/>
-          </a:prstGeom>
-          <a:noFill/>
-          <a:ln/>
-        </p:spPr>
-        <p:txBody>
-          <a:bodyPr wrap="square" lIns="0" tIns="0" rIns="0" bIns="0" rtlCol="0" anchor="ctr"/>
-          <a:lstStyle/>
-          <a:p>
-            <a:pPr indent="0" marL="0">
-              <a:buNone/>
-            </a:pPr>
-            <a:r>
-              <a:rPr lang="en-US" sz="2000" b="1" dirty="0">
-                <a:solidFill>
-                  <a:schemeClr val="tx1"/>
-                </a:solidFill>
-              </a:rPr>
-              <a:t>LoRA</a:t>
-            </a:r>
-            <a:endParaRPr lang="en-US" sz="2000" dirty="0"/>
-          </a:p>
-        </p:txBody>
-      </p:sp>
-      <p:sp>
-        <p:nvSpPr>
-          <p:cNvPr id="12" name="Text 10"/>
-          <p:cNvSpPr txBox="1"/>
-          <p:nvPr/>
-        </p:nvSpPr>
-        <p:spPr>
-          <a:xfrm>
-            <a:off x="4572000" y="2194560"/>
-            <a:ext cx="2926080" cy="822960"/>
-          </a:xfrm>
-          <a:prstGeom prst="rect">
-            <a:avLst/>
-          </a:prstGeom>
-          <a:noFill/>
-          <a:ln/>
-        </p:spPr>
-        <p:txBody>
-          <a:bodyPr wrap="square" lIns="0" tIns="0" rIns="0" bIns="0" rtlCol="0" anchor="ctr"/>
-          <a:lstStyle/>
-          <a:p>
-            <a:pPr indent="0" marL="0">
-              <a:buNone/>
-            </a:pPr>
-            <a:r>
-              <a:rPr lang="en-US" sz="1400" dirty="0">
+              <a:t>Les exemples rares (femme noire à &gt;50K) pèsent plus, les fréquents moins</a:t>
+            </a:r>
+            <a:endParaRPr lang="en-US" sz="1500" dirty="0"/>
+          </a:p>
+          <a:p>
+            <a:pPr marL="342900" indent="-342900">
+              <a:spcAft>
+                <a:spcPts val="800"/>
+              </a:spcAft>
+              <a:buSzPct val="100000"/>
+              <a:buChar char="•"/>
+            </a:pPr>
+            <a:r>
+              <a:rPr lang="en-US" sz="1500" dirty="0">
                 <a:solidFill>
                   <a:schemeClr val="tx2"/>
                 </a:solidFill>
               </a:rPr>
-              <a:t>Modèle gelé, petites matrices de rang faible ajoutées</a:t>
-            </a:r>
-            <a:endParaRPr lang="en-US" sz="1400" dirty="0"/>
-          </a:p>
-        </p:txBody>
-      </p:sp>
-      <p:sp>
-        <p:nvSpPr>
-          <p:cNvPr id="13" name="Text 11"/>
-          <p:cNvSpPr txBox="1"/>
-          <p:nvPr/>
-        </p:nvSpPr>
-        <p:spPr>
-          <a:xfrm>
-            <a:off x="4572000" y="3063240"/>
-            <a:ext cx="2926080" cy="685800"/>
-          </a:xfrm>
-          <a:prstGeom prst="rect">
-            <a:avLst/>
-          </a:prstGeom>
-          <a:noFill/>
-          <a:ln/>
-        </p:spPr>
-        <p:txBody>
-          <a:bodyPr wrap="square" lIns="0" tIns="0" rIns="0" bIns="0" rtlCol="0" anchor="ctr"/>
-          <a:lstStyle/>
-          <a:p>
-            <a:pPr indent="0" marL="0">
-              <a:buNone/>
-            </a:pPr>
-            <a:r>
-              <a:rPr lang="en-US" sz="4000" b="1" dirty="0">
-                <a:solidFill>
-                  <a:schemeClr val="accent2"/>
-                </a:solidFill>
-                <a:latin typeface="Cambria" pitchFamily="34" charset="0"/>
-                <a:ea typeface="Cambria" pitchFamily="34" charset="-122"/>
-                <a:cs typeface="Cambria" pitchFamily="34" charset="-120"/>
-              </a:rPr>
-              <a:t>0,74 M</a:t>
-            </a:r>
-            <a:endParaRPr lang="en-US" sz="4000" dirty="0"/>
-          </a:p>
-        </p:txBody>
-      </p:sp>
-      <p:sp>
-        <p:nvSpPr>
-          <p:cNvPr id="14" name="Text 12"/>
-          <p:cNvSpPr txBox="1"/>
-          <p:nvPr/>
-        </p:nvSpPr>
-        <p:spPr>
-          <a:xfrm>
-            <a:off x="4572000" y="3749040"/>
-            <a:ext cx="2926080" cy="320040"/>
-          </a:xfrm>
-          <a:prstGeom prst="rect">
-            <a:avLst/>
-          </a:prstGeom>
-          <a:noFill/>
-          <a:ln/>
-        </p:spPr>
-        <p:txBody>
-          <a:bodyPr wrap="square" lIns="0" tIns="0" rIns="0" bIns="0" rtlCol="0" anchor="ctr"/>
-          <a:lstStyle/>
-          <a:p>
-            <a:pPr indent="0" marL="0">
-              <a:buNone/>
-            </a:pPr>
-            <a:r>
-              <a:rPr lang="en-US" sz="1200" dirty="0">
-                <a:solidFill>
-                  <a:schemeClr val="accent5"/>
-                </a:solidFill>
-              </a:rPr>
-              <a:t>paramètres entraînés</a:t>
-            </a:r>
-            <a:endParaRPr lang="en-US" sz="1200" dirty="0"/>
-          </a:p>
-        </p:txBody>
-      </p:sp>
-      <p:sp>
-        <p:nvSpPr>
-          <p:cNvPr id="15" name="Text 13"/>
-          <p:cNvSpPr txBox="1"/>
-          <p:nvPr/>
-        </p:nvSpPr>
-        <p:spPr>
-          <a:xfrm>
-            <a:off x="4572000" y="4114800"/>
-            <a:ext cx="2926080" cy="365760"/>
-          </a:xfrm>
-          <a:prstGeom prst="rect">
-            <a:avLst/>
-          </a:prstGeom>
-          <a:noFill/>
-          <a:ln/>
-        </p:spPr>
-        <p:txBody>
-          <a:bodyPr wrap="square" lIns="0" tIns="0" rIns="0" bIns="0" rtlCol="0" anchor="ctr"/>
-          <a:lstStyle/>
-          <a:p>
-            <a:pPr indent="0" marL="0">
-              <a:buNone/>
-            </a:pPr>
-            <a:r>
-              <a:rPr lang="en-US" sz="1600" b="1" dirty="0">
-                <a:solidFill>
-                  <a:schemeClr val="tx1"/>
-                </a:solidFill>
-              </a:rPr>
-              <a:t>3 Mo sur disque</a:t>
-            </a:r>
-            <a:endParaRPr lang="en-US" sz="1600" dirty="0"/>
-          </a:p>
-        </p:txBody>
-      </p:sp>
-      <p:sp>
-        <p:nvSpPr>
-          <p:cNvPr id="16" name="Text 14"/>
-          <p:cNvSpPr txBox="1"/>
-          <p:nvPr/>
-        </p:nvSpPr>
-        <p:spPr>
-          <a:xfrm>
-            <a:off x="4572000" y="4572000"/>
-            <a:ext cx="2926080" cy="914400"/>
-          </a:xfrm>
-          <a:prstGeom prst="rect">
-            <a:avLst/>
-          </a:prstGeom>
-          <a:noFill/>
-          <a:ln/>
-        </p:spPr>
-        <p:txBody>
-          <a:bodyPr wrap="square" lIns="0" tIns="0" rIns="0" bIns="0" rtlCol="0" anchor="ctr"/>
-          <a:lstStyle/>
-          <a:p>
-            <a:pPr indent="0" marL="0">
-              <a:buNone/>
-            </a:pPr>
-            <a:r>
-              <a:rPr lang="en-US" sz="1400" i="1" dirty="0">
+              <a:t>Calculé sur le train uniquement, sur le croisement sexe × origine</a:t>
+            </a:r>
+            <a:endParaRPr lang="en-US" sz="1500" dirty="0"/>
+          </a:p>
+          <a:p>
+            <a:pPr marL="342900" indent="-342900">
+              <a:spcAft>
+                <a:spcPts val="800"/>
+              </a:spcAft>
+              <a:buSzPct val="100000"/>
+              <a:buChar char="•"/>
+            </a:pPr>
+            <a:r>
+              <a:rPr lang="en-US" sz="1500" dirty="0">
                 <a:solidFill>
                   <a:schemeClr val="tx2"/>
                 </a:solidFill>
               </a:rPr>
-              <a:t>Léger et rapide, parfois moins performant</a:t>
-            </a:r>
-            <a:endParaRPr lang="en-US" sz="1400" dirty="0"/>
-          </a:p>
-        </p:txBody>
-      </p:sp>
-      <p:sp>
-        <p:nvSpPr>
-          <p:cNvPr id="17" name="methode-3"/>
-          <p:cNvSpPr/>
-          <p:nvPr/>
-        </p:nvSpPr>
-        <p:spPr>
-          <a:xfrm>
-            <a:off x="8046720" y="1463040"/>
-            <a:ext cx="3474720" cy="4480560"/>
-          </a:xfrm>
-          <a:prstGeom prst="roundRect">
-            <a:avLst>
-              <a:gd name="adj" fmla="val 2105"/>
-            </a:avLst>
-          </a:prstGeom>
-          <a:solidFill>
-            <a:schemeClr val="bg2"/>
-          </a:solidFill>
-          <a:ln/>
-        </p:spPr>
-      </p:sp>
-      <p:sp>
-        <p:nvSpPr>
-          <p:cNvPr id="18" name="Text 16"/>
-          <p:cNvSpPr txBox="1"/>
-          <p:nvPr/>
-        </p:nvSpPr>
-        <p:spPr>
-          <a:xfrm>
-            <a:off x="8321040" y="1691640"/>
-            <a:ext cx="2926080" cy="457200"/>
-          </a:xfrm>
-          <a:prstGeom prst="rect">
-            <a:avLst/>
-          </a:prstGeom>
-          <a:noFill/>
-          <a:ln/>
-        </p:spPr>
-        <p:txBody>
-          <a:bodyPr wrap="square" lIns="0" tIns="0" rIns="0" bIns="0" rtlCol="0" anchor="ctr"/>
-          <a:lstStyle/>
-          <a:p>
-            <a:pPr indent="0" marL="0">
-              <a:buNone/>
-            </a:pPr>
-            <a:r>
-              <a:rPr lang="en-US" sz="2000" b="1" dirty="0">
-                <a:solidFill>
-                  <a:schemeClr val="tx1"/>
-                </a:solidFill>
-              </a:rPr>
-              <a:t>Distillation</a:t>
-            </a:r>
-            <a:endParaRPr lang="en-US" sz="2000" dirty="0"/>
-          </a:p>
-        </p:txBody>
-      </p:sp>
-      <p:sp>
-        <p:nvSpPr>
-          <p:cNvPr id="19" name="Text 17"/>
-          <p:cNvSpPr txBox="1"/>
-          <p:nvPr/>
-        </p:nvSpPr>
-        <p:spPr>
-          <a:xfrm>
-            <a:off x="8321040" y="2194560"/>
-            <a:ext cx="2926080" cy="822960"/>
-          </a:xfrm>
-          <a:prstGeom prst="rect">
-            <a:avLst/>
-          </a:prstGeom>
-          <a:noFill/>
-          <a:ln/>
-        </p:spPr>
-        <p:txBody>
-          <a:bodyPr wrap="square" lIns="0" tIns="0" rIns="0" bIns="0" rtlCol="0" anchor="ctr"/>
-          <a:lstStyle/>
-          <a:p>
-            <a:pPr indent="0" marL="0">
-              <a:buNone/>
-            </a:pPr>
-            <a:r>
-              <a:rPr lang="en-US" sz="1400" dirty="0">
+              <a:t>Poids bornés entre 0,5 et 3 pour la stabilité</a:t>
+            </a:r>
+            <a:endParaRPr lang="en-US" sz="1500" dirty="0"/>
+          </a:p>
+          <a:p>
+            <a:pPr marL="342900" indent="-342900">
+              <a:spcAft>
+                <a:spcPts val="800"/>
+              </a:spcAft>
+              <a:buSzPct val="100000"/>
+              <a:buChar char="•"/>
+            </a:pPr>
+            <a:r>
+              <a:rPr lang="en-US" sz="1500" dirty="0">
                 <a:solidFill>
                   <a:schemeClr val="tx2"/>
                 </a:solidFill>
               </a:rPr>
-              <a:t>BERT-tiny imite le LoRA corrigé (professeur)</a:t>
-            </a:r>
-            <a:endParaRPr lang="en-US" sz="1400" dirty="0"/>
-          </a:p>
-        </p:txBody>
-      </p:sp>
-      <p:sp>
-        <p:nvSpPr>
-          <p:cNvPr id="20" name="Text 18"/>
-          <p:cNvSpPr txBox="1"/>
-          <p:nvPr/>
-        </p:nvSpPr>
-        <p:spPr>
-          <a:xfrm>
-            <a:off x="8321040" y="3063240"/>
-            <a:ext cx="2926080" cy="685800"/>
-          </a:xfrm>
-          <a:prstGeom prst="rect">
-            <a:avLst/>
-          </a:prstGeom>
-          <a:noFill/>
-          <a:ln/>
-        </p:spPr>
-        <p:txBody>
-          <a:bodyPr wrap="square" lIns="0" tIns="0" rIns="0" bIns="0" rtlCol="0" anchor="ctr"/>
-          <a:lstStyle/>
-          <a:p>
-            <a:pPr indent="0" marL="0">
-              <a:buNone/>
-            </a:pPr>
-            <a:r>
-              <a:rPr lang="en-US" sz="4000" b="1" dirty="0">
-                <a:solidFill>
-                  <a:schemeClr val="accent2"/>
-                </a:solidFill>
-                <a:latin typeface="Cambria" pitchFamily="34" charset="0"/>
-                <a:ea typeface="Cambria" pitchFamily="34" charset="-122"/>
-                <a:cs typeface="Cambria" pitchFamily="34" charset="-120"/>
-              </a:rPr>
-              <a:t>4,4 M</a:t>
-            </a:r>
-            <a:endParaRPr lang="en-US" sz="4000" dirty="0"/>
-          </a:p>
-        </p:txBody>
-      </p:sp>
-      <p:sp>
-        <p:nvSpPr>
-          <p:cNvPr id="21" name="Text 19"/>
-          <p:cNvSpPr txBox="1"/>
-          <p:nvPr/>
-        </p:nvSpPr>
-        <p:spPr>
-          <a:xfrm>
-            <a:off x="8321040" y="3749040"/>
-            <a:ext cx="2926080" cy="320040"/>
-          </a:xfrm>
-          <a:prstGeom prst="rect">
-            <a:avLst/>
-          </a:prstGeom>
-          <a:noFill/>
-          <a:ln/>
-        </p:spPr>
-        <p:txBody>
-          <a:bodyPr wrap="square" lIns="0" tIns="0" rIns="0" bIns="0" rtlCol="0" anchor="ctr"/>
-          <a:lstStyle/>
-          <a:p>
-            <a:pPr indent="0" marL="0">
-              <a:buNone/>
-            </a:pPr>
-            <a:r>
-              <a:rPr lang="en-US" sz="1200" dirty="0">
-                <a:solidFill>
-                  <a:schemeClr val="accent5"/>
-                </a:solidFill>
-              </a:rPr>
-              <a:t>paramètres entraînés</a:t>
-            </a:r>
-            <a:endParaRPr lang="en-US" sz="1200" dirty="0"/>
-          </a:p>
-        </p:txBody>
-      </p:sp>
-      <p:sp>
-        <p:nvSpPr>
-          <p:cNvPr id="22" name="Text 20"/>
-          <p:cNvSpPr txBox="1"/>
-          <p:nvPr/>
-        </p:nvSpPr>
-        <p:spPr>
-          <a:xfrm>
-            <a:off x="8321040" y="4114800"/>
-            <a:ext cx="2926080" cy="365760"/>
-          </a:xfrm>
-          <a:prstGeom prst="rect">
-            <a:avLst/>
-          </a:prstGeom>
-          <a:noFill/>
-          <a:ln/>
-        </p:spPr>
-        <p:txBody>
-          <a:bodyPr wrap="square" lIns="0" tIns="0" rIns="0" bIns="0" rtlCol="0" anchor="ctr"/>
-          <a:lstStyle/>
-          <a:p>
-            <a:pPr indent="0" marL="0">
-              <a:buNone/>
-            </a:pPr>
-            <a:r>
-              <a:rPr lang="en-US" sz="1600" b="1" dirty="0">
-                <a:solidFill>
-                  <a:schemeClr val="tx1"/>
-                </a:solidFill>
-              </a:rPr>
-              <a:t>18 Mo sur disque</a:t>
-            </a:r>
-            <a:endParaRPr lang="en-US" sz="1600" dirty="0"/>
-          </a:p>
-        </p:txBody>
-      </p:sp>
-      <p:sp>
-        <p:nvSpPr>
-          <p:cNvPr id="23" name="Text 21"/>
-          <p:cNvSpPr txBox="1"/>
-          <p:nvPr/>
-        </p:nvSpPr>
-        <p:spPr>
-          <a:xfrm>
-            <a:off x="8321040" y="4572000"/>
-            <a:ext cx="2926080" cy="914400"/>
-          </a:xfrm>
-          <a:prstGeom prst="rect">
-            <a:avLst/>
-          </a:prstGeom>
-          <a:noFill/>
-          <a:ln/>
-        </p:spPr>
-        <p:txBody>
-          <a:bodyPr wrap="square" lIns="0" tIns="0" rIns="0" bIns="0" rtlCol="0" anchor="ctr"/>
-          <a:lstStyle/>
-          <a:p>
-            <a:pPr indent="0" marL="0">
-              <a:buNone/>
-            </a:pPr>
-            <a:r>
-              <a:rPr lang="en-US" sz="1400" i="1" dirty="0">
-                <a:solidFill>
-                  <a:schemeClr val="tx2"/>
-                </a:solidFill>
-              </a:rPr>
-              <a:t>Petit modèle à exécuter, dépend du professeur</a:t>
-            </a:r>
-            <a:endParaRPr lang="en-US" sz="1400" dirty="0"/>
-          </a:p>
-        </p:txBody>
-      </p:sp>
-      <p:sp>
-        <p:nvSpPr>
-          <p:cNvPr id="24" name="Text 22"/>
-          <p:cNvSpPr txBox="1"/>
-          <p:nvPr/>
-        </p:nvSpPr>
-        <p:spPr>
-          <a:xfrm>
-            <a:off x="548640" y="6035040"/>
-            <a:ext cx="11064240" cy="320040"/>
-          </a:xfrm>
-          <a:prstGeom prst="rect">
-            <a:avLst/>
-          </a:prstGeom>
-          <a:noFill/>
-          <a:ln/>
-        </p:spPr>
-        <p:txBody>
-          <a:bodyPr wrap="square" lIns="0" tIns="0" rIns="0" bIns="0" rtlCol="0" anchor="ctr"/>
-          <a:lstStyle/>
-          <a:p>
-            <a:pPr indent="0" marL="0">
-              <a:buNone/>
-            </a:pPr>
-            <a:r>
-              <a:rPr lang="en-US" sz="1300" dirty="0">
-                <a:solidFill>
-                  <a:schemeClr val="accent5"/>
-                </a:solidFill>
-              </a:rPr>
-              <a:t>Même protocole : 3 epochs, même échantillon, versions avant et après correction.</a:t>
-            </a:r>
-            <a:endParaRPr lang="en-US" sz="1300" dirty="0"/>
-          </a:p>
-        </p:txBody>
-      </p:sp>
+              <a:t>Variante : retirer sexe et origine du texte (« sans attributs »)</a:t>
+            </a:r>
+            <a:endParaRPr lang="en-US" sz="1500" dirty="0"/>
+          </a:p>
+        </p:txBody>
+      </p:sp>
+      <p:graphicFrame>
+        <p:nvGraphicFramePr>
+          <p:cNvPr id="7" name="Chart 0" descr=""/>
+          <p:cNvGraphicFramePr/>
+          <p:nvPr/>
+        </p:nvGraphicFramePr>
+        <p:xfrm>
+          <a:off x="6400800" y="1371600"/>
+          <a:ext cx="5212080" cy="4480560"/>
+        </p:xfrm>
+        <a:graphic xmlns:a="http://schemas.openxmlformats.org/drawingml/2006/main">
+          <a:graphicData uri="http://schemas.openxmlformats.org/drawingml/2006/chart">
+            <c:chart xmlns:c="http://schemas.openxmlformats.org/drawingml/2006/chart" r:id="rId1"/>
+          </a:graphicData>
+        </a:graphic>
+      </p:graphicFrame>
       <p:sp>
         <p:nvSpPr>
           <p:cNvPr id="25" name="Slide Number Placeholder 0"/>
@@ -9464,8 +9752,8 @@
         </p:nvSpPr>
         <p:spPr>
           <a:xfrm>
-            <a:off x="548640" y="320040"/>
-            <a:ext cx="11064240" cy="822960"/>
+            <a:off x="548640" y="274320"/>
+            <a:ext cx="11064240" cy="914400"/>
           </a:xfrm>
           <a:prstGeom prst="rect">
             <a:avLst/>
@@ -9481,7 +9769,7 @@
               <a:buNone/>
             </a:pPr>
             <a:r>
-              <a:rPr lang="en-US" sz="3200" b="1" dirty="0">
+              <a:rPr lang="en-US" sz="3600" b="1" dirty="0">
                 <a:solidFill>
                   <a:schemeClr val="tx1"/>
                 </a:solidFill>
@@ -9489,15 +9777,885 @@
                 <a:ea typeface="Cambria" pitchFamily="34" charset="-122"/>
                 <a:cs typeface="Cambria" pitchFamily="34" charset="-120"/>
               </a:rPr>
+              <a:t>Trois façons d'adapter DistilBERT</a:t>
+            </a:r>
+            <a:endParaRPr lang="en-US" sz="3600" dirty="0"/>
+          </a:p>
+        </p:txBody>
+      </p:sp>
+      <p:sp>
+        <p:nvSpPr>
+          <p:cNvPr id="3" name="methode-1"/>
+          <p:cNvSpPr/>
+          <p:nvPr/>
+        </p:nvSpPr>
+        <p:spPr>
+          <a:xfrm>
+            <a:off x="548640" y="1463040"/>
+            <a:ext cx="3474720" cy="4480560"/>
+          </a:xfrm>
+          <a:prstGeom prst="roundRect">
+            <a:avLst>
+              <a:gd name="adj" fmla="val 2105"/>
+            </a:avLst>
+          </a:prstGeom>
+          <a:solidFill>
+            <a:schemeClr val="bg2"/>
+          </a:solidFill>
+          <a:ln/>
+        </p:spPr>
+      </p:sp>
+      <p:sp>
+        <p:nvSpPr>
+          <p:cNvPr id="4" name="Text 2"/>
+          <p:cNvSpPr txBox="1"/>
+          <p:nvPr/>
+        </p:nvSpPr>
+        <p:spPr>
+          <a:xfrm>
+            <a:off x="822960" y="1691640"/>
+            <a:ext cx="2926080" cy="457200"/>
+          </a:xfrm>
+          <a:prstGeom prst="rect">
+            <a:avLst/>
+          </a:prstGeom>
+          <a:noFill/>
+          <a:ln/>
+        </p:spPr>
+        <p:txBody>
+          <a:bodyPr wrap="square" lIns="0" tIns="0" rIns="0" bIns="0" rtlCol="0" anchor="ctr"/>
+          <a:lstStyle/>
+          <a:p>
+            <a:pPr indent="0" marL="0">
+              <a:buNone/>
+            </a:pPr>
+            <a:r>
+              <a:rPr lang="en-US" sz="2000" b="1" dirty="0">
+                <a:solidFill>
+                  <a:schemeClr val="tx1"/>
+                </a:solidFill>
+              </a:rPr>
+              <a:t>Fine-tuning complet</a:t>
+            </a:r>
+            <a:endParaRPr lang="en-US" sz="2000" dirty="0"/>
+          </a:p>
+        </p:txBody>
+      </p:sp>
+      <p:sp>
+        <p:nvSpPr>
+          <p:cNvPr id="5" name="Text 3"/>
+          <p:cNvSpPr txBox="1"/>
+          <p:nvPr/>
+        </p:nvSpPr>
+        <p:spPr>
+          <a:xfrm>
+            <a:off x="822960" y="2194560"/>
+            <a:ext cx="2926080" cy="822960"/>
+          </a:xfrm>
+          <a:prstGeom prst="rect">
+            <a:avLst/>
+          </a:prstGeom>
+          <a:noFill/>
+          <a:ln/>
+        </p:spPr>
+        <p:txBody>
+          <a:bodyPr wrap="square" lIns="0" tIns="0" rIns="0" bIns="0" rtlCol="0" anchor="ctr"/>
+          <a:lstStyle/>
+          <a:p>
+            <a:pPr indent="0" marL="0">
+              <a:buNone/>
+            </a:pPr>
+            <a:r>
+              <a:rPr lang="en-US" sz="1400" dirty="0">
+                <a:solidFill>
+                  <a:schemeClr val="tx2"/>
+                </a:solidFill>
+              </a:rPr>
+              <a:t>Tous les paramètres sont ajustés</a:t>
+            </a:r>
+            <a:endParaRPr lang="en-US" sz="1400" dirty="0"/>
+          </a:p>
+        </p:txBody>
+      </p:sp>
+      <p:sp>
+        <p:nvSpPr>
+          <p:cNvPr id="6" name="Text 4"/>
+          <p:cNvSpPr txBox="1"/>
+          <p:nvPr/>
+        </p:nvSpPr>
+        <p:spPr>
+          <a:xfrm>
+            <a:off x="822960" y="3063240"/>
+            <a:ext cx="2926080" cy="685800"/>
+          </a:xfrm>
+          <a:prstGeom prst="rect">
+            <a:avLst/>
+          </a:prstGeom>
+          <a:noFill/>
+          <a:ln/>
+        </p:spPr>
+        <p:txBody>
+          <a:bodyPr wrap="square" lIns="0" tIns="0" rIns="0" bIns="0" rtlCol="0" anchor="ctr"/>
+          <a:lstStyle/>
+          <a:p>
+            <a:pPr indent="0" marL="0">
+              <a:buNone/>
+            </a:pPr>
+            <a:r>
+              <a:rPr lang="en-US" sz="4000" b="1" dirty="0">
+                <a:solidFill>
+                  <a:schemeClr val="accent2"/>
+                </a:solidFill>
+                <a:latin typeface="Cambria" pitchFamily="34" charset="0"/>
+                <a:ea typeface="Cambria" pitchFamily="34" charset="-122"/>
+                <a:cs typeface="Cambria" pitchFamily="34" charset="-120"/>
+              </a:rPr>
+              <a:t>67 M</a:t>
+            </a:r>
+            <a:endParaRPr lang="en-US" sz="4000" dirty="0"/>
+          </a:p>
+        </p:txBody>
+      </p:sp>
+      <p:sp>
+        <p:nvSpPr>
+          <p:cNvPr id="7" name="Text 5"/>
+          <p:cNvSpPr txBox="1"/>
+          <p:nvPr/>
+        </p:nvSpPr>
+        <p:spPr>
+          <a:xfrm>
+            <a:off x="822960" y="3749040"/>
+            <a:ext cx="2926080" cy="320040"/>
+          </a:xfrm>
+          <a:prstGeom prst="rect">
+            <a:avLst/>
+          </a:prstGeom>
+          <a:noFill/>
+          <a:ln/>
+        </p:spPr>
+        <p:txBody>
+          <a:bodyPr wrap="square" lIns="0" tIns="0" rIns="0" bIns="0" rtlCol="0" anchor="ctr"/>
+          <a:lstStyle/>
+          <a:p>
+            <a:pPr indent="0" marL="0">
+              <a:buNone/>
+            </a:pPr>
+            <a:r>
+              <a:rPr lang="en-US" sz="1200" dirty="0">
+                <a:solidFill>
+                  <a:schemeClr val="accent5"/>
+                </a:solidFill>
+              </a:rPr>
+              <a:t>paramètres entraînés</a:t>
+            </a:r>
+            <a:endParaRPr lang="en-US" sz="1200" dirty="0"/>
+          </a:p>
+        </p:txBody>
+      </p:sp>
+      <p:sp>
+        <p:nvSpPr>
+          <p:cNvPr id="8" name="Text 6"/>
+          <p:cNvSpPr txBox="1"/>
+          <p:nvPr/>
+        </p:nvSpPr>
+        <p:spPr>
+          <a:xfrm>
+            <a:off x="822960" y="4114800"/>
+            <a:ext cx="2926080" cy="365760"/>
+          </a:xfrm>
+          <a:prstGeom prst="rect">
+            <a:avLst/>
+          </a:prstGeom>
+          <a:noFill/>
+          <a:ln/>
+        </p:spPr>
+        <p:txBody>
+          <a:bodyPr wrap="square" lIns="0" tIns="0" rIns="0" bIns="0" rtlCol="0" anchor="ctr"/>
+          <a:lstStyle/>
+          <a:p>
+            <a:pPr indent="0" marL="0">
+              <a:buNone/>
+            </a:pPr>
+            <a:r>
+              <a:rPr lang="en-US" sz="1600" b="1" dirty="0">
+                <a:solidFill>
+                  <a:schemeClr val="tx1"/>
+                </a:solidFill>
+              </a:rPr>
+              <a:t>268 Mo sur disque</a:t>
+            </a:r>
+            <a:endParaRPr lang="en-US" sz="1600" dirty="0"/>
+          </a:p>
+        </p:txBody>
+      </p:sp>
+      <p:sp>
+        <p:nvSpPr>
+          <p:cNvPr id="9" name="Text 7"/>
+          <p:cNvSpPr txBox="1"/>
+          <p:nvPr/>
+        </p:nvSpPr>
+        <p:spPr>
+          <a:xfrm>
+            <a:off x="822960" y="4572000"/>
+            <a:ext cx="2926080" cy="914400"/>
+          </a:xfrm>
+          <a:prstGeom prst="rect">
+            <a:avLst/>
+          </a:prstGeom>
+          <a:noFill/>
+          <a:ln/>
+        </p:spPr>
+        <p:txBody>
+          <a:bodyPr wrap="square" lIns="0" tIns="0" rIns="0" bIns="0" rtlCol="0" anchor="ctr"/>
+          <a:lstStyle/>
+          <a:p>
+            <a:pPr indent="0" marL="0">
+              <a:buNone/>
+            </a:pPr>
+            <a:r>
+              <a:rPr lang="en-US" sz="1400" i="1" dirty="0">
+                <a:solidFill>
+                  <a:schemeClr val="tx2"/>
+                </a:solidFill>
+              </a:rPr>
+              <a:t>Meilleure performance, coûteux</a:t>
+            </a:r>
+            <a:endParaRPr lang="en-US" sz="1400" dirty="0"/>
+          </a:p>
+        </p:txBody>
+      </p:sp>
+      <p:sp>
+        <p:nvSpPr>
+          <p:cNvPr id="10" name="methode-2"/>
+          <p:cNvSpPr/>
+          <p:nvPr/>
+        </p:nvSpPr>
+        <p:spPr>
+          <a:xfrm>
+            <a:off x="4297680" y="1463040"/>
+            <a:ext cx="3474720" cy="4480560"/>
+          </a:xfrm>
+          <a:prstGeom prst="roundRect">
+            <a:avLst>
+              <a:gd name="adj" fmla="val 2105"/>
+            </a:avLst>
+          </a:prstGeom>
+          <a:solidFill>
+            <a:schemeClr val="bg2"/>
+          </a:solidFill>
+          <a:ln/>
+        </p:spPr>
+      </p:sp>
+      <p:sp>
+        <p:nvSpPr>
+          <p:cNvPr id="11" name="Text 9"/>
+          <p:cNvSpPr txBox="1"/>
+          <p:nvPr/>
+        </p:nvSpPr>
+        <p:spPr>
+          <a:xfrm>
+            <a:off x="4572000" y="1691640"/>
+            <a:ext cx="2926080" cy="457200"/>
+          </a:xfrm>
+          <a:prstGeom prst="rect">
+            <a:avLst/>
+          </a:prstGeom>
+          <a:noFill/>
+          <a:ln/>
+        </p:spPr>
+        <p:txBody>
+          <a:bodyPr wrap="square" lIns="0" tIns="0" rIns="0" bIns="0" rtlCol="0" anchor="ctr"/>
+          <a:lstStyle/>
+          <a:p>
+            <a:pPr indent="0" marL="0">
+              <a:buNone/>
+            </a:pPr>
+            <a:r>
+              <a:rPr lang="en-US" sz="2000" b="1" dirty="0">
+                <a:solidFill>
+                  <a:schemeClr val="tx1"/>
+                </a:solidFill>
+              </a:rPr>
+              <a:t>LoRA</a:t>
+            </a:r>
+            <a:endParaRPr lang="en-US" sz="2000" dirty="0"/>
+          </a:p>
+        </p:txBody>
+      </p:sp>
+      <p:sp>
+        <p:nvSpPr>
+          <p:cNvPr id="12" name="Text 10"/>
+          <p:cNvSpPr txBox="1"/>
+          <p:nvPr/>
+        </p:nvSpPr>
+        <p:spPr>
+          <a:xfrm>
+            <a:off x="4572000" y="2194560"/>
+            <a:ext cx="2926080" cy="822960"/>
+          </a:xfrm>
+          <a:prstGeom prst="rect">
+            <a:avLst/>
+          </a:prstGeom>
+          <a:noFill/>
+          <a:ln/>
+        </p:spPr>
+        <p:txBody>
+          <a:bodyPr wrap="square" lIns="0" tIns="0" rIns="0" bIns="0" rtlCol="0" anchor="ctr"/>
+          <a:lstStyle/>
+          <a:p>
+            <a:pPr indent="0" marL="0">
+              <a:buNone/>
+            </a:pPr>
+            <a:r>
+              <a:rPr lang="en-US" sz="1400" dirty="0">
+                <a:solidFill>
+                  <a:schemeClr val="tx2"/>
+                </a:solidFill>
+              </a:rPr>
+              <a:t>Modèle gelé, petites matrices de rang faible ajoutées</a:t>
+            </a:r>
+            <a:endParaRPr lang="en-US" sz="1400" dirty="0"/>
+          </a:p>
+        </p:txBody>
+      </p:sp>
+      <p:sp>
+        <p:nvSpPr>
+          <p:cNvPr id="13" name="Text 11"/>
+          <p:cNvSpPr txBox="1"/>
+          <p:nvPr/>
+        </p:nvSpPr>
+        <p:spPr>
+          <a:xfrm>
+            <a:off x="4572000" y="3063240"/>
+            <a:ext cx="2926080" cy="685800"/>
+          </a:xfrm>
+          <a:prstGeom prst="rect">
+            <a:avLst/>
+          </a:prstGeom>
+          <a:noFill/>
+          <a:ln/>
+        </p:spPr>
+        <p:txBody>
+          <a:bodyPr wrap="square" lIns="0" tIns="0" rIns="0" bIns="0" rtlCol="0" anchor="ctr"/>
+          <a:lstStyle/>
+          <a:p>
+            <a:pPr indent="0" marL="0">
+              <a:buNone/>
+            </a:pPr>
+            <a:r>
+              <a:rPr lang="en-US" sz="4000" b="1" dirty="0">
+                <a:solidFill>
+                  <a:schemeClr val="accent2"/>
+                </a:solidFill>
+                <a:latin typeface="Cambria" pitchFamily="34" charset="0"/>
+                <a:ea typeface="Cambria" pitchFamily="34" charset="-122"/>
+                <a:cs typeface="Cambria" pitchFamily="34" charset="-120"/>
+              </a:rPr>
+              <a:t>0,74 M</a:t>
+            </a:r>
+            <a:endParaRPr lang="en-US" sz="4000" dirty="0"/>
+          </a:p>
+        </p:txBody>
+      </p:sp>
+      <p:sp>
+        <p:nvSpPr>
+          <p:cNvPr id="14" name="Text 12"/>
+          <p:cNvSpPr txBox="1"/>
+          <p:nvPr/>
+        </p:nvSpPr>
+        <p:spPr>
+          <a:xfrm>
+            <a:off x="4572000" y="3749040"/>
+            <a:ext cx="2926080" cy="320040"/>
+          </a:xfrm>
+          <a:prstGeom prst="rect">
+            <a:avLst/>
+          </a:prstGeom>
+          <a:noFill/>
+          <a:ln/>
+        </p:spPr>
+        <p:txBody>
+          <a:bodyPr wrap="square" lIns="0" tIns="0" rIns="0" bIns="0" rtlCol="0" anchor="ctr"/>
+          <a:lstStyle/>
+          <a:p>
+            <a:pPr indent="0" marL="0">
+              <a:buNone/>
+            </a:pPr>
+            <a:r>
+              <a:rPr lang="en-US" sz="1200" dirty="0">
+                <a:solidFill>
+                  <a:schemeClr val="accent5"/>
+                </a:solidFill>
+              </a:rPr>
+              <a:t>paramètres entraînés</a:t>
+            </a:r>
+            <a:endParaRPr lang="en-US" sz="1200" dirty="0"/>
+          </a:p>
+        </p:txBody>
+      </p:sp>
+      <p:sp>
+        <p:nvSpPr>
+          <p:cNvPr id="15" name="Text 13"/>
+          <p:cNvSpPr txBox="1"/>
+          <p:nvPr/>
+        </p:nvSpPr>
+        <p:spPr>
+          <a:xfrm>
+            <a:off x="4572000" y="4114800"/>
+            <a:ext cx="2926080" cy="365760"/>
+          </a:xfrm>
+          <a:prstGeom prst="rect">
+            <a:avLst/>
+          </a:prstGeom>
+          <a:noFill/>
+          <a:ln/>
+        </p:spPr>
+        <p:txBody>
+          <a:bodyPr wrap="square" lIns="0" tIns="0" rIns="0" bIns="0" rtlCol="0" anchor="ctr"/>
+          <a:lstStyle/>
+          <a:p>
+            <a:pPr indent="0" marL="0">
+              <a:buNone/>
+            </a:pPr>
+            <a:r>
+              <a:rPr lang="en-US" sz="1600" b="1" dirty="0">
+                <a:solidFill>
+                  <a:schemeClr val="tx1"/>
+                </a:solidFill>
+              </a:rPr>
+              <a:t>3 Mo sur disque</a:t>
+            </a:r>
+            <a:endParaRPr lang="en-US" sz="1600" dirty="0"/>
+          </a:p>
+        </p:txBody>
+      </p:sp>
+      <p:sp>
+        <p:nvSpPr>
+          <p:cNvPr id="16" name="Text 14"/>
+          <p:cNvSpPr txBox="1"/>
+          <p:nvPr/>
+        </p:nvSpPr>
+        <p:spPr>
+          <a:xfrm>
+            <a:off x="4572000" y="4572000"/>
+            <a:ext cx="2926080" cy="914400"/>
+          </a:xfrm>
+          <a:prstGeom prst="rect">
+            <a:avLst/>
+          </a:prstGeom>
+          <a:noFill/>
+          <a:ln/>
+        </p:spPr>
+        <p:txBody>
+          <a:bodyPr wrap="square" lIns="0" tIns="0" rIns="0" bIns="0" rtlCol="0" anchor="ctr"/>
+          <a:lstStyle/>
+          <a:p>
+            <a:pPr indent="0" marL="0">
+              <a:buNone/>
+            </a:pPr>
+            <a:r>
+              <a:rPr lang="en-US" sz="1400" i="1" dirty="0">
+                <a:solidFill>
+                  <a:schemeClr val="tx2"/>
+                </a:solidFill>
+              </a:rPr>
+              <a:t>Léger et rapide, parfois moins performant</a:t>
+            </a:r>
+            <a:endParaRPr lang="en-US" sz="1400" dirty="0"/>
+          </a:p>
+        </p:txBody>
+      </p:sp>
+      <p:sp>
+        <p:nvSpPr>
+          <p:cNvPr id="17" name="methode-3"/>
+          <p:cNvSpPr/>
+          <p:nvPr/>
+        </p:nvSpPr>
+        <p:spPr>
+          <a:xfrm>
+            <a:off x="8046720" y="1463040"/>
+            <a:ext cx="3474720" cy="4480560"/>
+          </a:xfrm>
+          <a:prstGeom prst="roundRect">
+            <a:avLst>
+              <a:gd name="adj" fmla="val 2105"/>
+            </a:avLst>
+          </a:prstGeom>
+          <a:solidFill>
+            <a:schemeClr val="bg2"/>
+          </a:solidFill>
+          <a:ln/>
+        </p:spPr>
+      </p:sp>
+      <p:sp>
+        <p:nvSpPr>
+          <p:cNvPr id="18" name="Text 16"/>
+          <p:cNvSpPr txBox="1"/>
+          <p:nvPr/>
+        </p:nvSpPr>
+        <p:spPr>
+          <a:xfrm>
+            <a:off x="8321040" y="1691640"/>
+            <a:ext cx="2926080" cy="457200"/>
+          </a:xfrm>
+          <a:prstGeom prst="rect">
+            <a:avLst/>
+          </a:prstGeom>
+          <a:noFill/>
+          <a:ln/>
+        </p:spPr>
+        <p:txBody>
+          <a:bodyPr wrap="square" lIns="0" tIns="0" rIns="0" bIns="0" rtlCol="0" anchor="ctr"/>
+          <a:lstStyle/>
+          <a:p>
+            <a:pPr indent="0" marL="0">
+              <a:buNone/>
+            </a:pPr>
+            <a:r>
+              <a:rPr lang="en-US" sz="2000" b="1" dirty="0">
+                <a:solidFill>
+                  <a:schemeClr val="tx1"/>
+                </a:solidFill>
+              </a:rPr>
+              <a:t>Distillation</a:t>
+            </a:r>
+            <a:endParaRPr lang="en-US" sz="2000" dirty="0"/>
+          </a:p>
+        </p:txBody>
+      </p:sp>
+      <p:sp>
+        <p:nvSpPr>
+          <p:cNvPr id="19" name="Text 17"/>
+          <p:cNvSpPr txBox="1"/>
+          <p:nvPr/>
+        </p:nvSpPr>
+        <p:spPr>
+          <a:xfrm>
+            <a:off x="8321040" y="2194560"/>
+            <a:ext cx="2926080" cy="822960"/>
+          </a:xfrm>
+          <a:prstGeom prst="rect">
+            <a:avLst/>
+          </a:prstGeom>
+          <a:noFill/>
+          <a:ln/>
+        </p:spPr>
+        <p:txBody>
+          <a:bodyPr wrap="square" lIns="0" tIns="0" rIns="0" bIns="0" rtlCol="0" anchor="ctr"/>
+          <a:lstStyle/>
+          <a:p>
+            <a:pPr indent="0" marL="0">
+              <a:buNone/>
+            </a:pPr>
+            <a:r>
+              <a:rPr lang="en-US" sz="1400" dirty="0">
+                <a:solidFill>
+                  <a:schemeClr val="tx2"/>
+                </a:solidFill>
+              </a:rPr>
+              <a:t>BERT-tiny imite le LoRA corrigé (professeur)</a:t>
+            </a:r>
+            <a:endParaRPr lang="en-US" sz="1400" dirty="0"/>
+          </a:p>
+        </p:txBody>
+      </p:sp>
+      <p:sp>
+        <p:nvSpPr>
+          <p:cNvPr id="20" name="Text 18"/>
+          <p:cNvSpPr txBox="1"/>
+          <p:nvPr/>
+        </p:nvSpPr>
+        <p:spPr>
+          <a:xfrm>
+            <a:off x="8321040" y="3063240"/>
+            <a:ext cx="2926080" cy="685800"/>
+          </a:xfrm>
+          <a:prstGeom prst="rect">
+            <a:avLst/>
+          </a:prstGeom>
+          <a:noFill/>
+          <a:ln/>
+        </p:spPr>
+        <p:txBody>
+          <a:bodyPr wrap="square" lIns="0" tIns="0" rIns="0" bIns="0" rtlCol="0" anchor="ctr"/>
+          <a:lstStyle/>
+          <a:p>
+            <a:pPr indent="0" marL="0">
+              <a:buNone/>
+            </a:pPr>
+            <a:r>
+              <a:rPr lang="en-US" sz="4000" b="1" dirty="0">
+                <a:solidFill>
+                  <a:schemeClr val="accent2"/>
+                </a:solidFill>
+                <a:latin typeface="Cambria" pitchFamily="34" charset="0"/>
+                <a:ea typeface="Cambria" pitchFamily="34" charset="-122"/>
+                <a:cs typeface="Cambria" pitchFamily="34" charset="-120"/>
+              </a:rPr>
+              <a:t>4,4 M</a:t>
+            </a:r>
+            <a:endParaRPr lang="en-US" sz="4000" dirty="0"/>
+          </a:p>
+        </p:txBody>
+      </p:sp>
+      <p:sp>
+        <p:nvSpPr>
+          <p:cNvPr id="21" name="Text 19"/>
+          <p:cNvSpPr txBox="1"/>
+          <p:nvPr/>
+        </p:nvSpPr>
+        <p:spPr>
+          <a:xfrm>
+            <a:off x="8321040" y="3749040"/>
+            <a:ext cx="2926080" cy="320040"/>
+          </a:xfrm>
+          <a:prstGeom prst="rect">
+            <a:avLst/>
+          </a:prstGeom>
+          <a:noFill/>
+          <a:ln/>
+        </p:spPr>
+        <p:txBody>
+          <a:bodyPr wrap="square" lIns="0" tIns="0" rIns="0" bIns="0" rtlCol="0" anchor="ctr"/>
+          <a:lstStyle/>
+          <a:p>
+            <a:pPr indent="0" marL="0">
+              <a:buNone/>
+            </a:pPr>
+            <a:r>
+              <a:rPr lang="en-US" sz="1200" dirty="0">
+                <a:solidFill>
+                  <a:schemeClr val="accent5"/>
+                </a:solidFill>
+              </a:rPr>
+              <a:t>paramètres entraînés</a:t>
+            </a:r>
+            <a:endParaRPr lang="en-US" sz="1200" dirty="0"/>
+          </a:p>
+        </p:txBody>
+      </p:sp>
+      <p:sp>
+        <p:nvSpPr>
+          <p:cNvPr id="22" name="Text 20"/>
+          <p:cNvSpPr txBox="1"/>
+          <p:nvPr/>
+        </p:nvSpPr>
+        <p:spPr>
+          <a:xfrm>
+            <a:off x="8321040" y="4114800"/>
+            <a:ext cx="2926080" cy="365760"/>
+          </a:xfrm>
+          <a:prstGeom prst="rect">
+            <a:avLst/>
+          </a:prstGeom>
+          <a:noFill/>
+          <a:ln/>
+        </p:spPr>
+        <p:txBody>
+          <a:bodyPr wrap="square" lIns="0" tIns="0" rIns="0" bIns="0" rtlCol="0" anchor="ctr"/>
+          <a:lstStyle/>
+          <a:p>
+            <a:pPr indent="0" marL="0">
+              <a:buNone/>
+            </a:pPr>
+            <a:r>
+              <a:rPr lang="en-US" sz="1600" b="1" dirty="0">
+                <a:solidFill>
+                  <a:schemeClr val="tx1"/>
+                </a:solidFill>
+              </a:rPr>
+              <a:t>18 Mo sur disque</a:t>
+            </a:r>
+            <a:endParaRPr lang="en-US" sz="1600" dirty="0"/>
+          </a:p>
+        </p:txBody>
+      </p:sp>
+      <p:sp>
+        <p:nvSpPr>
+          <p:cNvPr id="23" name="Text 21"/>
+          <p:cNvSpPr txBox="1"/>
+          <p:nvPr/>
+        </p:nvSpPr>
+        <p:spPr>
+          <a:xfrm>
+            <a:off x="8321040" y="4572000"/>
+            <a:ext cx="2926080" cy="914400"/>
+          </a:xfrm>
+          <a:prstGeom prst="rect">
+            <a:avLst/>
+          </a:prstGeom>
+          <a:noFill/>
+          <a:ln/>
+        </p:spPr>
+        <p:txBody>
+          <a:bodyPr wrap="square" lIns="0" tIns="0" rIns="0" bIns="0" rtlCol="0" anchor="ctr"/>
+          <a:lstStyle/>
+          <a:p>
+            <a:pPr indent="0" marL="0">
+              <a:buNone/>
+            </a:pPr>
+            <a:r>
+              <a:rPr lang="en-US" sz="1400" i="1" dirty="0">
+                <a:solidFill>
+                  <a:schemeClr val="tx2"/>
+                </a:solidFill>
+              </a:rPr>
+              <a:t>Petit modèle à exécuter, dépend du professeur</a:t>
+            </a:r>
+            <a:endParaRPr lang="en-US" sz="1400" dirty="0"/>
+          </a:p>
+        </p:txBody>
+      </p:sp>
+      <p:sp>
+        <p:nvSpPr>
+          <p:cNvPr id="24" name="Text 22"/>
+          <p:cNvSpPr txBox="1"/>
+          <p:nvPr/>
+        </p:nvSpPr>
+        <p:spPr>
+          <a:xfrm>
+            <a:off x="548640" y="6035040"/>
+            <a:ext cx="11064240" cy="320040"/>
+          </a:xfrm>
+          <a:prstGeom prst="rect">
+            <a:avLst/>
+          </a:prstGeom>
+          <a:noFill/>
+          <a:ln/>
+        </p:spPr>
+        <p:txBody>
+          <a:bodyPr wrap="square" lIns="0" tIns="0" rIns="0" bIns="0" rtlCol="0" anchor="ctr"/>
+          <a:lstStyle/>
+          <a:p>
+            <a:pPr indent="0" marL="0">
+              <a:buNone/>
+            </a:pPr>
+            <a:r>
+              <a:rPr lang="en-US" sz="1300" dirty="0">
+                <a:solidFill>
+                  <a:schemeClr val="accent5"/>
+                </a:solidFill>
+              </a:rPr>
+              <a:t>Même protocole : 3 epochs, même échantillon, versions avant et après correction.</a:t>
+            </a:r>
+            <a:endParaRPr lang="en-US" sz="1300" dirty="0"/>
+          </a:p>
+        </p:txBody>
+      </p:sp>
+      <p:sp>
+        <p:nvSpPr>
+          <p:cNvPr id="25" name="Slide Number Placeholder 0"/>
+          <p:cNvSpPr>
+            <a:spLocks noGrp="1"/>
+          </p:cNvSpPr>
+          <p:nvPr>
+            <p:ph type="sldNum" sz="quarter" idx="4294967295"/>
+          </p:nvPr>
+        </p:nvSpPr>
+        <p:spPr>
+          <a:xfrm>
+            <a:off x="11155680" y="6400800"/>
+            <a:ext cx="457200" cy="274320"/>
+          </a:xfrm>
+          <a:prstGeom prst="rect">
+            <a:avLst/>
+          </a:prstGeom>
+          <a:extLst>
+            <a:ext uri="{C572A759-6A51-4108-AA02-DFA0A04FC94B}">
+              <ma14:wrappingTextBoxFlag xmlns:ma14="http://schemas.microsoft.com/office/mac/drawingml/2011/main" val="0"/>
+            </a:ext>
+          </a:extLst>
+        </p:spPr>
+        <p:txBody>
+          <a:bodyPr/>
+          <a:lstStyle>
+            <a:lvl1pPr>
+              <a:defRPr sz="1000">
+                <a:solidFill>
+                  <a:srgbClr val="8E93B5"/>
+                </a:solidFill>
+              </a:defRPr>
+            </a:lvl1pPr>
+          </a:lstStyle>
+          <a:p>
+            <a:pPr algn="l"/>
+            <a:fld id="{F7021451-1387-4CA6-816F-3879F97B5CBC}" type="slidenum">
+              <a:rPr b="0" lang="en-US"/>
+              <a:t>7</a:t>
+            </a:fld>
+            <a:endParaRPr lang="en-US"/>
+          </a:p>
+        </p:txBody>
+      </p:sp>
+    </p:spTree>
+  </p:cSld>
+  <p:clrMapOvr>
+    <a:masterClrMapping/>
+  </p:clrMapOvr>
+</p:sld>
+</file>
+
+<file path=ppt/slides/slide8.xml><?xml version="1.0" encoding="utf-8"?>
+<p:sld xmlns:a="http://schemas.openxmlformats.org/drawingml/2006/main" xmlns:r="http://schemas.openxmlformats.org/officeDocument/2006/relationships" xmlns:p="http://schemas.openxmlformats.org/presentationml/2006/main">
+  <p:cSld name="Slide 8">
+    <p:spTree>
+      <p:nvGrpSpPr>
+        <p:cNvPr id="1" name=""/>
+        <p:cNvGrpSpPr/>
+        <p:nvPr/>
+      </p:nvGrpSpPr>
+      <p:grpSpPr>
+        <a:xfrm>
+          <a:off x="0" y="0"/>
+          <a:ext cx="0" cy="0"/>
+          <a:chOff x="0" y="0"/>
+          <a:chExt cx="0" cy="0"/>
+        </a:xfrm>
+      </p:grpSpPr>
+      <p:sp>
+        <p:nvSpPr>
+          <p:cNvPr id="2" name="Text 0"/>
+          <p:cNvSpPr/>
+          <p:nvPr>
+            <p:ph idx="100" type="title" hasCustomPrompt="1"/>
+          </p:nvPr>
+        </p:nvSpPr>
+        <p:spPr>
+          <a:xfrm>
+            <a:off x="548640" y="274320"/>
+            <a:ext cx="11064240" cy="914400"/>
+          </a:xfrm>
+          <a:prstGeom prst="rect">
+            <a:avLst/>
+          </a:prstGeom>
+          <a:noFill/>
+          <a:ln/>
+        </p:spPr>
+        <p:txBody>
+          <a:bodyPr wrap="square" rtlCol="0" anchor="ctr"/>
+          <a:lstStyle/>
+          <a:p>
+            <a:pPr indent="0" marL="0">
+              <a:buNone/>
+            </a:pPr>
+            <a:r>
+              <a:rPr lang="en-US" sz="3600" b="1" dirty="0">
+                <a:solidFill>
+                  <a:schemeClr val="tx1"/>
+                </a:solidFill>
+                <a:latin typeface="Cambria" pitchFamily="34" charset="0"/>
+                <a:ea typeface="Cambria" pitchFamily="34" charset="-122"/>
+                <a:cs typeface="Cambria" pitchFamily="34" charset="-120"/>
+              </a:rPr>
               <a:t>Benchmark : la correction coûte peu en performance</a:t>
             </a:r>
-            <a:endParaRPr lang="en-US" sz="3200" dirty="0"/>
+            <a:endParaRPr lang="en-US" sz="3600" dirty="0"/>
           </a:p>
         </p:txBody>
       </p:sp>
       <p:graphicFrame>
         <p:nvGraphicFramePr>
-          <p:cNvPr id="8" name="Table 0"/>
+          <p:cNvPr id="9" name="Table 0"/>
           <p:cNvGraphicFramePr>
             <a:graphicFrameLocks noGrp="1"/>
           </p:cNvGraphicFramePr>
@@ -12644,185 +13802,6 @@
             <a:pPr algn="l"/>
             <a:fld id="{F7021451-1387-4CA6-816F-3879F97B5CBC}" type="slidenum">
               <a:rPr b="0" lang="en-US"/>
-              <a:t>7</a:t>
-            </a:fld>
-            <a:endParaRPr lang="en-US"/>
-          </a:p>
-        </p:txBody>
-      </p:sp>
-    </p:spTree>
-  </p:cSld>
-  <p:clrMapOvr>
-    <a:masterClrMapping/>
-  </p:clrMapOvr>
-</p:sld>
-</file>
-
-<file path=ppt/slides/slide8.xml><?xml version="1.0" encoding="utf-8"?>
-<p:sld xmlns:a="http://schemas.openxmlformats.org/drawingml/2006/main" xmlns:r="http://schemas.openxmlformats.org/officeDocument/2006/relationships" xmlns:p="http://schemas.openxmlformats.org/presentationml/2006/main">
-  <p:cSld name="Slide 8">
-    <p:spTree>
-      <p:nvGrpSpPr>
-        <p:cNvPr id="1" name=""/>
-        <p:cNvGrpSpPr/>
-        <p:nvPr/>
-      </p:nvGrpSpPr>
-      <p:grpSpPr>
-        <a:xfrm>
-          <a:off x="0" y="0"/>
-          <a:ext cx="0" cy="0"/>
-          <a:chOff x="0" y="0"/>
-          <a:chExt cx="0" cy="0"/>
-        </a:xfrm>
-      </p:grpSpPr>
-      <p:sp>
-        <p:nvSpPr>
-          <p:cNvPr id="2" name="Text 0"/>
-          <p:cNvSpPr/>
-          <p:nvPr>
-            <p:ph idx="100" type="title" hasCustomPrompt="1"/>
-          </p:nvPr>
-        </p:nvSpPr>
-        <p:spPr>
-          <a:xfrm>
-            <a:off x="548640" y="320040"/>
-            <a:ext cx="11064240" cy="822960"/>
-          </a:xfrm>
-          <a:prstGeom prst="rect">
-            <a:avLst/>
-          </a:prstGeom>
-          <a:noFill/>
-          <a:ln/>
-        </p:spPr>
-        <p:txBody>
-          <a:bodyPr wrap="square" rtlCol="0" anchor="ctr"/>
-          <a:lstStyle/>
-          <a:p>
-            <a:pPr indent="0" marL="0">
-              <a:buNone/>
-            </a:pPr>
-            <a:r>
-              <a:rPr lang="en-US" sz="3200" b="1" dirty="0">
-                <a:solidFill>
-                  <a:schemeClr val="tx1"/>
-                </a:solidFill>
-                <a:latin typeface="Cambria" pitchFamily="34" charset="0"/>
-                <a:ea typeface="Cambria" pitchFamily="34" charset="-122"/>
-                <a:cs typeface="Cambria" pitchFamily="34" charset="-120"/>
-              </a:rPr>
-              <a:t>Après correction, les écarts par sexe s'effondrent</a:t>
-            </a:r>
-            <a:endParaRPr lang="en-US" sz="3200" dirty="0"/>
-          </a:p>
-        </p:txBody>
-      </p:sp>
-      <p:graphicFrame>
-        <p:nvGraphicFramePr>
-          <p:cNvPr id="3" name="Chart 0" descr=""/>
-          <p:cNvGraphicFramePr/>
-          <p:nvPr/>
-        </p:nvGraphicFramePr>
-        <p:xfrm>
-          <a:off x="548640" y="1371600"/>
-          <a:ext cx="5486400" cy="4206240"/>
-        </p:xfrm>
-        <a:graphic xmlns:a="http://schemas.openxmlformats.org/drawingml/2006/main">
-          <a:graphicData uri="http://schemas.openxmlformats.org/drawingml/2006/chart">
-            <c:chart xmlns:c="http://schemas.openxmlformats.org/drawingml/2006/chart" r:id="rId1"/>
-          </a:graphicData>
-        </a:graphic>
-      </p:graphicFrame>
-      <p:graphicFrame>
-        <p:nvGraphicFramePr>
-          <p:cNvPr id="4" name="Chart 1" descr=""/>
-          <p:cNvGraphicFramePr/>
-          <p:nvPr/>
-        </p:nvGraphicFramePr>
-        <p:xfrm>
-          <a:off x="6309360" y="1371600"/>
-          <a:ext cx="5303520" cy="4206240"/>
-        </p:xfrm>
-        <a:graphic xmlns:a="http://schemas.openxmlformats.org/drawingml/2006/main">
-          <a:graphicData uri="http://schemas.openxmlformats.org/drawingml/2006/chart">
-            <c:chart xmlns:c="http://schemas.openxmlformats.org/drawingml/2006/chart" r:id="rId2"/>
-          </a:graphicData>
-        </a:graphic>
-      </p:graphicFrame>
-      <p:sp>
-        <p:nvSpPr>
-          <p:cNvPr id="5" name="Text 1"/>
-          <p:cNvSpPr txBox="1"/>
-          <p:nvPr/>
-        </p:nvSpPr>
-        <p:spPr>
-          <a:xfrm>
-            <a:off x="548640" y="5715000"/>
-            <a:ext cx="11064240" cy="411480"/>
-          </a:xfrm>
-          <a:prstGeom prst="rect">
-            <a:avLst/>
-          </a:prstGeom>
-          <a:noFill/>
-          <a:ln/>
-        </p:spPr>
-        <p:txBody>
-          <a:bodyPr wrap="square" lIns="0" tIns="0" rIns="0" bIns="0" rtlCol="0" anchor="ctr"/>
-          <a:lstStyle/>
-          <a:p>
-            <a:pPr indent="0" marL="0">
-              <a:buNone/>
-            </a:pPr>
-            <a:r>
-              <a:rPr lang="en-US" sz="1400" i="1" dirty="0">
-                <a:solidFill>
-                  <a:schemeClr val="tx2"/>
-                </a:solidFill>
-              </a:rPr>
-              <a:t>L'écart par origine baisse moins : 0,34 → 0,32 pour LoRA, 0,23 → 0,13 pour le fine-tuning complet.</a:t>
-            </a:r>
-            <a:endParaRPr lang="en-US" sz="1400" dirty="0"/>
-          </a:p>
-        </p:txBody>
-      </p:sp>
-      <p:sp>
-        <p:nvSpPr>
-          <p:cNvPr id="25" name="Slide Number Placeholder 0"/>
-          <p:cNvSpPr>
-            <a:spLocks noGrp="1"/>
-          </p:cNvSpPr>
-          <p:nvPr>
-            <p:ph type="sldNum" sz="quarter" idx="4294967295"/>
-          </p:nvPr>
-        </p:nvSpPr>
-        <p:spPr>
-          <a:xfrm>
-            <a:off x="11155680" y="6400800"/>
-            <a:ext cx="457200" cy="274320"/>
-          </a:xfrm>
-          <a:prstGeom prst="rect">
-            <a:avLst/>
-          </a:prstGeom>
-          <a:extLst>
-            <a:ext uri="{C572A759-6A51-4108-AA02-DFA0A04FC94B}">
-              <ma14:wrappingTextBoxFlag xmlns:ma14="http://schemas.microsoft.com/office/mac/drawingml/2011/main" val="0"/>
-            </a:ext>
-          </a:extLst>
-        </p:spPr>
-        <p:txBody>
-          <a:bodyPr/>
-          <a:lstStyle>
-            <a:lvl1pPr>
-              <a:defRPr sz="1000">
-                <a:solidFill>
-                  <a:srgbClr val="8E93B5"/>
-                </a:solidFill>
-              </a:defRPr>
-            </a:lvl1pPr>
-          </a:lstStyle>
-          <a:p>
-            <a:pPr algn="l"/>
-            <a:fld id="{F7021451-1387-4CA6-816F-3879F97B5CBC}" type="slidenum">
-              <a:rPr b="0" lang="en-US"/>
               <a:t>8</a:t>
             </a:fld>
             <a:endParaRPr lang="en-US"/>
@@ -12864,8 +13843,8 @@
         </p:nvSpPr>
         <p:spPr>
           <a:xfrm>
-            <a:off x="548640" y="320040"/>
-            <a:ext cx="11064240" cy="822960"/>
+            <a:off x="548640" y="274320"/>
+            <a:ext cx="11064240" cy="914400"/>
           </a:xfrm>
           <a:prstGeom prst="rect">
             <a:avLst/>
@@ -12881,7 +13860,7 @@
               <a:buNone/>
             </a:pPr>
             <a:r>
-              <a:rPr lang="en-US" sz="3200" b="1" dirty="0">
+              <a:rPr lang="en-US" sz="3600" b="1" dirty="0">
                 <a:solidFill>
                   <a:schemeClr val="tx1"/>
                 </a:solidFill>
@@ -12889,46 +13868,54 @@
                 <a:ea typeface="Cambria" pitchFamily="34" charset="-122"/>
                 <a:cs typeface="Cambria" pitchFamily="34" charset="-120"/>
               </a:rPr>
-              <a:t>Sans correction, aucune femme n'est prédite à &gt;50K</a:t>
-            </a:r>
-            <a:endParaRPr lang="en-US" sz="3200" dirty="0"/>
-          </a:p>
-        </p:txBody>
-      </p:sp>
-      <p:pic>
-        <p:nvPicPr>
-          <p:cNvPr id="3" name="Image 0" descr="preencoded.png">    </p:cNvPr>
-          <p:cNvPicPr>
-            <a:picLocks noChangeAspect="1"/>
-          </p:cNvPicPr>
-          <p:nvPr/>
-        </p:nvPicPr>
-        <p:blipFill>
-          <a:blip r:embed="rId1"/>
-          <a:stretch>
-            <a:fillRect/>
-          </a:stretch>
-        </p:blipFill>
-        <p:spPr>
-          <a:xfrm>
-            <a:off x="548640" y="1371600"/>
-            <a:ext cx="11064240" cy="2627125"/>
-          </a:xfrm>
-          <a:prstGeom prst="rect">
-            <a:avLst/>
-          </a:prstGeom>
-        </p:spPr>
-      </p:pic>
-      <p:sp>
-        <p:nvSpPr>
-          <p:cNvPr id="4" name="Text 1"/>
+              <a:t>Après correction, les écarts par sexe s'effondrent</a:t>
+            </a:r>
+            <a:endParaRPr lang="en-US" sz="3600" dirty="0"/>
+          </a:p>
+        </p:txBody>
+      </p:sp>
+      <p:graphicFrame>
+        <p:nvGraphicFramePr>
+          <p:cNvPr id="3" name="Chart 0" descr=""/>
+          <p:cNvGraphicFramePr/>
+          <p:nvPr/>
+        </p:nvGraphicFramePr>
+        <p:xfrm>
+          <a:off x="548640" y="1371600"/>
+          <a:ext cx="5486400" cy="4206240"/>
+        </p:xfrm>
+        <a:graphic xmlns:a="http://schemas.openxmlformats.org/drawingml/2006/main">
+          <a:graphicData uri="http://schemas.openxmlformats.org/drawingml/2006/chart">
+            <c:chart xmlns:c="http://schemas.openxmlformats.org/drawingml/2006/chart" r:id="rId1"/>
+          </a:graphicData>
+        </a:graphic>
+      </p:graphicFrame>
+      <p:graphicFrame>
+        <p:nvGraphicFramePr>
+          <p:cNvPr id="4" name="Chart 1" descr=""/>
+          <p:cNvGraphicFramePr/>
+          <p:nvPr/>
+        </p:nvGraphicFramePr>
+        <p:xfrm>
+          <a:off x="6309360" y="1371600"/>
+          <a:ext cx="5303520" cy="4206240"/>
+        </p:xfrm>
+        <a:graphic xmlns:a="http://schemas.openxmlformats.org/drawingml/2006/main">
+          <a:graphicData uri="http://schemas.openxmlformats.org/drawingml/2006/chart">
+            <c:chart xmlns:c="http://schemas.openxmlformats.org/drawingml/2006/chart" r:id="rId2"/>
+          </a:graphicData>
+        </a:graphic>
+      </p:graphicFrame>
+      <p:sp>
+        <p:nvSpPr>
+          <p:cNvPr id="5" name="Text 1"/>
           <p:cNvSpPr txBox="1"/>
           <p:nvPr/>
         </p:nvSpPr>
         <p:spPr>
           <a:xfrm>
-            <a:off x="548640" y="4206240"/>
-            <a:ext cx="5303520" cy="731520"/>
+            <a:off x="548640" y="5715000"/>
+            <a:ext cx="11064240" cy="411480"/>
           </a:xfrm>
           <a:prstGeom prst="rect">
             <a:avLst/>
@@ -12944,128 +13931,14 @@
               <a:buNone/>
             </a:pPr>
             <a:r>
-              <a:rPr lang="en-US" sz="4000" b="1" dirty="0">
-                <a:solidFill>
-                  <a:schemeClr val="accent3"/>
-                </a:solidFill>
-                <a:latin typeface="Cambria" pitchFamily="34" charset="0"/>
-                <a:ea typeface="Cambria" pitchFamily="34" charset="-122"/>
-                <a:cs typeface="Cambria" pitchFamily="34" charset="-120"/>
-              </a:rPr>
-              <a:t>0 %</a:t>
-            </a:r>
-            <a:endParaRPr lang="en-US" sz="4000" dirty="0"/>
-          </a:p>
-        </p:txBody>
-      </p:sp>
-      <p:sp>
-        <p:nvSpPr>
-          <p:cNvPr id="5" name="Text 2"/>
-          <p:cNvSpPr txBox="1"/>
-          <p:nvPr/>
-        </p:nvSpPr>
-        <p:spPr>
-          <a:xfrm>
-            <a:off x="548640" y="4937760"/>
-            <a:ext cx="5303520" cy="731520"/>
-          </a:xfrm>
-          <a:prstGeom prst="rect">
-            <a:avLst/>
-          </a:prstGeom>
-          <a:noFill/>
-          <a:ln/>
-        </p:spPr>
-        <p:txBody>
-          <a:bodyPr wrap="square" lIns="0" tIns="0" rIns="0" bIns="0" rtlCol="0" anchor="ctr"/>
-          <a:lstStyle/>
-          <a:p>
-            <a:pPr indent="0" marL="0">
-              <a:buNone/>
-            </a:pPr>
-            <a:r>
-              <a:rPr lang="en-US" sz="1500" dirty="0">
+              <a:rPr lang="en-US" sz="1400" i="1" dirty="0">
                 <a:solidFill>
                   <a:schemeClr val="tx2"/>
                 </a:solidFill>
               </a:rPr>
-              <a:t>des femmes prédites &gt;50K par le LoRA original (réalité : 13 % des femmes blanches)</a:t>
-            </a:r>
-            <a:endParaRPr lang="en-US" sz="1500" dirty="0"/>
-          </a:p>
-        </p:txBody>
-      </p:sp>
-      <p:sp>
-        <p:nvSpPr>
-          <p:cNvPr id="6" name="Text 3"/>
-          <p:cNvSpPr txBox="1"/>
-          <p:nvPr/>
-        </p:nvSpPr>
-        <p:spPr>
-          <a:xfrm>
-            <a:off x="6217920" y="4206240"/>
-            <a:ext cx="5303520" cy="731520"/>
-          </a:xfrm>
-          <a:prstGeom prst="rect">
-            <a:avLst/>
-          </a:prstGeom>
-          <a:noFill/>
-          <a:ln/>
-        </p:spPr>
-        <p:txBody>
-          <a:bodyPr wrap="square" lIns="0" tIns="0" rIns="0" bIns="0" rtlCol="0" anchor="ctr"/>
-          <a:lstStyle/>
-          <a:p>
-            <a:pPr indent="0" marL="0">
-              <a:buNone/>
-            </a:pPr>
-            <a:r>
-              <a:rPr lang="en-US" sz="4000" b="1" dirty="0">
-                <a:solidFill>
-                  <a:schemeClr val="accent2"/>
-                </a:solidFill>
-                <a:latin typeface="Cambria" pitchFamily="34" charset="0"/>
-                <a:ea typeface="Cambria" pitchFamily="34" charset="-122"/>
-                <a:cs typeface="Cambria" pitchFamily="34" charset="-120"/>
-              </a:rPr>
-              <a:t>15 % vs 17 %</a:t>
-            </a:r>
-            <a:endParaRPr lang="en-US" sz="4000" dirty="0"/>
-          </a:p>
-        </p:txBody>
-      </p:sp>
-      <p:sp>
-        <p:nvSpPr>
-          <p:cNvPr id="7" name="Text 4"/>
-          <p:cNvSpPr txBox="1"/>
-          <p:nvPr/>
-        </p:nvSpPr>
-        <p:spPr>
-          <a:xfrm>
-            <a:off x="6217920" y="4937760"/>
-            <a:ext cx="5303520" cy="731520"/>
-          </a:xfrm>
-          <a:prstGeom prst="rect">
-            <a:avLst/>
-          </a:prstGeom>
-          <a:noFill/>
-          <a:ln/>
-        </p:spPr>
-        <p:txBody>
-          <a:bodyPr wrap="square" lIns="0" tIns="0" rIns="0" bIns="0" rtlCol="0" anchor="ctr"/>
-          <a:lstStyle/>
-          <a:p>
-            <a:pPr indent="0" marL="0">
-              <a:buNone/>
-            </a:pPr>
-            <a:r>
-              <a:rPr lang="en-US" sz="1500" dirty="0">
-                <a:solidFill>
-                  <a:schemeClr val="tx2"/>
-                </a:solidFill>
-              </a:rPr>
-              <a:t>femmes vs hommes blancs après correction : l'écart presque disparaît</a:t>
-            </a:r>
-            <a:endParaRPr lang="en-US" sz="1500" dirty="0"/>
+              <a:t>L'écart par origine baisse moins : 0,34 → 0,32 pour LoRA, 0,23 → 0,13 pour le fine-tuning complet.</a:t>
+            </a:r>
+            <a:endParaRPr lang="en-US" sz="1400" dirty="0"/>
           </a:p>
         </p:txBody>
       </p:sp>
